--- a/assets/training/mhn-icbd-night-2.pptx
+++ b/assets/training/mhn-icbd-night-2.pptx
@@ -6558,7 +6558,7 @@
                 <a:ea typeface="Arial" pitchFamily="34" charset="-122"/>
                 <a:cs typeface="Arial" pitchFamily="34" charset="-120"/>
               </a:rPr>
-              <a:t>ONLINE NIGHT 2  ·  5:30 PM – 8:00 PM CST</a:t>
+              <a:t>ONLINE NIGHT 2  ·  5-30 PM: 8-00 PM CST</a:t>
             </a:r>
             <a:endParaRPr lang="en-US" sz="1200" dirty="0"/>
           </a:p>
@@ -6853,7 +6853,7 @@
                 <a:ea typeface="Georgia" pitchFamily="34" charset="-122"/>
                 <a:cs typeface="Georgia" pitchFamily="34" charset="-120"/>
               </a:rPr>
-              <a:t>Transition — The Peak</a:t>
+              <a:t>Transition: The Peak</a:t>
             </a:r>
             <a:endParaRPr lang="en-US" sz="3200" dirty="0"/>
           </a:p>
@@ -6906,7 +6906,7 @@
         </p:nvSpPr>
         <p:spPr>
           <a:xfrm>
-            <a:off x="914400" y="1536192"/>
+            <a:off x="914400" y="1389887"/>
             <a:ext cx="7315200" cy="3364992"/>
           </a:xfrm>
           <a:prstGeom prst="rect">
@@ -6964,7 +6964,7 @@
         </p:nvSpPr>
         <p:spPr>
           <a:xfrm>
-            <a:off x="1231075" y="1645920"/>
+            <a:off x="1231075" y="1499616"/>
             <a:ext cx="6650181" cy="256032"/>
           </a:xfrm>
           <a:prstGeom prst="rect">
@@ -7003,7 +7003,7 @@
         </p:nvSpPr>
         <p:spPr>
           <a:xfrm>
-            <a:off x="1231075" y="1956816"/>
+            <a:off x="1231075" y="1810512"/>
             <a:ext cx="6681849" cy="2834640"/>
           </a:xfrm>
           <a:prstGeom prst="rect">
@@ -7036,7 +7036,7 @@
                 <a:ea typeface="Arial" pitchFamily="34" charset="-122"/>
                 <a:cs typeface="Arial" pitchFamily="34" charset="-120"/>
               </a:rPr>
-              <a:t>Dilation: 8–10 cm</a:t>
+              <a:t>Dilation: 8-10 cm</a:t>
             </a:r>
             <a:endParaRPr lang="en-US" sz="1400" dirty="0"/>
           </a:p>
@@ -7061,7 +7061,7 @@
                 <a:ea typeface="Arial" pitchFamily="34" charset="-122"/>
                 <a:cs typeface="Arial" pitchFamily="34" charset="-120"/>
               </a:rPr>
-              <a:t>Contractions every 1–3 min</a:t>
+              <a:t>Contractions every 1-3 min</a:t>
             </a:r>
             <a:endParaRPr lang="en-US" sz="1400" dirty="0"/>
           </a:p>
@@ -7111,7 +7111,7 @@
                 <a:ea typeface="Arial" pitchFamily="34" charset="-122"/>
                 <a:cs typeface="Arial" pitchFamily="34" charset="-120"/>
               </a:rPr>
-              <a:t>"Labor land" — altered state</a:t>
+              <a:t>"Labor land": altered state</a:t>
             </a:r>
             <a:endParaRPr lang="en-US" sz="1400" dirty="0"/>
           </a:p>
@@ -7136,7 +7136,7 @@
                 <a:ea typeface="Arial" pitchFamily="34" charset="-122"/>
                 <a:cs typeface="Arial" pitchFamily="34" charset="-120"/>
               </a:rPr>
-              <a:t>Duration: 20–90 minutes</a:t>
+              <a:t>Duration: 20-90 minutes</a:t>
             </a:r>
             <a:endParaRPr lang="en-US" sz="1400" dirty="0"/>
           </a:p>
@@ -7296,7 +7296,7 @@
                 <a:ea typeface="Georgia" pitchFamily="34" charset="-122"/>
                 <a:cs typeface="Georgia" pitchFamily="34" charset="-120"/>
               </a:rPr>
-              <a:t>Transition — The Peak</a:t>
+              <a:t>Transition: The Peak</a:t>
             </a:r>
             <a:endParaRPr lang="en-US" sz="3200" dirty="0"/>
           </a:p>
@@ -7349,8 +7349,8 @@
         </p:nvSpPr>
         <p:spPr>
           <a:xfrm>
-            <a:off x="914400" y="1536192"/>
-            <a:ext cx="7315200" cy="3364992"/>
+            <a:off x="914400" y="1645921"/>
+            <a:ext cx="7315200" cy="3108959"/>
           </a:xfrm>
           <a:prstGeom prst="rect">
             <a:avLst/>
@@ -7432,7 +7432,7 @@
                 <a:ea typeface="Arial" pitchFamily="34" charset="-122"/>
                 <a:cs typeface="Arial" pitchFamily="34" charset="-120"/>
               </a:rPr>
-              <a:t>Doula Scripts — The Transition Anchor</a:t>
+              <a:t>Doula Scripts: The Transition Anchor</a:t>
             </a:r>
             <a:endParaRPr lang="en-US" sz="1400" dirty="0"/>
           </a:p>
@@ -7446,7 +7446,7 @@
         </p:nvSpPr>
         <p:spPr>
           <a:xfrm>
-            <a:off x="1199407" y="1993392"/>
+            <a:off x="1199407" y="1810513"/>
             <a:ext cx="6713516" cy="1280160"/>
           </a:xfrm>
           <a:prstGeom prst="rect">
@@ -7474,7 +7474,7 @@
                 <a:ea typeface="Georgia" pitchFamily="34" charset="-122"/>
                 <a:cs typeface="Georgia" pitchFamily="34" charset="-120"/>
               </a:rPr>
-              <a:t>You ARE doing it. Right now. This is the hardest part — and you're already in it. Look at me. Breathe with me. One contraction at a time. Just this one.</a:t>
+              <a:t>You ARE doing it. Right now. This is the hardest part, and you're already in it. Look at me. Breathe with me. One contraction at a time. Just this one.</a:t>
             </a:r>
             <a:endParaRPr lang="en-US" sz="1400" dirty="0"/>
           </a:p>
@@ -7488,7 +7488,7 @@
         </p:nvSpPr>
         <p:spPr>
           <a:xfrm>
-            <a:off x="1199407" y="3364992"/>
+            <a:off x="1199407" y="3182113"/>
             <a:ext cx="6713516" cy="237744"/>
           </a:xfrm>
           <a:prstGeom prst="rect">
@@ -7527,7 +7527,7 @@
         </p:nvSpPr>
         <p:spPr>
           <a:xfrm>
-            <a:off x="1199407" y="3639312"/>
+            <a:off x="1199407" y="3456433"/>
             <a:ext cx="6713516" cy="1133856"/>
           </a:xfrm>
           <a:prstGeom prst="rect">
@@ -7555,7 +7555,7 @@
                 <a:ea typeface="Georgia" pitchFamily="34" charset="-122"/>
                 <a:cs typeface="Georgia" pitchFamily="34" charset="-120"/>
               </a:rPr>
-              <a:t>I hear you. And you ARE doing it. This is transition — which means you're almost there. Your baby is almost here.</a:t>
+              <a:t>I hear you. And you ARE doing it. This is transition: which means you're almost there. Your baby is almost here.</a:t>
             </a:r>
             <a:endParaRPr lang="en-US" sz="1400" dirty="0"/>
           </a:p>
@@ -7736,7 +7736,7 @@
                 <a:ea typeface="Georgia" pitchFamily="34" charset="-122"/>
                 <a:cs typeface="Georgia" pitchFamily="34" charset="-120"/>
               </a:rPr>
-              <a:t>Stage 2 — Pushing &amp; Birth</a:t>
+              <a:t>Stage 2: Pushing &amp; Birth</a:t>
             </a:r>
             <a:endParaRPr lang="en-US" sz="3200" dirty="0"/>
           </a:p>
@@ -7775,7 +7775,7 @@
                 <a:ea typeface="Georgia" pitchFamily="34" charset="-122"/>
                 <a:cs typeface="Georgia" pitchFamily="34" charset="-120"/>
               </a:rPr>
-              <a:t>10 cm to baby in arms. A rush of relief — or the hardest work yet.</a:t>
+              <a:t>10 cm to baby in arms. A rush of relief or the hardest work yet.</a:t>
             </a:r>
             <a:endParaRPr lang="en-US" sz="1400" dirty="0"/>
           </a:p>
@@ -7789,7 +7789,7 @@
         </p:nvSpPr>
         <p:spPr>
           <a:xfrm>
-            <a:off x="914400" y="1536192"/>
+            <a:off x="914400" y="1389887"/>
             <a:ext cx="7315200" cy="3364992"/>
           </a:xfrm>
           <a:prstGeom prst="rect">
@@ -7847,7 +7847,7 @@
         </p:nvSpPr>
         <p:spPr>
           <a:xfrm>
-            <a:off x="1231075" y="1645920"/>
+            <a:off x="1231075" y="1499616"/>
             <a:ext cx="6650181" cy="256032"/>
           </a:xfrm>
           <a:prstGeom prst="rect">
@@ -7886,7 +7886,7 @@
         </p:nvSpPr>
         <p:spPr>
           <a:xfrm>
-            <a:off x="1231075" y="1956816"/>
+            <a:off x="1231075" y="1810512"/>
             <a:ext cx="6681849" cy="2834640"/>
           </a:xfrm>
           <a:prstGeom prst="rect">
@@ -7944,7 +7944,7 @@
                 <a:ea typeface="Arial" pitchFamily="34" charset="-122"/>
                 <a:cs typeface="Arial" pitchFamily="34" charset="-120"/>
               </a:rPr>
-              <a:t>Duration: 30 min – 2 hrs</a:t>
+              <a:t>Duration: 30 min: 2 hrs</a:t>
             </a:r>
             <a:endParaRPr lang="en-US" sz="1400" dirty="0"/>
           </a:p>
@@ -8179,7 +8179,7 @@
                 <a:ea typeface="Georgia" pitchFamily="34" charset="-122"/>
                 <a:cs typeface="Georgia" pitchFamily="34" charset="-120"/>
               </a:rPr>
-              <a:t>Stage 2 — Pushing &amp; Birth</a:t>
+              <a:t>Stage 2: Pushing &amp; Birth</a:t>
             </a:r>
             <a:endParaRPr lang="en-US" sz="3200" dirty="0"/>
           </a:p>
@@ -8218,7 +8218,7 @@
                 <a:ea typeface="Georgia" pitchFamily="34" charset="-122"/>
                 <a:cs typeface="Georgia" pitchFamily="34" charset="-120"/>
               </a:rPr>
-              <a:t>10 cm to baby in arms. A rush of relief — or the hardest work yet.</a:t>
+              <a:t>10 cm to baby in arms. A rush of relief or the hardest work yet.</a:t>
             </a:r>
             <a:endParaRPr lang="en-US" sz="1400" dirty="0"/>
           </a:p>
@@ -8412,7 +8412,7 @@
                 <a:ea typeface="Arial" pitchFamily="34" charset="-122"/>
                 <a:cs typeface="Arial" pitchFamily="34" charset="-120"/>
               </a:rPr>
-              <a:t>Coach the partner — where to stand, what to say</a:t>
+              <a:t>Coach the partner: where to stand, what to say</a:t>
             </a:r>
             <a:endParaRPr lang="en-US" sz="1400" dirty="0"/>
           </a:p>
@@ -8451,8 +8451,8 @@
         </p:nvSpPr>
         <p:spPr>
           <a:xfrm>
-            <a:off x="914400" y="3200400"/>
-            <a:ext cx="7315200" cy="1700784"/>
+            <a:off x="914400" y="3273553"/>
+            <a:ext cx="7315200" cy="1481327"/>
           </a:xfrm>
           <a:prstGeom prst="rect">
             <a:avLst/>
@@ -8534,7 +8534,7 @@
                 <a:ea typeface="Arial" pitchFamily="34" charset="-122"/>
                 <a:cs typeface="Arial" pitchFamily="34" charset="-120"/>
               </a:rPr>
-              <a:t>Doula Script — At Crowning</a:t>
+              <a:t>Doula Script: At Crowning</a:t>
             </a:r>
             <a:endParaRPr lang="en-US" sz="1400" dirty="0"/>
           </a:p>
@@ -8548,7 +8548,7 @@
         </p:nvSpPr>
         <p:spPr>
           <a:xfrm>
-            <a:off x="1199407" y="3657600"/>
+            <a:off x="1199407" y="3438145"/>
             <a:ext cx="6713516" cy="1152144"/>
           </a:xfrm>
           <a:prstGeom prst="rect">
@@ -8576,7 +8576,7 @@
                 <a:ea typeface="Georgia" pitchFamily="34" charset="-122"/>
                 <a:cs typeface="Georgia" pitchFamily="34" charset="-120"/>
               </a:rPr>
-              <a:t>You're almost there. Baby's head is right here. Slow breath — just breathe your baby out. A few more pushes and you'll meet them.</a:t>
+              <a:t>You're almost there. Baby's head is right here. Slow breath: just breathe your baby out. A few more pushes and you'll meet them.</a:t>
             </a:r>
             <a:endParaRPr lang="en-US" sz="1400" dirty="0"/>
           </a:p>
@@ -8757,7 +8757,7 @@
                 <a:ea typeface="Georgia" pitchFamily="34" charset="-122"/>
                 <a:cs typeface="Georgia" pitchFamily="34" charset="-120"/>
               </a:rPr>
-              <a:t>Stage 3 — The Placenta</a:t>
+              <a:t>Stage 3: The Placenta</a:t>
             </a:r>
             <a:endParaRPr lang="en-US" sz="3200" dirty="0"/>
           </a:p>
@@ -8796,7 +8796,7 @@
                 <a:ea typeface="Georgia" pitchFamily="34" charset="-122"/>
                 <a:cs typeface="Georgia" pitchFamily="34" charset="-120"/>
               </a:rPr>
-              <a:t>The only organ the body grows for nine months — and then releases.</a:t>
+              <a:t>The only organ the body grows for nine months, and then releases.</a:t>
             </a:r>
             <a:endParaRPr lang="en-US" sz="1400" dirty="0"/>
           </a:p>
@@ -8810,7 +8810,7 @@
         </p:nvSpPr>
         <p:spPr>
           <a:xfrm>
-            <a:off x="914400" y="1536192"/>
+            <a:off x="914400" y="1389887"/>
             <a:ext cx="7315200" cy="3364992"/>
           </a:xfrm>
           <a:prstGeom prst="rect">
@@ -8868,7 +8868,7 @@
         </p:nvSpPr>
         <p:spPr>
           <a:xfrm>
-            <a:off x="1231075" y="1645920"/>
+            <a:off x="1231075" y="1499616"/>
             <a:ext cx="6650181" cy="256032"/>
           </a:xfrm>
           <a:prstGeom prst="rect">
@@ -8907,7 +8907,7 @@
         </p:nvSpPr>
         <p:spPr>
           <a:xfrm>
-            <a:off x="1231075" y="1956816"/>
+            <a:off x="1231075" y="1810512"/>
             <a:ext cx="6681849" cy="2834640"/>
           </a:xfrm>
           <a:prstGeom prst="rect">
@@ -8965,7 +8965,7 @@
                 <a:ea typeface="Arial" pitchFamily="34" charset="-122"/>
                 <a:cs typeface="Arial" pitchFamily="34" charset="-120"/>
               </a:rPr>
-              <a:t>Duration: 5–30 minutes</a:t>
+              <a:t>Duration: 5-30 minutes</a:t>
             </a:r>
             <a:endParaRPr lang="en-US" sz="1400" dirty="0"/>
           </a:p>
@@ -9200,7 +9200,7 @@
                 <a:ea typeface="Georgia" pitchFamily="34" charset="-122"/>
                 <a:cs typeface="Georgia" pitchFamily="34" charset="-120"/>
               </a:rPr>
-              <a:t>Stage 3 — The Placenta</a:t>
+              <a:t>Stage 3: The Placenta</a:t>
             </a:r>
             <a:endParaRPr lang="en-US" sz="3200" dirty="0"/>
           </a:p>
@@ -9239,7 +9239,7 @@
                 <a:ea typeface="Georgia" pitchFamily="34" charset="-122"/>
                 <a:cs typeface="Georgia" pitchFamily="34" charset="-120"/>
               </a:rPr>
-              <a:t>The only organ the body grows for nine months — and then releases.</a:t>
+              <a:t>The only organ the body grows for nine months, and then releases.</a:t>
             </a:r>
             <a:endParaRPr lang="en-US" sz="1400" dirty="0"/>
           </a:p>
@@ -9253,8 +9253,8 @@
         </p:nvSpPr>
         <p:spPr>
           <a:xfrm>
-            <a:off x="914400" y="1536192"/>
-            <a:ext cx="7315200" cy="1664208"/>
+            <a:off x="914400" y="1737360"/>
+            <a:ext cx="7315200" cy="1554480"/>
           </a:xfrm>
           <a:prstGeom prst="rect">
             <a:avLst/>
@@ -9336,7 +9336,7 @@
                 <a:ea typeface="Arial" pitchFamily="34" charset="-122"/>
                 <a:cs typeface="Arial" pitchFamily="34" charset="-120"/>
               </a:rPr>
-              <a:t>Clinical Note — Delayed Cord Clamping</a:t>
+              <a:t>Clinical Note: Delayed Cord Clamping</a:t>
             </a:r>
             <a:endParaRPr lang="en-US" sz="1400" dirty="0"/>
           </a:p>
@@ -9378,7 +9378,7 @@
                 <a:ea typeface="Arial" pitchFamily="34" charset="-122"/>
                 <a:cs typeface="Arial" pitchFamily="34" charset="-120"/>
               </a:rPr>
-              <a:t>Wait 30–60 seconds (or until cord stops pulsing — 3–5 min) before clamping. Gives baby up to 30% more blood. Lowers anemia risk. Push for this in the birth plan.</a:t>
+              <a:t>Wait 30-60 seconds (or until cord stops pulsing: 3-5 min) before clamping. Gives baby up to 30% more blood. Lowers anemia risk. Push for this in the birth plan.</a:t>
             </a:r>
             <a:endParaRPr lang="en-US" sz="1400" dirty="0"/>
           </a:p>
@@ -9392,7 +9392,7 @@
         </p:nvSpPr>
         <p:spPr>
           <a:xfrm>
-            <a:off x="914400" y="3310128"/>
+            <a:off x="914400" y="3163824"/>
             <a:ext cx="7315200" cy="1591056"/>
           </a:xfrm>
           <a:prstGeom prst="rect">
@@ -9450,7 +9450,7 @@
         </p:nvSpPr>
         <p:spPr>
           <a:xfrm>
-            <a:off x="1231075" y="3419856"/>
+            <a:off x="1231075" y="3273552"/>
             <a:ext cx="6650181" cy="256032"/>
           </a:xfrm>
           <a:prstGeom prst="rect">
@@ -9489,7 +9489,7 @@
         </p:nvSpPr>
         <p:spPr>
           <a:xfrm>
-            <a:off x="1231075" y="3712464"/>
+            <a:off x="1231075" y="3566159"/>
             <a:ext cx="6681849" cy="1152144"/>
           </a:xfrm>
           <a:prstGeom prst="rect">
@@ -9522,7 +9522,7 @@
                 <a:ea typeface="Arial" pitchFamily="34" charset="-122"/>
                 <a:cs typeface="Arial" pitchFamily="34" charset="-120"/>
               </a:rPr>
-              <a:t>Mom is focused on baby — YOU watch for bleeding</a:t>
+              <a:t>Mom is focused on baby: YOU watch for bleeding</a:t>
             </a:r>
             <a:endParaRPr lang="en-US" sz="1400" dirty="0"/>
           </a:p>
@@ -9778,7 +9778,7 @@
                 <a:ea typeface="Georgia" pitchFamily="34" charset="-122"/>
                 <a:cs typeface="Georgia" pitchFamily="34" charset="-120"/>
               </a:rPr>
-              <a:t>Stage 4 — The Golden Hour</a:t>
+              <a:t>Stage 4: The Golden Hour</a:t>
             </a:r>
             <a:endParaRPr lang="en-US" sz="3200" dirty="0"/>
           </a:p>
@@ -9831,7 +9831,7 @@
         </p:nvSpPr>
         <p:spPr>
           <a:xfrm>
-            <a:off x="914400" y="1536192"/>
+            <a:off x="914400" y="1389887"/>
             <a:ext cx="7315200" cy="3364992"/>
           </a:xfrm>
           <a:prstGeom prst="rect">
@@ -9889,7 +9889,7 @@
         </p:nvSpPr>
         <p:spPr>
           <a:xfrm>
-            <a:off x="1231075" y="1645920"/>
+            <a:off x="1231075" y="1499616"/>
             <a:ext cx="6650181" cy="256032"/>
           </a:xfrm>
           <a:prstGeom prst="rect">
@@ -9928,7 +9928,7 @@
         </p:nvSpPr>
         <p:spPr>
           <a:xfrm>
-            <a:off x="1231075" y="1956816"/>
+            <a:off x="1231075" y="1810512"/>
             <a:ext cx="6681849" cy="2834640"/>
           </a:xfrm>
           <a:prstGeom prst="rect">
@@ -9961,7 +9961,7 @@
                 <a:ea typeface="Arial" pitchFamily="34" charset="-122"/>
                 <a:cs typeface="Arial" pitchFamily="34" charset="-120"/>
               </a:rPr>
-              <a:t>First 1–2 hours — bonding window</a:t>
+              <a:t>First 1-2 hours: bonding window</a:t>
             </a:r>
             <a:endParaRPr lang="en-US" sz="1400" dirty="0"/>
           </a:p>
@@ -10221,7 +10221,7 @@
                 <a:ea typeface="Georgia" pitchFamily="34" charset="-122"/>
                 <a:cs typeface="Georgia" pitchFamily="34" charset="-120"/>
               </a:rPr>
-              <a:t>Stage 4 — The Golden Hour</a:t>
+              <a:t>Stage 4: The Golden Hour</a:t>
             </a:r>
             <a:endParaRPr lang="en-US" sz="3200" dirty="0"/>
           </a:p>
@@ -10274,8 +10274,8 @@
         </p:nvSpPr>
         <p:spPr>
           <a:xfrm>
-            <a:off x="914400" y="1536192"/>
-            <a:ext cx="7315200" cy="1847088"/>
+            <a:off x="914400" y="1828800"/>
+            <a:ext cx="7315200" cy="1645920"/>
           </a:xfrm>
           <a:prstGeom prst="rect">
             <a:avLst/>
@@ -10357,7 +10357,7 @@
                 <a:ea typeface="Arial" pitchFamily="34" charset="-122"/>
                 <a:cs typeface="Arial" pitchFamily="34" charset="-120"/>
               </a:rPr>
-              <a:t>Doula Scripts — Protecting the Hour</a:t>
+              <a:t>Doula Scripts: Protecting the Hour</a:t>
             </a:r>
             <a:endParaRPr lang="en-US" sz="1400" dirty="0"/>
           </a:p>
@@ -10413,7 +10413,7 @@
         </p:nvSpPr>
         <p:spPr>
           <a:xfrm>
-            <a:off x="914400" y="3493008"/>
+            <a:off x="914400" y="3346704"/>
             <a:ext cx="7315200" cy="1408176"/>
           </a:xfrm>
           <a:prstGeom prst="rect">
@@ -10471,7 +10471,7 @@
         </p:nvSpPr>
         <p:spPr>
           <a:xfrm>
-            <a:off x="1231075" y="3602736"/>
+            <a:off x="1231075" y="3456432"/>
             <a:ext cx="6650181" cy="256032"/>
           </a:xfrm>
           <a:prstGeom prst="rect">
@@ -10510,7 +10510,7 @@
         </p:nvSpPr>
         <p:spPr>
           <a:xfrm>
-            <a:off x="1231075" y="3895344"/>
+            <a:off x="1231075" y="3749040"/>
             <a:ext cx="6681849" cy="969264"/>
           </a:xfrm>
           <a:prstGeom prst="rect">
@@ -10543,7 +10543,7 @@
                 <a:ea typeface="Arial" pitchFamily="34" charset="-122"/>
                 <a:cs typeface="Arial" pitchFamily="34" charset="-120"/>
               </a:rPr>
-              <a:t>Weight and measurements: 1–2 hrs</a:t>
+              <a:t>Weight and measurements: 1-2 hrs</a:t>
             </a:r>
             <a:endParaRPr lang="en-US" sz="1400" dirty="0"/>
           </a:p>
@@ -10965,7 +10965,7 @@
                 <a:ea typeface="Arial" pitchFamily="34" charset="-122"/>
                 <a:cs typeface="Arial" pitchFamily="34" charset="-120"/>
               </a:rPr>
-              <a:t>In the chat, drop your answer: You’ve just arrived at the hospital with your client. She’s 5 cm. Thirty minutes later she’s still 5 cm. Two hours after that she’s 7 cm and shaking. What’s your doula role at each of those three moments — and what changes?</a:t>
+              <a:t>In the chat, drop your answer: You’ve just arrived at the hospital with your client. She’s 5 cm. Thirty minutes later she’s still 5 cm. Two hours after that she’s 7 cm and shaking. What’s your doula role at each of those three moments, and what changes?</a:t>
             </a:r>
             <a:endParaRPr lang="en-US" sz="1300" dirty="0"/>
           </a:p>
@@ -11444,7 +11444,7 @@
         <p:spPr>
           <a:xfrm>
             <a:off x="292608" y="960120"/>
-            <a:ext cx="8558784" cy="3931920"/>
+            <a:ext cx="8558784" cy="3794760"/>
           </a:xfrm>
           <a:prstGeom prst="rect">
             <a:avLst/>
@@ -11502,7 +11502,7 @@
         <p:spPr>
           <a:xfrm>
             <a:off x="502920" y="1060704"/>
-            <a:ext cx="8229600" cy="3749040"/>
+            <a:ext cx="8229600" cy="3694176"/>
           </a:xfrm>
           <a:prstGeom prst="rect">
             <a:avLst/>
@@ -11526,7 +11526,7 @@
               <a:buChar char="•"/>
             </a:pPr>
             <a:r>
-              <a:rPr lang="en-US" sz="1400" dirty="0">
+              <a:rPr lang="en-US" sz="1100" dirty="0">
                 <a:solidFill>
                   <a:srgbClr val="2D2D2D"/>
                 </a:solidFill>
@@ -11551,7 +11551,7 @@
               <a:buChar char="•"/>
             </a:pPr>
             <a:r>
-              <a:rPr lang="en-US" sz="1400" dirty="0">
+              <a:rPr lang="en-US" sz="1100" dirty="0">
                 <a:solidFill>
                   <a:srgbClr val="2D2D2D"/>
                 </a:solidFill>
@@ -11576,7 +11576,7 @@
               <a:buChar char="•"/>
             </a:pPr>
             <a:r>
-              <a:rPr lang="en-US" sz="1400" dirty="0">
+              <a:rPr lang="en-US" sz="1100" dirty="0">
                 <a:solidFill>
                   <a:srgbClr val="2D2D2D"/>
                 </a:solidFill>
@@ -11584,7 +11584,7 @@
                 <a:ea typeface="Arial" pitchFamily="34" charset="-122"/>
                 <a:cs typeface="Arial" pitchFamily="34" charset="-120"/>
               </a:rPr>
-              <a:t>The Six P's — what moves labor along</a:t>
+              <a:t>The Six P's: what moves labor along</a:t>
             </a:r>
             <a:endParaRPr lang="en-US" sz="1400" dirty="0"/>
           </a:p>
@@ -11601,7 +11601,7 @@
               <a:buChar char="•"/>
             </a:pPr>
             <a:r>
-              <a:rPr lang="en-US" sz="1400" dirty="0">
+              <a:rPr lang="en-US" sz="1100" dirty="0">
                 <a:solidFill>
                   <a:srgbClr val="2D2D2D"/>
                 </a:solidFill>
@@ -11626,7 +11626,7 @@
               <a:buChar char="•"/>
             </a:pPr>
             <a:r>
-              <a:rPr lang="en-US" sz="1400" dirty="0">
+              <a:rPr lang="en-US" sz="1100" dirty="0">
                 <a:solidFill>
                   <a:srgbClr val="2D2D2D"/>
                 </a:solidFill>
@@ -11651,7 +11651,7 @@
               <a:buChar char="•"/>
             </a:pPr>
             <a:r>
-              <a:rPr lang="en-US" sz="1400" dirty="0">
+              <a:rPr lang="en-US" sz="1100" dirty="0">
                 <a:solidFill>
                   <a:srgbClr val="2D2D2D"/>
                 </a:solidFill>
@@ -11832,7 +11832,7 @@
               <a:buNone/>
             </a:pPr>
             <a:r>
-              <a:rPr lang="en-US" sz="2800" b="1" dirty="0">
+              <a:rPr lang="en-US" sz="3200" b="1" dirty="0">
                 <a:solidFill>
                   <a:srgbClr val="5E376C"/>
                 </a:solidFill>
@@ -11840,7 +11840,7 @@
                 <a:ea typeface="Georgia" pitchFamily="34" charset="-122"/>
                 <a:cs typeface="Georgia" pitchFamily="34" charset="-120"/>
               </a:rPr>
-              <a:t>The Labor Hormones — An Overview</a:t>
+              <a:t>The Labor Hormones: An Overview</a:t>
             </a:r>
             <a:endParaRPr lang="en-US" sz="2800" dirty="0"/>
           </a:p>
@@ -11879,7 +11879,7 @@
                 <a:ea typeface="Georgia" pitchFamily="34" charset="-122"/>
                 <a:cs typeface="Georgia" pitchFamily="34" charset="-120"/>
               </a:rPr>
-              <a:t>Your calm presence isn’t just emotional support — it is hormonal support.</a:t>
+              <a:t>Your calm presence isn’t just emotional support: it is hormonal support.</a:t>
             </a:r>
             <a:endParaRPr lang="en-US" sz="1400" dirty="0"/>
           </a:p>
@@ -11893,8 +11893,8 @@
         </p:nvSpPr>
         <p:spPr>
           <a:xfrm>
-            <a:off x="292608" y="1554480"/>
-            <a:ext cx="2011680" cy="3310128"/>
+            <a:off x="292608" y="2432304"/>
+            <a:ext cx="2011680" cy="2322576"/>
           </a:xfrm>
           <a:prstGeom prst="rect">
             <a:avLst/>
@@ -11922,8 +11922,8 @@
         </p:nvSpPr>
         <p:spPr>
           <a:xfrm>
-            <a:off x="292608" y="1554480"/>
-            <a:ext cx="64008" cy="3310128"/>
+            <a:off x="292608" y="2523744"/>
+            <a:ext cx="64008" cy="2322576"/>
           </a:xfrm>
           <a:prstGeom prst="rect">
             <a:avLst/>
@@ -11980,7 +11980,7 @@
         </p:nvSpPr>
         <p:spPr>
           <a:xfrm>
-            <a:off x="402336" y="2688336"/>
+            <a:off x="402336" y="2596896"/>
             <a:ext cx="1810512" cy="310896"/>
           </a:xfrm>
           <a:prstGeom prst="rect">
@@ -12019,7 +12019,7 @@
         </p:nvSpPr>
         <p:spPr>
           <a:xfrm>
-            <a:off x="402336" y="3017520"/>
+            <a:off x="402336" y="2926080"/>
             <a:ext cx="1810512" cy="219456"/>
           </a:xfrm>
           <a:prstGeom prst="rect">
@@ -12058,7 +12058,7 @@
         </p:nvSpPr>
         <p:spPr>
           <a:xfrm>
-            <a:off x="402336" y="3291840"/>
+            <a:off x="402336" y="3200400"/>
             <a:ext cx="1810512" cy="1389888"/>
           </a:xfrm>
           <a:prstGeom prst="rect">
@@ -12100,8 +12100,8 @@
         </p:nvSpPr>
         <p:spPr>
           <a:xfrm>
-            <a:off x="2395728" y="1554480"/>
-            <a:ext cx="2011680" cy="3310128"/>
+            <a:off x="2395728" y="2432304"/>
+            <a:ext cx="2011680" cy="2322576"/>
           </a:xfrm>
           <a:prstGeom prst="rect">
             <a:avLst/>
@@ -12129,8 +12129,8 @@
         </p:nvSpPr>
         <p:spPr>
           <a:xfrm>
-            <a:off x="2395728" y="1554480"/>
-            <a:ext cx="64008" cy="3310128"/>
+            <a:off x="2395728" y="2523744"/>
+            <a:ext cx="64008" cy="2322576"/>
           </a:xfrm>
           <a:prstGeom prst="rect">
             <a:avLst/>
@@ -12187,7 +12187,7 @@
         </p:nvSpPr>
         <p:spPr>
           <a:xfrm>
-            <a:off x="2505456" y="2688336"/>
+            <a:off x="2505456" y="2596896"/>
             <a:ext cx="1810512" cy="310896"/>
           </a:xfrm>
           <a:prstGeom prst="rect">
@@ -12226,7 +12226,7 @@
         </p:nvSpPr>
         <p:spPr>
           <a:xfrm>
-            <a:off x="2505456" y="3017520"/>
+            <a:off x="2505456" y="2926080"/>
             <a:ext cx="1810512" cy="219456"/>
           </a:xfrm>
           <a:prstGeom prst="rect">
@@ -12265,7 +12265,7 @@
         </p:nvSpPr>
         <p:spPr>
           <a:xfrm>
-            <a:off x="2505456" y="3291840"/>
+            <a:off x="2505456" y="3200400"/>
             <a:ext cx="1810512" cy="1389888"/>
           </a:xfrm>
           <a:prstGeom prst="rect">
@@ -12307,8 +12307,8 @@
         </p:nvSpPr>
         <p:spPr>
           <a:xfrm>
-            <a:off x="4498848" y="1554480"/>
-            <a:ext cx="2011680" cy="3310128"/>
+            <a:off x="4498848" y="2432304"/>
+            <a:ext cx="2011680" cy="2322576"/>
           </a:xfrm>
           <a:prstGeom prst="rect">
             <a:avLst/>
@@ -12336,8 +12336,8 @@
         </p:nvSpPr>
         <p:spPr>
           <a:xfrm>
-            <a:off x="4498848" y="1554480"/>
-            <a:ext cx="64008" cy="3310128"/>
+            <a:off x="4498848" y="2523744"/>
+            <a:ext cx="64008" cy="2322576"/>
           </a:xfrm>
           <a:prstGeom prst="rect">
             <a:avLst/>
@@ -12394,7 +12394,7 @@
         </p:nvSpPr>
         <p:spPr>
           <a:xfrm>
-            <a:off x="4608576" y="2688336"/>
+            <a:off x="4608576" y="2596896"/>
             <a:ext cx="1810512" cy="310896"/>
           </a:xfrm>
           <a:prstGeom prst="rect">
@@ -12433,7 +12433,7 @@
         </p:nvSpPr>
         <p:spPr>
           <a:xfrm>
-            <a:off x="4608576" y="3017520"/>
+            <a:off x="4608576" y="2926080"/>
             <a:ext cx="1810512" cy="219456"/>
           </a:xfrm>
           <a:prstGeom prst="rect">
@@ -12472,7 +12472,7 @@
         </p:nvSpPr>
         <p:spPr>
           <a:xfrm>
-            <a:off x="4608576" y="3291840"/>
+            <a:off x="4608576" y="3200400"/>
             <a:ext cx="1810512" cy="1389888"/>
           </a:xfrm>
           <a:prstGeom prst="rect">
@@ -12514,8 +12514,8 @@
         </p:nvSpPr>
         <p:spPr>
           <a:xfrm>
-            <a:off x="6601968" y="1554480"/>
-            <a:ext cx="2011680" cy="3310128"/>
+            <a:off x="6601968" y="2432304"/>
+            <a:ext cx="2011680" cy="2322576"/>
           </a:xfrm>
           <a:prstGeom prst="rect">
             <a:avLst/>
@@ -12543,8 +12543,8 @@
         </p:nvSpPr>
         <p:spPr>
           <a:xfrm>
-            <a:off x="6601968" y="1554480"/>
-            <a:ext cx="64008" cy="3310128"/>
+            <a:off x="6601968" y="2523744"/>
+            <a:ext cx="64008" cy="2322576"/>
           </a:xfrm>
           <a:prstGeom prst="rect">
             <a:avLst/>
@@ -12601,7 +12601,7 @@
         </p:nvSpPr>
         <p:spPr>
           <a:xfrm>
-            <a:off x="6711696" y="2688336"/>
+            <a:off x="6711696" y="2596896"/>
             <a:ext cx="1810512" cy="310896"/>
           </a:xfrm>
           <a:prstGeom prst="rect">
@@ -12640,7 +12640,7 @@
         </p:nvSpPr>
         <p:spPr>
           <a:xfrm>
-            <a:off x="6711696" y="3017520"/>
+            <a:off x="6711696" y="2926080"/>
             <a:ext cx="1810512" cy="219456"/>
           </a:xfrm>
           <a:prstGeom prst="rect">
@@ -12679,7 +12679,7 @@
         </p:nvSpPr>
         <p:spPr>
           <a:xfrm>
-            <a:off x="6711696" y="3291840"/>
+            <a:off x="6711696" y="3200400"/>
             <a:ext cx="1810512" cy="1389888"/>
           </a:xfrm>
           <a:prstGeom prst="rect">
@@ -12880,7 +12880,7 @@
               <a:buNone/>
             </a:pPr>
             <a:r>
-              <a:rPr lang="en-US" sz="2800" b="1" dirty="0">
+              <a:rPr lang="en-US" sz="3200" b="1" dirty="0">
                 <a:solidFill>
                   <a:srgbClr val="5E376C"/>
                 </a:solidFill>
@@ -12888,7 +12888,7 @@
                 <a:ea typeface="Georgia" pitchFamily="34" charset="-122"/>
                 <a:cs typeface="Georgia" pitchFamily="34" charset="-120"/>
               </a:rPr>
-              <a:t>Oxytocin — “The Love Hormone”</a:t>
+              <a:t>Oxytocin: “The Love Hormone”</a:t>
             </a:r>
             <a:endParaRPr lang="en-US" sz="2800" dirty="0"/>
           </a:p>
@@ -12927,7 +12927,7 @@
                 <a:ea typeface="Georgia" pitchFamily="34" charset="-122"/>
                 <a:cs typeface="Georgia" pitchFamily="34" charset="-120"/>
               </a:rPr>
-              <a:t>Your calm, warm, reassuring presence is not just emotional support — it is hormonal support.</a:t>
+              <a:t>Your calm, warm, reassuring presence is not just emotional support: it is hormonal support.</a:t>
             </a:r>
             <a:endParaRPr lang="en-US" sz="1400" dirty="0"/>
           </a:p>
@@ -13082,7 +13082,7 @@
                 <a:ea typeface="Arial" pitchFamily="34" charset="-122"/>
                 <a:cs typeface="Arial" pitchFamily="34" charset="-120"/>
               </a:rPr>
-              <a:t>Pitocin is synthetic oxytocin — same molecule, but without the endorphin co-release or physiological feedback loop</a:t>
+              <a:t>Pitocin is synthetic oxytocin: same molecule, but without the endorphin co-release or physiological feedback loop</a:t>
             </a:r>
             <a:endParaRPr lang="en-US" sz="1400" dirty="0"/>
           </a:p>
@@ -13107,7 +13107,7 @@
                 <a:ea typeface="Arial" pitchFamily="34" charset="-122"/>
                 <a:cs typeface="Arial" pitchFamily="34" charset="-120"/>
               </a:rPr>
-              <a:t>Drops sharply when a person feels afraid, observed, or unsafe — labor can stall or slow</a:t>
+              <a:t>Drops sharply when a person feels afraid, observed, or unsafe: labor can stall or slow</a:t>
             </a:r>
             <a:endParaRPr lang="en-US" sz="1400" dirty="0"/>
           </a:p>
@@ -13132,7 +13132,7 @@
                 <a:ea typeface="Arial" pitchFamily="34" charset="-122"/>
                 <a:cs typeface="Arial" pitchFamily="34" charset="-120"/>
               </a:rPr>
-              <a:t>Floods the body during skin-to-skin after birth — drives bonding and helps the uterus contract to reduce bleeding</a:t>
+              <a:t>Floods the body during skin-to-skin after birth: drives bonding and helps the uterus contract to reduce bleeding</a:t>
             </a:r>
             <a:endParaRPr lang="en-US" sz="1400" dirty="0"/>
           </a:p>
@@ -13146,7 +13146,7 @@
         </p:nvSpPr>
         <p:spPr>
           <a:xfrm>
-            <a:off x="292608" y="3822192"/>
+            <a:off x="292608" y="3749040"/>
             <a:ext cx="8558784" cy="1005840"/>
           </a:xfrm>
           <a:prstGeom prst="rect">
@@ -13204,7 +13204,7 @@
         </p:nvSpPr>
         <p:spPr>
           <a:xfrm>
-            <a:off x="457200" y="3931920"/>
+            <a:off x="457200" y="3858768"/>
             <a:ext cx="8229600" cy="256032"/>
           </a:xfrm>
           <a:prstGeom prst="rect">
@@ -13229,7 +13229,7 @@
                 <a:ea typeface="Arial" pitchFamily="34" charset="-122"/>
                 <a:cs typeface="Arial" pitchFamily="34" charset="-120"/>
               </a:rPr>
-              <a:t>Clinical Note — What This Means for Your Role</a:t>
+              <a:t>Clinical Note: What This Means for Your Role</a:t>
             </a:r>
             <a:endParaRPr lang="en-US" sz="1400" dirty="0"/>
           </a:p>
@@ -13243,7 +13243,7 @@
         </p:nvSpPr>
         <p:spPr>
           <a:xfrm>
-            <a:off x="475488" y="4242816"/>
+            <a:off x="475488" y="4169664"/>
             <a:ext cx="8229600" cy="530352"/>
           </a:xfrm>
           <a:prstGeom prst="rect">
@@ -13452,7 +13452,7 @@
                 <a:ea typeface="Georgia" pitchFamily="34" charset="-122"/>
                 <a:cs typeface="Georgia" pitchFamily="34" charset="-120"/>
               </a:rPr>
-              <a:t>Endorphins — The Body’s Own Pain Relief</a:t>
+              <a:t>Endorphins: The Body’s Own Pain Relief</a:t>
             </a:r>
             <a:endParaRPr lang="en-US" sz="2800" dirty="0"/>
           </a:p>
@@ -13505,7 +13505,7 @@
         </p:nvSpPr>
         <p:spPr>
           <a:xfrm>
-            <a:off x="292608" y="1536192"/>
+            <a:off x="292608" y="1481328"/>
             <a:ext cx="8558784" cy="3273552"/>
           </a:xfrm>
           <a:prstGeom prst="rect">
@@ -13563,7 +13563,7 @@
         </p:nvSpPr>
         <p:spPr>
           <a:xfrm>
-            <a:off x="475488" y="1645920"/>
+            <a:off x="475488" y="1591056"/>
             <a:ext cx="8229600" cy="3090672"/>
           </a:xfrm>
           <a:prstGeom prst="rect">
@@ -13596,7 +13596,7 @@
                 <a:ea typeface="Arial" pitchFamily="34" charset="-122"/>
                 <a:cs typeface="Arial" pitchFamily="34" charset="-120"/>
               </a:rPr>
-              <a:t>Beta-endorphins are natural opioids produced by the brain — structurally similar to morphine</a:t>
+              <a:t>Beta-endorphins are natural opioids produced by the brain: structurally similar to morphine</a:t>
             </a:r>
             <a:endParaRPr lang="en-US" sz="1400" dirty="0"/>
           </a:p>
@@ -13621,7 +13621,7 @@
                 <a:ea typeface="Arial" pitchFamily="34" charset="-122"/>
                 <a:cs typeface="Arial" pitchFamily="34" charset="-120"/>
               </a:rPr>
-              <a:t>Rise progressively with contraction intensity — the body self-medicates as labor gets harder</a:t>
+              <a:t>Rise progressively with contraction intensity: the body self-medicates as labor gets harder</a:t>
             </a:r>
             <a:endParaRPr lang="en-US" sz="1400" dirty="0"/>
           </a:p>
@@ -13646,7 +13646,7 @@
                 <a:ea typeface="Arial" pitchFamily="34" charset="-122"/>
                 <a:cs typeface="Arial" pitchFamily="34" charset="-120"/>
               </a:rPr>
-              <a:t>Create the dissociative, time-altered state known as “labor land” — this is protective, not pathological</a:t>
+              <a:t>Create the dissociative, time-altered state known as “labor land”: this is protective, not pathological</a:t>
             </a:r>
             <a:endParaRPr lang="en-US" sz="1400" dirty="0"/>
           </a:p>
@@ -13671,7 +13671,7 @@
                 <a:ea typeface="Arial" pitchFamily="34" charset="-122"/>
                 <a:cs typeface="Arial" pitchFamily="34" charset="-120"/>
               </a:rPr>
-              <a:t>Responsible for the “birth high” — the wave of euphoria that floods the body immediately after birth</a:t>
+              <a:t>Responsible for the “birth high”: the wave of euphoria that floods the body immediately after birth</a:t>
             </a:r>
             <a:endParaRPr lang="en-US" sz="1400" dirty="0"/>
           </a:p>
@@ -13696,7 +13696,7 @@
                 <a:ea typeface="Arial" pitchFamily="34" charset="-122"/>
                 <a:cs typeface="Arial" pitchFamily="34" charset="-120"/>
               </a:rPr>
-              <a:t>Suppressed when adrenaline is high — fear, cold, bright lights, and feeling observed block endorphin action</a:t>
+              <a:t>Suppressed when adrenaline is high: fear, cold, bright lights, and feeling observed block endorphin action</a:t>
             </a:r>
             <a:endParaRPr lang="en-US" sz="1400" dirty="0"/>
           </a:p>
@@ -13721,7 +13721,7 @@
                 <a:ea typeface="Arial" pitchFamily="34" charset="-122"/>
                 <a:cs typeface="Arial" pitchFamily="34" charset="-120"/>
               </a:rPr>
-              <a:t>Epidurals block the pain but also block the endorphin rise — your emotional role remains essential</a:t>
+              <a:t>Epidurals block the pain but also block the endorphin rise: your emotional role remains essential</a:t>
             </a:r>
             <a:endParaRPr lang="en-US" sz="1400" dirty="0"/>
           </a:p>
@@ -13894,7 +13894,7 @@
               <a:buNone/>
             </a:pPr>
             <a:r>
-              <a:rPr lang="en-US" sz="2800" b="1" dirty="0">
+              <a:rPr lang="en-US" sz="3200" b="1" dirty="0">
                 <a:solidFill>
                   <a:srgbClr val="5E376C"/>
                 </a:solidFill>
@@ -13902,7 +13902,7 @@
                 <a:ea typeface="Georgia" pitchFamily="34" charset="-122"/>
                 <a:cs typeface="Georgia" pitchFamily="34" charset="-120"/>
               </a:rPr>
-              <a:t>Adrenaline — The Fear Response</a:t>
+              <a:t>Adrenaline: The Fear Response</a:t>
             </a:r>
             <a:endParaRPr lang="en-US" sz="2800" dirty="0"/>
           </a:p>
@@ -13955,7 +13955,7 @@
         </p:nvSpPr>
         <p:spPr>
           <a:xfrm>
-            <a:off x="914400" y="1536192"/>
+            <a:off x="914400" y="1444752"/>
             <a:ext cx="7315200" cy="3310128"/>
           </a:xfrm>
           <a:prstGeom prst="rect">
@@ -14013,7 +14013,7 @@
         </p:nvSpPr>
         <p:spPr>
           <a:xfrm>
-            <a:off x="1231075" y="1645920"/>
+            <a:off x="1231075" y="1554480"/>
             <a:ext cx="6650181" cy="256032"/>
           </a:xfrm>
           <a:prstGeom prst="rect">
@@ -14052,7 +14052,7 @@
         </p:nvSpPr>
         <p:spPr>
           <a:xfrm>
-            <a:off x="1231075" y="1956816"/>
+            <a:off x="1231075" y="1865376"/>
             <a:ext cx="6681849" cy="2834640"/>
           </a:xfrm>
           <a:prstGeom prst="rect">
@@ -14337,7 +14337,7 @@
               <a:buNone/>
             </a:pPr>
             <a:r>
-              <a:rPr lang="en-US" sz="2800" b="1" dirty="0">
+              <a:rPr lang="en-US" sz="3200" b="1" dirty="0">
                 <a:solidFill>
                   <a:srgbClr val="5E376C"/>
                 </a:solidFill>
@@ -14345,7 +14345,7 @@
                 <a:ea typeface="Georgia" pitchFamily="34" charset="-122"/>
                 <a:cs typeface="Georgia" pitchFamily="34" charset="-120"/>
               </a:rPr>
-              <a:t>Adrenaline — The Fear Response</a:t>
+              <a:t>Adrenaline: The Fear Response</a:t>
             </a:r>
             <a:endParaRPr lang="en-US" sz="2800" dirty="0"/>
           </a:p>
@@ -14398,8 +14398,8 @@
         </p:nvSpPr>
         <p:spPr>
           <a:xfrm>
-            <a:off x="914400" y="1536192"/>
-            <a:ext cx="7315200" cy="3310128"/>
+            <a:off x="914400" y="1591056"/>
+            <a:ext cx="7315200" cy="3163824"/>
           </a:xfrm>
           <a:prstGeom prst="rect">
             <a:avLst/>
@@ -14495,7 +14495,7 @@
         </p:nvSpPr>
         <p:spPr>
           <a:xfrm>
-            <a:off x="1199407" y="1956816"/>
+            <a:off x="1199407" y="1755648"/>
             <a:ext cx="6681849" cy="1956816"/>
           </a:xfrm>
           <a:prstGeom prst="rect">
@@ -14667,7 +14667,7 @@
         </p:nvSpPr>
         <p:spPr>
           <a:xfrm>
-            <a:off x="1199407" y="3968496"/>
+            <a:off x="1199407" y="3767328"/>
             <a:ext cx="6713516" cy="822960"/>
           </a:xfrm>
           <a:prstGeom prst="rect">
@@ -14868,7 +14868,7 @@
               <a:buNone/>
             </a:pPr>
             <a:r>
-              <a:rPr lang="en-US" sz="2800" b="1" dirty="0">
+              <a:rPr lang="en-US" sz="3200" b="1" dirty="0">
                 <a:solidFill>
                   <a:srgbClr val="5E376C"/>
                 </a:solidFill>
@@ -14876,7 +14876,7 @@
                 <a:ea typeface="Georgia" pitchFamily="34" charset="-122"/>
                 <a:cs typeface="Georgia" pitchFamily="34" charset="-120"/>
               </a:rPr>
-              <a:t>Prolactin — The Mothering Hormone</a:t>
+              <a:t>Prolactin: The Mothering Hormone</a:t>
             </a:r>
             <a:endParaRPr lang="en-US" sz="2800" dirty="0"/>
           </a:p>
@@ -15045,7 +15045,7 @@
                 <a:ea typeface="Arial" pitchFamily="34" charset="-122"/>
                 <a:cs typeface="Arial" pitchFamily="34" charset="-120"/>
               </a:rPr>
-              <a:t>Spikes dramatically in the first hour after birth — highest levels occur during the Golden Hour</a:t>
+              <a:t>Spikes dramatically in the first hour after birth: highest levels occur during the Golden Hour</a:t>
             </a:r>
             <a:endParaRPr lang="en-US" sz="1400" dirty="0"/>
           </a:p>
@@ -15095,7 +15095,7 @@
                 <a:ea typeface="Arial" pitchFamily="34" charset="-122"/>
                 <a:cs typeface="Arial" pitchFamily="34" charset="-120"/>
               </a:rPr>
-              <a:t>Also plays a role in shaping the transition into parenthood — drives attentiveness and responsiveness to baby’s cues</a:t>
+              <a:t>Also plays a role in shaping the transition into parenthood: drives attentiveness and responsiveness to baby’s cues</a:t>
             </a:r>
             <a:endParaRPr lang="en-US" sz="1400" dirty="0"/>
           </a:p>
@@ -15159,7 +15159,7 @@
         </p:nvSpPr>
         <p:spPr>
           <a:xfrm>
-            <a:off x="292608" y="3931920"/>
+            <a:off x="292608" y="3858768"/>
             <a:ext cx="8558784" cy="896112"/>
           </a:xfrm>
           <a:prstGeom prst="rect">
@@ -15217,7 +15217,7 @@
         </p:nvSpPr>
         <p:spPr>
           <a:xfrm>
-            <a:off x="457200" y="4041648"/>
+            <a:off x="457200" y="3968496"/>
             <a:ext cx="8229600" cy="256032"/>
           </a:xfrm>
           <a:prstGeom prst="rect">
@@ -15242,7 +15242,7 @@
                 <a:ea typeface="Arial" pitchFamily="34" charset="-122"/>
                 <a:cs typeface="Arial" pitchFamily="34" charset="-120"/>
               </a:rPr>
-              <a:t>Clinical Note — Your Role in the Golden Hour</a:t>
+              <a:t>Clinical Note: Your Role in the Golden Hour</a:t>
             </a:r>
             <a:endParaRPr lang="en-US" sz="1400" dirty="0"/>
           </a:p>
@@ -15256,7 +15256,7 @@
         </p:nvSpPr>
         <p:spPr>
           <a:xfrm>
-            <a:off x="475488" y="4279392"/>
+            <a:off x="475488" y="4206240"/>
             <a:ext cx="8229600" cy="493776"/>
           </a:xfrm>
           <a:prstGeom prst="rect">
@@ -15466,7 +15466,7 @@
                 <a:ea typeface="Georgia" pitchFamily="34" charset="-122"/>
                 <a:cs typeface="Georgia" pitchFamily="34" charset="-120"/>
               </a:rPr>
-              <a:t>6:20 PM — 6:30 PM · 10 minutes</a:t>
+              <a:t>6-20 PM: 6-30 PM · 10 minutes</a:t>
             </a:r>
             <a:endParaRPr lang="en-US" sz="1400" dirty="0"/>
           </a:p>
@@ -15557,7 +15557,7 @@
                 <a:ea typeface="Georgia" pitchFamily="34" charset="-122"/>
                 <a:cs typeface="Georgia" pitchFamily="34" charset="-120"/>
               </a:rPr>
-              <a:t>Back at 6:30 PM — Six P's and Induction.</a:t>
+              <a:t>Back at 6-30 PM: Six P's and Induction.</a:t>
             </a:r>
             <a:endParaRPr lang="en-US" sz="1400" dirty="0"/>
           </a:p>
@@ -15762,7 +15762,7 @@
                 <a:ea typeface="Georgia" pitchFamily="34" charset="-122"/>
                 <a:cs typeface="Georgia" pitchFamily="34" charset="-120"/>
               </a:rPr>
-              <a:t>Think of them as gears in a machine — if one is off, all of them feel it.</a:t>
+              <a:t>Think of them as gears in a machine: if one is off, all of them feel it.</a:t>
             </a:r>
             <a:endParaRPr lang="en-US" sz="1400" dirty="0"/>
           </a:p>
@@ -15865,7 +15865,7 @@
                 <a:ea typeface="Georgia" pitchFamily="34" charset="-122"/>
                 <a:cs typeface="Georgia" pitchFamily="34" charset="-120"/>
               </a:rPr>
-              <a:t>The Six P’s — What Drives Labor Progress</a:t>
+              <a:t>The Six P’s: What Drives Labor Progress</a:t>
             </a:r>
             <a:endParaRPr lang="en-US" sz="2800" dirty="0"/>
           </a:p>
@@ -16335,7 +16335,7 @@
         </p:nvSpPr>
         <p:spPr>
           <a:xfrm>
-            <a:off x="292608" y="3346704"/>
+            <a:off x="292608" y="3035808"/>
             <a:ext cx="2651760" cy="1719072"/>
           </a:xfrm>
           <a:prstGeom prst="rect">
@@ -16393,7 +16393,7 @@
         </p:nvSpPr>
         <p:spPr>
           <a:xfrm>
-            <a:off x="438912" y="3474720"/>
+            <a:off x="438912" y="3163824"/>
             <a:ext cx="2450592" cy="292608"/>
           </a:xfrm>
           <a:prstGeom prst="rect">
@@ -16432,7 +16432,7 @@
         </p:nvSpPr>
         <p:spPr>
           <a:xfrm>
-            <a:off x="438912" y="3803904"/>
+            <a:off x="438912" y="3493008"/>
             <a:ext cx="2450592" cy="1152144"/>
           </a:xfrm>
           <a:prstGeom prst="rect">
@@ -16474,7 +16474,7 @@
         </p:nvSpPr>
         <p:spPr>
           <a:xfrm>
-            <a:off x="3035808" y="3346704"/>
+            <a:off x="3035808" y="3035808"/>
             <a:ext cx="2651760" cy="1719072"/>
           </a:xfrm>
           <a:prstGeom prst="rect">
@@ -16532,7 +16532,7 @@
         </p:nvSpPr>
         <p:spPr>
           <a:xfrm>
-            <a:off x="3182112" y="3474720"/>
+            <a:off x="3182112" y="3163824"/>
             <a:ext cx="2450592" cy="292608"/>
           </a:xfrm>
           <a:prstGeom prst="rect">
@@ -16571,7 +16571,7 @@
         </p:nvSpPr>
         <p:spPr>
           <a:xfrm>
-            <a:off x="3182112" y="3803904"/>
+            <a:off x="3182112" y="3493008"/>
             <a:ext cx="2450592" cy="1152144"/>
           </a:xfrm>
           <a:prstGeom prst="rect">
@@ -16613,7 +16613,7 @@
         </p:nvSpPr>
         <p:spPr>
           <a:xfrm>
-            <a:off x="5779008" y="3346704"/>
+            <a:off x="5779008" y="3035808"/>
             <a:ext cx="2651760" cy="1719072"/>
           </a:xfrm>
           <a:prstGeom prst="rect">
@@ -16671,7 +16671,7 @@
         </p:nvSpPr>
         <p:spPr>
           <a:xfrm>
-            <a:off x="5925312" y="3474720"/>
+            <a:off x="5925312" y="3163824"/>
             <a:ext cx="2450592" cy="292608"/>
           </a:xfrm>
           <a:prstGeom prst="rect">
@@ -16710,7 +16710,7 @@
         </p:nvSpPr>
         <p:spPr>
           <a:xfrm>
-            <a:off x="5925312" y="3803904"/>
+            <a:off x="5925312" y="3493008"/>
             <a:ext cx="2450592" cy="1152144"/>
           </a:xfrm>
           <a:prstGeom prst="rect">
@@ -16911,7 +16911,7 @@
               <a:buNone/>
             </a:pPr>
             <a:r>
-              <a:rPr lang="en-US" sz="2400" b="1" dirty="0">
+              <a:rPr lang="en-US" sz="2800" b="1" dirty="0">
                 <a:solidFill>
                   <a:srgbClr val="5E376C"/>
                 </a:solidFill>
@@ -16919,7 +16919,7 @@
                 <a:ea typeface="Georgia" pitchFamily="34" charset="-122"/>
                 <a:cs typeface="Georgia" pitchFamily="34" charset="-120"/>
               </a:rPr>
-              <a:t>Powers — The Contractions That Drive Labor</a:t>
+              <a:t>Powers: The Contractions That Drive Labor</a:t>
             </a:r>
             <a:endParaRPr lang="en-US" sz="2400" dirty="0"/>
           </a:p>
@@ -16972,7 +16972,7 @@
         </p:nvSpPr>
         <p:spPr>
           <a:xfrm>
-            <a:off x="914400" y="1536192"/>
+            <a:off x="914400" y="1444752"/>
             <a:ext cx="7315200" cy="3310128"/>
           </a:xfrm>
           <a:prstGeom prst="rect">
@@ -17030,7 +17030,7 @@
         </p:nvSpPr>
         <p:spPr>
           <a:xfrm>
-            <a:off x="1231075" y="1645920"/>
+            <a:off x="1231075" y="1554480"/>
             <a:ext cx="6650181" cy="256032"/>
           </a:xfrm>
           <a:prstGeom prst="rect">
@@ -17069,7 +17069,7 @@
         </p:nvSpPr>
         <p:spPr>
           <a:xfrm>
-            <a:off x="1231075" y="1956816"/>
+            <a:off x="1231075" y="1865376"/>
             <a:ext cx="6681849" cy="1554480"/>
           </a:xfrm>
           <a:prstGeom prst="rect">
@@ -17102,7 +17102,7 @@
                 <a:ea typeface="Arial" pitchFamily="34" charset="-122"/>
                 <a:cs typeface="Arial" pitchFamily="34" charset="-120"/>
               </a:rPr>
-              <a:t>Involuntary — uterus self-contracts</a:t>
+              <a:t>Involuntary: uterus self-contracts</a:t>
             </a:r>
             <a:endParaRPr lang="en-US" sz="1400" dirty="0"/>
           </a:p>
@@ -17177,7 +17177,7 @@
                 <a:ea typeface="Arial" pitchFamily="34" charset="-122"/>
                 <a:cs typeface="Arial" pitchFamily="34" charset="-120"/>
               </a:rPr>
-              <a:t>Adequate: every 2–3 min, 60–90 sec</a:t>
+              <a:t>Adequate: every 2-3 min, 60-90 sec</a:t>
             </a:r>
             <a:endParaRPr lang="en-US" sz="1400" dirty="0"/>
           </a:p>
@@ -17191,7 +17191,7 @@
         </p:nvSpPr>
         <p:spPr>
           <a:xfrm>
-            <a:off x="1231075" y="3566160"/>
+            <a:off x="1231075" y="3474720"/>
             <a:ext cx="6650181" cy="256032"/>
           </a:xfrm>
           <a:prstGeom prst="rect">
@@ -17230,7 +17230,7 @@
         </p:nvSpPr>
         <p:spPr>
           <a:xfrm>
-            <a:off x="1231075" y="3858768"/>
+            <a:off x="1231075" y="3767328"/>
             <a:ext cx="6681849" cy="969264"/>
           </a:xfrm>
           <a:prstGeom prst="rect">
@@ -17288,7 +17288,7 @@
                 <a:ea typeface="Arial" pitchFamily="34" charset="-122"/>
                 <a:cs typeface="Arial" pitchFamily="34" charset="-120"/>
               </a:rPr>
-              <a:t>Fetal ejection reflex: body pushes spontaneously — support this when possible</a:t>
+              <a:t>Fetal ejection reflex: body pushes spontaneously: support this when possible</a:t>
             </a:r>
             <a:endParaRPr lang="en-US" sz="1400" dirty="0"/>
           </a:p>
@@ -17557,7 +17557,7 @@
                 <a:ea typeface="Georgia" pitchFamily="34" charset="-122"/>
                 <a:cs typeface="Georgia" pitchFamily="34" charset="-120"/>
               </a:rPr>
-              <a:t>Birth doesn’t unfold in neat boxes — it flows like a river.</a:t>
+              <a:t>Birth doesn’t unfold in neat boxes: it flows like a river.</a:t>
             </a:r>
             <a:endParaRPr lang="en-US" sz="1400" dirty="0"/>
           </a:p>
@@ -17665,7 +17665,7 @@
               <a:buNone/>
             </a:pPr>
             <a:r>
-              <a:rPr lang="en-US" sz="2400" b="1" dirty="0">
+              <a:rPr lang="en-US" sz="2800" b="1" dirty="0">
                 <a:solidFill>
                   <a:srgbClr val="5E376C"/>
                 </a:solidFill>
@@ -17673,7 +17673,7 @@
                 <a:ea typeface="Georgia" pitchFamily="34" charset="-122"/>
                 <a:cs typeface="Georgia" pitchFamily="34" charset="-120"/>
               </a:rPr>
-              <a:t>Powers — The Contractions That Drive Labor</a:t>
+              <a:t>Powers: The Contractions That Drive Labor</a:t>
             </a:r>
             <a:endParaRPr lang="en-US" sz="2400" dirty="0"/>
           </a:p>
@@ -17726,8 +17726,8 @@
         </p:nvSpPr>
         <p:spPr>
           <a:xfrm>
-            <a:off x="914400" y="1536192"/>
-            <a:ext cx="7315200" cy="2212848"/>
+            <a:off x="914400" y="1792224"/>
+            <a:ext cx="7315200" cy="2048255"/>
           </a:xfrm>
           <a:prstGeom prst="rect">
             <a:avLst/>
@@ -17809,7 +17809,7 @@
                 <a:ea typeface="Arial" pitchFamily="34" charset="-122"/>
                 <a:cs typeface="Arial" pitchFamily="34" charset="-120"/>
               </a:rPr>
-              <a:t>Clinical Note — Inadequate Powers</a:t>
+              <a:t>Clinical Note: Inadequate Powers</a:t>
             </a:r>
             <a:endParaRPr lang="en-US" sz="1400" dirty="0"/>
           </a:p>
@@ -17851,7 +17851,7 @@
                 <a:ea typeface="Arial" pitchFamily="34" charset="-122"/>
                 <a:cs typeface="Arial" pitchFamily="34" charset="-120"/>
               </a:rPr>
-              <a:t>When contractions are too weak, too far apart, or poorly coordinated, the cervix may not dilate despite hours of effort. This is one reason augmentation with Pitocin is recommended. As a doula, you may notice this before anyone says anything — contractions you can barely see from across the room, long gaps, no reported progress.</a:t>
+              <a:t>When contractions are too weak, too far apart, or poorly coordinated, the cervix may not dilate despite hours of effort. This is one reason augmentation with Pitocin is recommended. As a doula, you may notice this before anyone says anything: contractions you can barely see from across the room, long gaps, no reported progress.</a:t>
             </a:r>
             <a:endParaRPr lang="en-US" sz="1400" dirty="0"/>
           </a:p>
@@ -17865,7 +17865,7 @@
         </p:nvSpPr>
         <p:spPr>
           <a:xfrm>
-            <a:off x="914400" y="3858768"/>
+            <a:off x="914400" y="3767328"/>
             <a:ext cx="7315200" cy="987552"/>
           </a:xfrm>
           <a:prstGeom prst="rect">
@@ -17923,7 +17923,7 @@
         </p:nvSpPr>
         <p:spPr>
           <a:xfrm>
-            <a:off x="1231075" y="3968496"/>
+            <a:off x="1231075" y="3877056"/>
             <a:ext cx="6650181" cy="237744"/>
           </a:xfrm>
           <a:prstGeom prst="rect">
@@ -17962,7 +17962,7 @@
         </p:nvSpPr>
         <p:spPr>
           <a:xfrm>
-            <a:off x="1231075" y="4224528"/>
+            <a:off x="1231075" y="4133088"/>
             <a:ext cx="6650181" cy="566928"/>
           </a:xfrm>
           <a:prstGeom prst="rect">
@@ -18171,7 +18171,7 @@
                 <a:ea typeface="Georgia" pitchFamily="34" charset="-122"/>
                 <a:cs typeface="Georgia" pitchFamily="34" charset="-120"/>
               </a:rPr>
-              <a:t>Passage &amp; Passenger — Pelvis &amp; Baby</a:t>
+              <a:t>Passage &amp; Passenger: Pelvis &amp; Baby</a:t>
             </a:r>
             <a:endParaRPr lang="en-US" sz="2800" dirty="0"/>
           </a:p>
@@ -18224,7 +18224,7 @@
         </p:nvSpPr>
         <p:spPr>
           <a:xfrm>
-            <a:off x="914400" y="1536192"/>
+            <a:off x="914400" y="1444752"/>
             <a:ext cx="7315200" cy="3310128"/>
           </a:xfrm>
           <a:prstGeom prst="rect">
@@ -18282,7 +18282,7 @@
         </p:nvSpPr>
         <p:spPr>
           <a:xfrm>
-            <a:off x="1231075" y="1645920"/>
+            <a:off x="1231075" y="1554480"/>
             <a:ext cx="6650181" cy="256032"/>
           </a:xfrm>
           <a:prstGeom prst="rect">
@@ -18307,7 +18307,7 @@
                 <a:ea typeface="Arial" pitchFamily="34" charset="-122"/>
                 <a:cs typeface="Arial" pitchFamily="34" charset="-120"/>
               </a:rPr>
-              <a:t>Passage — The Bony Pelvis</a:t>
+              <a:t>Passage: The Bony Pelvis</a:t>
             </a:r>
             <a:endParaRPr lang="en-US" sz="1400" dirty="0"/>
           </a:p>
@@ -18321,7 +18321,7 @@
         </p:nvSpPr>
         <p:spPr>
           <a:xfrm>
-            <a:off x="1231075" y="1956816"/>
+            <a:off x="1231075" y="1865376"/>
             <a:ext cx="6681849" cy="2834640"/>
           </a:xfrm>
           <a:prstGeom prst="rect">
@@ -18589,7 +18589,7 @@
                 <a:ea typeface="Georgia" pitchFamily="34" charset="-122"/>
                 <a:cs typeface="Georgia" pitchFamily="34" charset="-120"/>
               </a:rPr>
-              <a:t>Passage &amp; Passenger — Pelvis &amp; Baby</a:t>
+              <a:t>Passage &amp; Passenger: Pelvis &amp; Baby</a:t>
             </a:r>
             <a:endParaRPr lang="en-US" sz="2800" dirty="0"/>
           </a:p>
@@ -18642,7 +18642,7 @@
         </p:nvSpPr>
         <p:spPr>
           <a:xfrm>
-            <a:off x="914400" y="1536192"/>
+            <a:off x="914400" y="1444752"/>
             <a:ext cx="7315200" cy="3310128"/>
           </a:xfrm>
           <a:prstGeom prst="rect">
@@ -18700,7 +18700,7 @@
         </p:nvSpPr>
         <p:spPr>
           <a:xfrm>
-            <a:off x="1231075" y="1645920"/>
+            <a:off x="1231075" y="1554480"/>
             <a:ext cx="6650181" cy="256032"/>
           </a:xfrm>
           <a:prstGeom prst="rect">
@@ -18725,7 +18725,7 @@
                 <a:ea typeface="Arial" pitchFamily="34" charset="-122"/>
                 <a:cs typeface="Arial" pitchFamily="34" charset="-120"/>
               </a:rPr>
-              <a:t>Passenger — The Baby</a:t>
+              <a:t>Passenger: The Baby</a:t>
             </a:r>
             <a:endParaRPr lang="en-US" sz="1400" dirty="0"/>
           </a:p>
@@ -18739,7 +18739,7 @@
         </p:nvSpPr>
         <p:spPr>
           <a:xfrm>
-            <a:off x="1231075" y="1956816"/>
+            <a:off x="1231075" y="1865376"/>
             <a:ext cx="6681849" cy="2834640"/>
           </a:xfrm>
           <a:prstGeom prst="rect">
@@ -18797,7 +18797,7 @@
                 <a:ea typeface="Arial" pitchFamily="34" charset="-122"/>
                 <a:cs typeface="Arial" pitchFamily="34" charset="-120"/>
               </a:rPr>
-              <a:t>Ideal position: occiput anterior (OA) — baby faces mother’s back</a:t>
+              <a:t>Ideal position: occiput anterior (OA): baby faces mother’s back</a:t>
             </a:r>
             <a:endParaRPr lang="en-US" sz="1400" dirty="0"/>
           </a:p>
@@ -18872,7 +18872,7 @@
                 <a:ea typeface="Arial" pitchFamily="34" charset="-122"/>
                 <a:cs typeface="Arial" pitchFamily="34" charset="-120"/>
               </a:rPr>
-              <a:t>Baby is not passive — position changes help baby find the optimal path</a:t>
+              <a:t>Baby is not passive: position changes help baby find the optimal path</a:t>
             </a:r>
             <a:endParaRPr lang="en-US" sz="1400" dirty="0"/>
           </a:p>
@@ -19053,7 +19053,7 @@
                 <a:ea typeface="Georgia" pitchFamily="34" charset="-122"/>
                 <a:cs typeface="Georgia" pitchFamily="34" charset="-120"/>
               </a:rPr>
-              <a:t>Position &amp; Psyche — The Two You Control Most</a:t>
+              <a:t>Position &amp; Psyche: The Two You Control Most</a:t>
             </a:r>
             <a:endParaRPr lang="en-US" sz="2400" dirty="0"/>
           </a:p>
@@ -19106,7 +19106,7 @@
         </p:nvSpPr>
         <p:spPr>
           <a:xfrm>
-            <a:off x="914400" y="1536192"/>
+            <a:off x="914400" y="1444752"/>
             <a:ext cx="7315200" cy="3310128"/>
           </a:xfrm>
           <a:prstGeom prst="rect">
@@ -19164,7 +19164,7 @@
         </p:nvSpPr>
         <p:spPr>
           <a:xfrm>
-            <a:off x="1231075" y="1645920"/>
+            <a:off x="1231075" y="1554480"/>
             <a:ext cx="6650181" cy="256032"/>
           </a:xfrm>
           <a:prstGeom prst="rect">
@@ -19189,7 +19189,7 @@
                 <a:ea typeface="Arial" pitchFamily="34" charset="-122"/>
                 <a:cs typeface="Arial" pitchFamily="34" charset="-120"/>
               </a:rPr>
-              <a:t>Position — The Birthing Person</a:t>
+              <a:t>Position: The Birthing Person</a:t>
             </a:r>
             <a:endParaRPr lang="en-US" sz="1400" dirty="0"/>
           </a:p>
@@ -19203,7 +19203,7 @@
         </p:nvSpPr>
         <p:spPr>
           <a:xfrm>
-            <a:off x="1231075" y="1956816"/>
+            <a:off x="1231075" y="1865376"/>
             <a:ext cx="6681849" cy="2834640"/>
           </a:xfrm>
           <a:prstGeom prst="rect">
@@ -19236,7 +19236,7 @@
                 <a:ea typeface="Arial" pitchFamily="34" charset="-122"/>
                 <a:cs typeface="Arial" pitchFamily="34" charset="-120"/>
               </a:rPr>
-              <a:t>Most modifiable P — change every 20–30 min</a:t>
+              <a:t>Most modifiable P: change every 20-30 min</a:t>
             </a:r>
             <a:endParaRPr lang="en-US" sz="1400" dirty="0"/>
           </a:p>
@@ -19496,7 +19496,7 @@
                 <a:ea typeface="Georgia" pitchFamily="34" charset="-122"/>
                 <a:cs typeface="Georgia" pitchFamily="34" charset="-120"/>
               </a:rPr>
-              <a:t>Position &amp; Psyche — The Two You Control Most</a:t>
+              <a:t>Position &amp; Psyche: The Two You Control Most</a:t>
             </a:r>
             <a:endParaRPr lang="en-US" sz="2400" dirty="0"/>
           </a:p>
@@ -19632,7 +19632,7 @@
                 <a:ea typeface="Arial" pitchFamily="34" charset="-122"/>
                 <a:cs typeface="Arial" pitchFamily="34" charset="-120"/>
               </a:rPr>
-              <a:t>Psyche — The Emotional State</a:t>
+              <a:t>Psyche: The Emotional State</a:t>
             </a:r>
             <a:endParaRPr lang="en-US" sz="1400" dirty="0"/>
           </a:p>
@@ -19754,7 +19754,7 @@
                 <a:ea typeface="Arial" pitchFamily="34" charset="-122"/>
                 <a:cs typeface="Arial" pitchFamily="34" charset="-120"/>
               </a:rPr>
-              <a:t>Informed clients cope better — knowledge reduces fear</a:t>
+              <a:t>Informed clients cope better: knowledge reduces fear</a:t>
             </a:r>
             <a:endParaRPr lang="en-US" sz="1400" dirty="0"/>
           </a:p>
@@ -19768,8 +19768,8 @@
         </p:nvSpPr>
         <p:spPr>
           <a:xfrm>
-            <a:off x="914400" y="3547872"/>
-            <a:ext cx="7315200" cy="1298448"/>
+            <a:off x="914400" y="3639313"/>
+            <a:ext cx="7315200" cy="1115567"/>
           </a:xfrm>
           <a:prstGeom prst="rect">
             <a:avLst/>
@@ -19851,7 +19851,7 @@
                 <a:ea typeface="Arial" pitchFamily="34" charset="-122"/>
                 <a:cs typeface="Arial" pitchFamily="34" charset="-120"/>
               </a:rPr>
-              <a:t>Doula Script — Psyche Check-In</a:t>
+              <a:t>Doula Script: Psyche Check-In</a:t>
             </a:r>
             <a:endParaRPr lang="en-US" sz="1400" dirty="0"/>
           </a:p>
@@ -19865,7 +19865,7 @@
         </p:nvSpPr>
         <p:spPr>
           <a:xfrm>
-            <a:off x="1199407" y="3968496"/>
+            <a:off x="1199407" y="3803905"/>
             <a:ext cx="6713516" cy="786384"/>
           </a:xfrm>
           <a:prstGeom prst="rect">
@@ -20074,7 +20074,7 @@
                 <a:ea typeface="Georgia" pitchFamily="34" charset="-122"/>
                 <a:cs typeface="Georgia" pitchFamily="34" charset="-120"/>
               </a:rPr>
-              <a:t>Provider — The Team Dynamic</a:t>
+              <a:t>Provider: The Team Dynamic</a:t>
             </a:r>
             <a:endParaRPr lang="en-US" sz="3200" dirty="0"/>
           </a:p>
@@ -20127,7 +20127,7 @@
         </p:nvSpPr>
         <p:spPr>
           <a:xfrm>
-            <a:off x="914400" y="1536192"/>
+            <a:off x="914400" y="1444752"/>
             <a:ext cx="7315200" cy="3310128"/>
           </a:xfrm>
           <a:prstGeom prst="rect">
@@ -20185,7 +20185,7 @@
         </p:nvSpPr>
         <p:spPr>
           <a:xfrm>
-            <a:off x="1231075" y="1645920"/>
+            <a:off x="1231075" y="1554480"/>
             <a:ext cx="6650181" cy="256032"/>
           </a:xfrm>
           <a:prstGeom prst="rect">
@@ -20224,7 +20224,7 @@
         </p:nvSpPr>
         <p:spPr>
           <a:xfrm>
-            <a:off x="1231075" y="1956816"/>
+            <a:off x="1231075" y="1865376"/>
             <a:ext cx="6681849" cy="2834640"/>
           </a:xfrm>
           <a:prstGeom prst="rect">
@@ -20357,7 +20357,7 @@
                 <a:ea typeface="Arial" pitchFamily="34" charset="-122"/>
                 <a:cs typeface="Arial" pitchFamily="34" charset="-120"/>
               </a:rPr>
-              <a:t>Bridge — never undermine</a:t>
+              <a:t>Bridge: never undermine</a:t>
             </a:r>
             <a:endParaRPr lang="en-US" sz="1400" dirty="0"/>
           </a:p>
@@ -20492,7 +20492,7 @@
                 <a:ea typeface="Georgia" pitchFamily="34" charset="-122"/>
                 <a:cs typeface="Georgia" pitchFamily="34" charset="-120"/>
               </a:rPr>
-              <a:t>Provider — The Team Dynamic</a:t>
+              <a:t>Provider: The Team Dynamic</a:t>
             </a:r>
             <a:endParaRPr lang="en-US" sz="3200" dirty="0"/>
           </a:p>
@@ -20545,8 +20545,8 @@
         </p:nvSpPr>
         <p:spPr>
           <a:xfrm>
-            <a:off x="914400" y="1536192"/>
-            <a:ext cx="7315200" cy="1700784"/>
+            <a:off x="914400" y="1792224"/>
+            <a:ext cx="7315200" cy="1536192"/>
           </a:xfrm>
           <a:prstGeom prst="rect">
             <a:avLst/>
@@ -20628,7 +20628,7 @@
                 <a:ea typeface="Arial" pitchFamily="34" charset="-122"/>
                 <a:cs typeface="Arial" pitchFamily="34" charset="-120"/>
               </a:rPr>
-              <a:t>Cochrane Review — All Six P’s Connected</a:t>
+              <a:t>Cochrane Review: All Six P’s Connected</a:t>
             </a:r>
             <a:endParaRPr lang="en-US" sz="1400" dirty="0"/>
           </a:p>
@@ -20684,7 +20684,7 @@
         </p:nvSpPr>
         <p:spPr>
           <a:xfrm>
-            <a:off x="914400" y="3346704"/>
+            <a:off x="914400" y="3255264"/>
             <a:ext cx="7315200" cy="1499616"/>
           </a:xfrm>
           <a:prstGeom prst="rect">
@@ -20742,7 +20742,7 @@
         </p:nvSpPr>
         <p:spPr>
           <a:xfrm>
-            <a:off x="1231075" y="3456432"/>
+            <a:off x="1231075" y="3364992"/>
             <a:ext cx="6650181" cy="256032"/>
           </a:xfrm>
           <a:prstGeom prst="rect">
@@ -20781,7 +20781,7 @@
         </p:nvSpPr>
         <p:spPr>
           <a:xfrm>
-            <a:off x="1231075" y="3749040"/>
+            <a:off x="1231075" y="3657600"/>
             <a:ext cx="6681849" cy="1060704"/>
           </a:xfrm>
           <a:prstGeom prst="rect">
@@ -21242,7 +21242,7 @@
                 <a:ea typeface="Georgia" pitchFamily="34" charset="-122"/>
                 <a:cs typeface="Georgia" pitchFamily="34" charset="-120"/>
               </a:rPr>
-              <a:t>Your job is to help families make informed decisions — not to make the decision for them.</a:t>
+              <a:t>Your job is to help families make informed decisions: not to make the decision for them.</a:t>
             </a:r>
             <a:endParaRPr lang="en-US" sz="1400" dirty="0"/>
           </a:p>
@@ -21398,7 +21398,7 @@
         </p:nvSpPr>
         <p:spPr>
           <a:xfrm>
-            <a:off x="292608" y="1536192"/>
+            <a:off x="292608" y="1444752"/>
             <a:ext cx="4224528" cy="3310128"/>
           </a:xfrm>
           <a:prstGeom prst="rect">
@@ -21456,7 +21456,7 @@
         </p:nvSpPr>
         <p:spPr>
           <a:xfrm>
-            <a:off x="475488" y="1645920"/>
+            <a:off x="475488" y="1554480"/>
             <a:ext cx="3840480" cy="256032"/>
           </a:xfrm>
           <a:prstGeom prst="rect">
@@ -21481,7 +21481,7 @@
                 <a:ea typeface="Arial" pitchFamily="34" charset="-122"/>
                 <a:cs typeface="Arial" pitchFamily="34" charset="-120"/>
               </a:rPr>
-              <a:t>Induction — Starting Labor</a:t>
+              <a:t>Induction: Starting Labor</a:t>
             </a:r>
             <a:endParaRPr lang="en-US" sz="1400" dirty="0"/>
           </a:p>
@@ -21495,7 +21495,7 @@
         </p:nvSpPr>
         <p:spPr>
           <a:xfrm>
-            <a:off x="475488" y="1956816"/>
+            <a:off x="475488" y="1865376"/>
             <a:ext cx="3858768" cy="2743200"/>
           </a:xfrm>
           <a:prstGeom prst="rect">
@@ -21642,7 +21642,7 @@
         </p:nvSpPr>
         <p:spPr>
           <a:xfrm>
-            <a:off x="4663440" y="1536192"/>
+            <a:off x="4663440" y="1444752"/>
             <a:ext cx="4224528" cy="3310128"/>
           </a:xfrm>
           <a:prstGeom prst="rect">
@@ -21700,7 +21700,7 @@
         </p:nvSpPr>
         <p:spPr>
           <a:xfrm>
-            <a:off x="4846320" y="1645920"/>
+            <a:off x="4846320" y="1554480"/>
             <a:ext cx="3840480" cy="256032"/>
           </a:xfrm>
           <a:prstGeom prst="rect">
@@ -21725,7 +21725,7 @@
                 <a:ea typeface="Arial" pitchFamily="34" charset="-122"/>
                 <a:cs typeface="Arial" pitchFamily="34" charset="-120"/>
               </a:rPr>
-              <a:t>Augmentation — Strengthening Labor</a:t>
+              <a:t>Augmentation: Strengthening Labor</a:t>
             </a:r>
             <a:endParaRPr lang="en-US" sz="1400" dirty="0"/>
           </a:p>
@@ -21739,7 +21739,7 @@
         </p:nvSpPr>
         <p:spPr>
           <a:xfrm>
-            <a:off x="4846320" y="1956816"/>
+            <a:off x="4846320" y="1865376"/>
             <a:ext cx="3858768" cy="2743200"/>
           </a:xfrm>
           <a:prstGeom prst="rect">
@@ -21872,7 +21872,7 @@
                 <a:ea typeface="Arial" pitchFamily="34" charset="-122"/>
                 <a:cs typeface="Arial" pitchFamily="34" charset="-120"/>
               </a:rPr>
-              <a:t>Does NOT mean something is wrong — often a normal part of labor</a:t>
+              <a:t>Does NOT mean something is wrong: often a normal part of labor</a:t>
             </a:r>
             <a:endParaRPr lang="en-US" sz="1400" dirty="0"/>
           </a:p>
@@ -22106,7 +22106,7 @@
         </p:nvSpPr>
         <p:spPr>
           <a:xfrm>
-            <a:off x="292608" y="1536192"/>
+            <a:off x="292608" y="1444752"/>
             <a:ext cx="4224528" cy="3310128"/>
           </a:xfrm>
           <a:prstGeom prst="rect">
@@ -22164,7 +22164,7 @@
         </p:nvSpPr>
         <p:spPr>
           <a:xfrm>
-            <a:off x="475488" y="1645920"/>
+            <a:off x="475488" y="1554480"/>
             <a:ext cx="3840480" cy="256032"/>
           </a:xfrm>
           <a:prstGeom prst="rect">
@@ -22203,7 +22203,7 @@
         </p:nvSpPr>
         <p:spPr>
           <a:xfrm>
-            <a:off x="475488" y="1956816"/>
+            <a:off x="475488" y="1865376"/>
             <a:ext cx="3858768" cy="2743200"/>
           </a:xfrm>
           <a:prstGeom prst="rect">
@@ -22236,7 +22236,7 @@
                 <a:ea typeface="Arial" pitchFamily="34" charset="-122"/>
                 <a:cs typeface="Arial" pitchFamily="34" charset="-120"/>
               </a:rPr>
-              <a:t>Pregnancy past 41–42 weeks (post-dates)</a:t>
+              <a:t>Pregnancy past 41-42 weeks (post-dates)</a:t>
             </a:r>
             <a:endParaRPr lang="en-US" sz="1400" dirty="0"/>
           </a:p>
@@ -22594,8 +22594,8 @@
         </p:nvSpPr>
         <p:spPr>
           <a:xfrm>
-            <a:off x="4663440" y="3584448"/>
-            <a:ext cx="4224528" cy="1261872"/>
+            <a:off x="4663440" y="3639313"/>
+            <a:ext cx="4224528" cy="1115567"/>
           </a:xfrm>
           <a:prstGeom prst="rect">
             <a:avLst/>
@@ -22677,7 +22677,7 @@
                 <a:ea typeface="Arial" pitchFamily="34" charset="-122"/>
                 <a:cs typeface="Arial" pitchFamily="34" charset="-120"/>
               </a:rPr>
-              <a:t>Clinical Note — The Bishop Score</a:t>
+              <a:t>Clinical Note: The Bishop Score</a:t>
             </a:r>
             <a:endParaRPr lang="en-US" sz="1400" dirty="0"/>
           </a:p>
@@ -22691,7 +22691,7 @@
         </p:nvSpPr>
         <p:spPr>
           <a:xfrm>
-            <a:off x="4828032" y="4005072"/>
+            <a:off x="4828032" y="3803904"/>
             <a:ext cx="3877056" cy="786384"/>
           </a:xfrm>
           <a:prstGeom prst="rect">
@@ -22719,7 +22719,7 @@
                 <a:ea typeface="Arial" pitchFamily="34" charset="-122"/>
                 <a:cs typeface="Arial" pitchFamily="34" charset="-120"/>
               </a:rPr>
-              <a:t>Providers assess cervical readiness with the Bishop Score (dilation, effacement, consistency, position, station). Score 8+ = favorable for induction. Lower = cervical ripening first, and induction may take 12–24 hours before active labor begins.</a:t>
+              <a:t>Providers assess cervical readiness with the Bishop Score (dilation, effacement, consistency, position, station). Score 8+ = favorable for induction. Lower = cervical ripening first, and induction may take 12-24 hours before active labor begins.</a:t>
             </a:r>
             <a:endParaRPr lang="en-US" sz="1400" dirty="0"/>
           </a:p>
@@ -22939,7 +22939,7 @@
                 <a:ea typeface="Georgia" pitchFamily="34" charset="-122"/>
                 <a:cs typeface="Georgia" pitchFamily="34" charset="-120"/>
               </a:rPr>
-              <a:t>This distinction is tested on the ICEA certification exam — and it matters in the clinical setting.</a:t>
+              <a:t>This distinction is tested on the ICEA certification exam, and it matters in the clinical setting.</a:t>
             </a:r>
             <a:endParaRPr lang="en-US" sz="1400" dirty="0"/>
           </a:p>
@@ -22953,8 +22953,8 @@
         </p:nvSpPr>
         <p:spPr>
           <a:xfrm>
-            <a:off x="292608" y="1554480"/>
-            <a:ext cx="4206240" cy="3291840"/>
+            <a:off x="292608" y="1499616"/>
+            <a:ext cx="4206240" cy="3026663"/>
           </a:xfrm>
           <a:prstGeom prst="rect">
             <a:avLst/>
@@ -22982,8 +22982,8 @@
         </p:nvSpPr>
         <p:spPr>
           <a:xfrm>
-            <a:off x="292608" y="1554480"/>
-            <a:ext cx="64008" cy="3291840"/>
+            <a:off x="292608" y="1499616"/>
+            <a:ext cx="64008" cy="3026663"/>
           </a:xfrm>
           <a:prstGeom prst="rect">
             <a:avLst/>
@@ -23083,7 +23083,7 @@
                 <a:ea typeface="Arial" pitchFamily="34" charset="-122"/>
                 <a:cs typeface="Arial" pitchFamily="34" charset="-120"/>
               </a:rPr>
-              <a:t>Stage 1: Labor (0–10 cm dilation)</a:t>
+              <a:t>Stage 1: Labor (0-10 cm dilation)</a:t>
             </a:r>
             <a:endParaRPr lang="en-US" sz="1400" dirty="0"/>
           </a:p>
@@ -23158,7 +23158,7 @@
                 <a:ea typeface="Arial" pitchFamily="34" charset="-122"/>
                 <a:cs typeface="Arial" pitchFamily="34" charset="-120"/>
               </a:rPr>
-              <a:t>Stage 4: Recovery — the Golden Hour</a:t>
+              <a:t>Stage 4: Recovery: the Golden Hour</a:t>
             </a:r>
             <a:endParaRPr lang="en-US" sz="1400" dirty="0"/>
           </a:p>
@@ -23211,8 +23211,8 @@
         </p:nvSpPr>
         <p:spPr>
           <a:xfrm>
-            <a:off x="4663440" y="1554480"/>
-            <a:ext cx="4206240" cy="3291840"/>
+            <a:off x="4663440" y="1499616"/>
+            <a:ext cx="4206240" cy="3026663"/>
           </a:xfrm>
           <a:prstGeom prst="rect">
             <a:avLst/>
@@ -23240,8 +23240,8 @@
         </p:nvSpPr>
         <p:spPr>
           <a:xfrm>
-            <a:off x="4663440" y="1554480"/>
-            <a:ext cx="64008" cy="3291840"/>
+            <a:off x="4663440" y="1499616"/>
+            <a:ext cx="64008" cy="3026663"/>
           </a:xfrm>
           <a:prstGeom prst="rect">
             <a:avLst/>
@@ -23341,7 +23341,7 @@
                 <a:ea typeface="Arial" pitchFamily="34" charset="-122"/>
                 <a:cs typeface="Arial" pitchFamily="34" charset="-120"/>
               </a:rPr>
-              <a:t>Early/Latent phase (roughly 0–6 cm)</a:t>
+              <a:t>Early/Latent phase (roughly 0-6 cm)</a:t>
             </a:r>
             <a:endParaRPr lang="en-US" sz="1400" dirty="0"/>
           </a:p>
@@ -23366,7 +23366,7 @@
                 <a:ea typeface="Arial" pitchFamily="34" charset="-122"/>
                 <a:cs typeface="Arial" pitchFamily="34" charset="-120"/>
               </a:rPr>
-              <a:t>Active phase (roughly 6–8 cm)</a:t>
+              <a:t>Active phase (roughly 6-8 cm)</a:t>
             </a:r>
             <a:endParaRPr lang="en-US" sz="1400" dirty="0"/>
           </a:p>
@@ -23391,7 +23391,7 @@
                 <a:ea typeface="Arial" pitchFamily="34" charset="-122"/>
                 <a:cs typeface="Arial" pitchFamily="34" charset="-120"/>
               </a:rPr>
-              <a:t>Transition phase (8–10 cm)</a:t>
+              <a:t>Transition phase (8-10 cm)</a:t>
             </a:r>
             <a:endParaRPr lang="en-US" sz="1400" dirty="0"/>
           </a:p>
@@ -23430,7 +23430,7 @@
                 <a:ea typeface="Georgia" pitchFamily="34" charset="-122"/>
                 <a:cs typeface="Georgia" pitchFamily="34" charset="-120"/>
               </a:rPr>
-              <a:t>Phases flow into each other gradually — like a dimmer switch, not on/off.</a:t>
+              <a:t>Phases flow into each other gradually: like a dimmer switch, not on/off.</a:t>
             </a:r>
             <a:endParaRPr lang="en-US" sz="1200" dirty="0"/>
           </a:p>
@@ -23603,7 +23603,7 @@
               <a:buNone/>
             </a:pPr>
             <a:r>
-              <a:rPr lang="en-US" sz="2800" b="1" dirty="0">
+              <a:rPr lang="en-US" sz="3200" b="1" dirty="0">
                 <a:solidFill>
                   <a:srgbClr val="5E376C"/>
                 </a:solidFill>
@@ -23611,7 +23611,7 @@
                 <a:ea typeface="Georgia" pitchFamily="34" charset="-122"/>
                 <a:cs typeface="Georgia" pitchFamily="34" charset="-120"/>
               </a:rPr>
-              <a:t>Induction Methods — At a Glance</a:t>
+              <a:t>Induction Methods: At a Glance</a:t>
             </a:r>
             <a:endParaRPr lang="en-US" sz="2800" dirty="0"/>
           </a:p>
@@ -23710,7 +23710,7 @@
               <a:buNone/>
             </a:pPr>
             <a:r>
-              <a:rPr lang="en-US" sz="1400" b="1" dirty="0">
+              <a:rPr lang="en-US" sz="1100" b="1" dirty="0">
                 <a:solidFill>
                   <a:srgbClr val="FFFFFF"/>
                 </a:solidFill>
@@ -23749,7 +23749,7 @@
               <a:buNone/>
             </a:pPr>
             <a:r>
-              <a:rPr lang="en-US" sz="1400" b="1" dirty="0">
+              <a:rPr lang="en-US" sz="1100" b="1" dirty="0">
                 <a:solidFill>
                   <a:srgbClr val="FFFFFF"/>
                 </a:solidFill>
@@ -23788,7 +23788,7 @@
               <a:buNone/>
             </a:pPr>
             <a:r>
-              <a:rPr lang="en-US" sz="1400" b="1" dirty="0">
+              <a:rPr lang="en-US" sz="1100" b="1" dirty="0">
                 <a:solidFill>
                   <a:srgbClr val="FFFFFF"/>
                 </a:solidFill>
@@ -23811,7 +23811,7 @@
         <p:spPr>
           <a:xfrm>
             <a:off x="292608" y="1828800"/>
-            <a:ext cx="8558784" cy="1005840"/>
+            <a:ext cx="8558784" cy="758952"/>
           </a:xfrm>
           <a:prstGeom prst="rect">
             <a:avLst/>
@@ -23839,8 +23839,8 @@
         </p:nvSpPr>
         <p:spPr>
           <a:xfrm>
-            <a:off x="384048" y="1883664"/>
-            <a:ext cx="1280160" cy="896112"/>
+            <a:off x="384048" y="1874519"/>
+            <a:ext cx="1280160" cy="713232"/>
           </a:xfrm>
           <a:prstGeom prst="rect">
             <a:avLst/>
@@ -23859,7 +23859,7 @@
               <a:buNone/>
             </a:pPr>
             <a:r>
-              <a:rPr lang="en-US" sz="1400" b="1" dirty="0">
+              <a:rPr lang="en-US" sz="1000" b="1" dirty="0">
                 <a:solidFill>
                   <a:srgbClr val="5E376C"/>
                 </a:solidFill>
@@ -23879,7 +23879,7 @@
               <a:buNone/>
             </a:pPr>
             <a:r>
-              <a:rPr lang="en-US" sz="1400" b="1" dirty="0">
+              <a:rPr lang="en-US" sz="1000" b="1" dirty="0">
                 <a:solidFill>
                   <a:srgbClr val="5E376C"/>
                 </a:solidFill>
@@ -23901,8 +23901,8 @@
         </p:nvSpPr>
         <p:spPr>
           <a:xfrm>
-            <a:off x="1865376" y="1883664"/>
-            <a:ext cx="3255264" cy="896112"/>
+            <a:off x="1865376" y="1874519"/>
+            <a:ext cx="3255264" cy="713232"/>
           </a:xfrm>
           <a:prstGeom prst="rect">
             <a:avLst/>
@@ -23921,7 +23921,7 @@
               <a:buNone/>
             </a:pPr>
             <a:r>
-              <a:rPr lang="en-US" sz="1400" dirty="0">
+              <a:rPr lang="en-US" sz="1000" dirty="0">
                 <a:solidFill>
                   <a:srgbClr val="2D2D2D"/>
                 </a:solidFill>
@@ -23929,7 +23929,7 @@
                 <a:ea typeface="Arial" pitchFamily="34" charset="-122"/>
                 <a:cs typeface="Arial" pitchFamily="34" charset="-120"/>
               </a:rPr>
-              <a:t>Prostaglandins soften and thin the cervix. Cervidil = insert (removable). Cytotec = pill (not removable). Usually given overnight. Causes cramping.</a:t>
+              <a:t>Prostaglandins soften &amp; thin the cervix. Cervidil = removable insert. Cytotec = pill. Usually overnight.</a:t>
             </a:r>
             <a:endParaRPr lang="en-US" sz="1400" dirty="0"/>
           </a:p>
@@ -23943,8 +23943,8 @@
         </p:nvSpPr>
         <p:spPr>
           <a:xfrm>
-            <a:off x="5340096" y="1883664"/>
-            <a:ext cx="3383280" cy="896112"/>
+            <a:off x="5340096" y="1874519"/>
+            <a:ext cx="3383280" cy="713232"/>
           </a:xfrm>
           <a:prstGeom prst="rect">
             <a:avLst/>
@@ -23963,7 +23963,7 @@
               <a:buNone/>
             </a:pPr>
             <a:r>
-              <a:rPr lang="en-US" sz="1400" dirty="0">
+              <a:rPr lang="en-US" sz="1000" dirty="0">
                 <a:solidFill>
                   <a:srgbClr val="2D2D2D"/>
                 </a:solidFill>
@@ -23971,7 +23971,7 @@
                 <a:ea typeface="Arial" pitchFamily="34" charset="-122"/>
                 <a:cs typeface="Arial" pitchFamily="34" charset="-120"/>
               </a:rPr>
-              <a:t>Normalize the long wait. Keep her comfortable. Encourage rest — this phase can take 12+ hours before Pitocin even starts.</a:t>
+              <a:t>Normalize the long wait. Keep her comfortable. Encourage rest: this phase can take 12+ hours before Pitocin even starts.</a:t>
             </a:r>
             <a:endParaRPr lang="en-US" sz="1400" dirty="0"/>
           </a:p>
@@ -23985,8 +23985,8 @@
         </p:nvSpPr>
         <p:spPr>
           <a:xfrm>
-            <a:off x="292608" y="2834640"/>
-            <a:ext cx="8558784" cy="1005840"/>
+            <a:off x="292608" y="2587752"/>
+            <a:ext cx="8558784" cy="758952"/>
           </a:xfrm>
           <a:prstGeom prst="rect">
             <a:avLst/>
@@ -24014,8 +24014,8 @@
         </p:nvSpPr>
         <p:spPr>
           <a:xfrm>
-            <a:off x="384048" y="2889504"/>
-            <a:ext cx="1280160" cy="896112"/>
+            <a:off x="384048" y="2633472"/>
+            <a:ext cx="1280160" cy="713232"/>
           </a:xfrm>
           <a:prstGeom prst="rect">
             <a:avLst/>
@@ -24034,7 +24034,7 @@
               <a:buNone/>
             </a:pPr>
             <a:r>
-              <a:rPr lang="en-US" sz="1400" b="1" dirty="0">
+              <a:rPr lang="en-US" sz="1000" b="1" dirty="0">
                 <a:solidFill>
                   <a:srgbClr val="5E376C"/>
                 </a:solidFill>
@@ -24056,8 +24056,8 @@
         </p:nvSpPr>
         <p:spPr>
           <a:xfrm>
-            <a:off x="1865376" y="2889504"/>
-            <a:ext cx="3255264" cy="896112"/>
+            <a:off x="1865376" y="2633472"/>
+            <a:ext cx="3255264" cy="713232"/>
           </a:xfrm>
           <a:prstGeom prst="rect">
             <a:avLst/>
@@ -24076,7 +24076,7 @@
               <a:buNone/>
             </a:pPr>
             <a:r>
-              <a:rPr lang="en-US" sz="1400" dirty="0">
+              <a:rPr lang="en-US" sz="1000" dirty="0">
                 <a:solidFill>
                   <a:srgbClr val="2D2D2D"/>
                 </a:solidFill>
@@ -24084,7 +24084,7 @@
                 <a:ea typeface="Arial" pitchFamily="34" charset="-122"/>
                 <a:cs typeface="Arial" pitchFamily="34" charset="-120"/>
               </a:rPr>
-              <a:t>Balloon catheter inflated on both sides of the cervix to manually press it open. No medication. Falls out around 3–4 cm dilation.</a:t>
+              <a:t>Balloon inflated on both sides of cervix to press it open. No medication. Falls out around 3-4 cm.</a:t>
             </a:r>
             <a:endParaRPr lang="en-US" sz="1400" dirty="0"/>
           </a:p>
@@ -24098,8 +24098,8 @@
         </p:nvSpPr>
         <p:spPr>
           <a:xfrm>
-            <a:off x="5340096" y="2889504"/>
-            <a:ext cx="3383280" cy="896112"/>
+            <a:off x="5340096" y="2633472"/>
+            <a:ext cx="3383280" cy="713232"/>
           </a:xfrm>
           <a:prstGeom prst="rect">
             <a:avLst/>
@@ -24118,7 +24118,7 @@
               <a:buNone/>
             </a:pPr>
             <a:r>
-              <a:rPr lang="en-US" sz="1400" dirty="0">
+              <a:rPr lang="en-US" sz="1000" dirty="0">
                 <a:solidFill>
                   <a:srgbClr val="2D2D2D"/>
                 </a:solidFill>
@@ -24140,8 +24140,8 @@
         </p:nvSpPr>
         <p:spPr>
           <a:xfrm>
-            <a:off x="292608" y="3840480"/>
-            <a:ext cx="8558784" cy="1005840"/>
+            <a:off x="292608" y="3346704"/>
+            <a:ext cx="8558784" cy="758952"/>
           </a:xfrm>
           <a:prstGeom prst="rect">
             <a:avLst/>
@@ -24169,8 +24169,8 @@
         </p:nvSpPr>
         <p:spPr>
           <a:xfrm>
-            <a:off x="384048" y="3895344"/>
-            <a:ext cx="1280160" cy="896112"/>
+            <a:off x="384048" y="3392424"/>
+            <a:ext cx="1280160" cy="713232"/>
           </a:xfrm>
           <a:prstGeom prst="rect">
             <a:avLst/>
@@ -24189,7 +24189,7 @@
               <a:buNone/>
             </a:pPr>
             <a:r>
-              <a:rPr lang="en-US" sz="1400" b="1" dirty="0">
+              <a:rPr lang="en-US" sz="1000" b="1" dirty="0">
                 <a:solidFill>
                   <a:srgbClr val="5E376C"/>
                 </a:solidFill>
@@ -24211,8 +24211,8 @@
         </p:nvSpPr>
         <p:spPr>
           <a:xfrm>
-            <a:off x="1865376" y="3895344"/>
-            <a:ext cx="3255264" cy="896112"/>
+            <a:off x="1865376" y="3392424"/>
+            <a:ext cx="3255264" cy="713232"/>
           </a:xfrm>
           <a:prstGeom prst="rect">
             <a:avLst/>
@@ -24231,7 +24231,7 @@
               <a:buNone/>
             </a:pPr>
             <a:r>
-              <a:rPr lang="en-US" sz="1400" dirty="0">
+              <a:rPr lang="en-US" sz="1000" dirty="0">
                 <a:solidFill>
                   <a:srgbClr val="2D2D2D"/>
                 </a:solidFill>
@@ -24239,7 +24239,7 @@
                 <a:ea typeface="Arial" pitchFamily="34" charset="-122"/>
                 <a:cs typeface="Arial" pitchFamily="34" charset="-120"/>
               </a:rPr>
-              <a:t>Synthetic oxytocin via IV drip, starting low and increasing until effective contractions every 2–3 min. Requires continuous fetal monitoring.</a:t>
+              <a:t>Synthetic oxytocin IV drip. Starts low, increases until contractions every 2-3 min. Continuous monitoring.</a:t>
             </a:r>
             <a:endParaRPr lang="en-US" sz="1400" dirty="0"/>
           </a:p>
@@ -24253,8 +24253,8 @@
         </p:nvSpPr>
         <p:spPr>
           <a:xfrm>
-            <a:off x="5340096" y="3895344"/>
-            <a:ext cx="3383280" cy="896112"/>
+            <a:off x="5340096" y="3392424"/>
+            <a:ext cx="3383280" cy="713232"/>
           </a:xfrm>
           <a:prstGeom prst="rect">
             <a:avLst/>
@@ -24273,7 +24273,7 @@
               <a:buNone/>
             </a:pPr>
             <a:r>
-              <a:rPr lang="en-US" sz="1400" dirty="0">
+              <a:rPr lang="en-US" sz="1000" dirty="0">
                 <a:solidFill>
                   <a:srgbClr val="2D2D2D"/>
                 </a:solidFill>
@@ -24295,8 +24295,8 @@
         </p:nvSpPr>
         <p:spPr>
           <a:xfrm>
-            <a:off x="292608" y="4846320"/>
-            <a:ext cx="8558784" cy="1005840"/>
+            <a:off x="292608" y="3922776"/>
+            <a:ext cx="8558784" cy="758952"/>
           </a:xfrm>
           <a:prstGeom prst="rect">
             <a:avLst/>
@@ -24324,8 +24324,8 @@
         </p:nvSpPr>
         <p:spPr>
           <a:xfrm>
-            <a:off x="384048" y="4901184"/>
-            <a:ext cx="1280160" cy="896112"/>
+            <a:off x="384048" y="3968496"/>
+            <a:ext cx="1280160" cy="713232"/>
           </a:xfrm>
           <a:prstGeom prst="rect">
             <a:avLst/>
@@ -24344,7 +24344,7 @@
               <a:buNone/>
             </a:pPr>
             <a:r>
-              <a:rPr lang="en-US" sz="1200" b="1" dirty="0">
+              <a:rPr lang="en-US" sz="1000" b="1" dirty="0">
                 <a:solidFill>
                   <a:srgbClr val="5E376C"/>
                 </a:solidFill>
@@ -24366,8 +24366,8 @@
         </p:nvSpPr>
         <p:spPr>
           <a:xfrm>
-            <a:off x="1865376" y="4901184"/>
-            <a:ext cx="3255264" cy="896112"/>
+            <a:off x="1865376" y="3968496"/>
+            <a:ext cx="3255264" cy="713232"/>
           </a:xfrm>
           <a:prstGeom prst="rect">
             <a:avLst/>
@@ -24386,7 +24386,7 @@
               <a:buNone/>
             </a:pPr>
             <a:r>
-              <a:rPr lang="en-US" sz="1200" dirty="0">
+              <a:rPr lang="en-US" sz="1000" dirty="0">
                 <a:solidFill>
                   <a:srgbClr val="2D2D2D"/>
                 </a:solidFill>
@@ -24394,7 +24394,7 @@
                 <a:ea typeface="Arial" pitchFamily="34" charset="-122"/>
                 <a:cs typeface="Arial" pitchFamily="34" charset="-120"/>
               </a:rPr>
-              <a:t>Amniotomy: provider uses a small hook to rupture membranes. Intensifies contractions in 30–60 min. Once done, a clock starts on infection risk.</a:t>
+              <a:t>Amniotomy: provider uses a small hook to rupture membranes. Speeds labor in active phase.</a:t>
             </a:r>
             <a:endParaRPr lang="en-US" sz="1200" dirty="0"/>
           </a:p>
@@ -24408,8 +24408,8 @@
         </p:nvSpPr>
         <p:spPr>
           <a:xfrm>
-            <a:off x="5340096" y="4901184"/>
-            <a:ext cx="3383280" cy="896112"/>
+            <a:off x="5340096" y="3968496"/>
+            <a:ext cx="3383280" cy="713232"/>
           </a:xfrm>
           <a:prstGeom prst="rect">
             <a:avLst/>
@@ -24428,7 +24428,7 @@
               <a:buNone/>
             </a:pPr>
             <a:r>
-              <a:rPr lang="en-US" sz="1200" dirty="0">
+              <a:rPr lang="en-US" sz="1000" dirty="0">
                 <a:solidFill>
                   <a:srgbClr val="2D2D2D"/>
                 </a:solidFill>
@@ -24436,7 +24436,7 @@
                 <a:ea typeface="Arial" pitchFamily="34" charset="-122"/>
                 <a:cs typeface="Arial" pitchFamily="34" charset="-120"/>
               </a:rPr>
-              <a:t>Reassure her the warm gush is normal and fluid keeps coming. Position changes may be limited if baby's position is a concern.</a:t>
+              <a:t>Reassure her the warm gush is normal. Fluid keeps coming. Help her change pads as needed.</a:t>
             </a:r>
             <a:endParaRPr lang="en-US" sz="1200" dirty="0"/>
           </a:p>
@@ -24450,8 +24450,8 @@
         </p:nvSpPr>
         <p:spPr>
           <a:xfrm>
-            <a:off x="256032" y="4864608"/>
-            <a:ext cx="4114800" cy="201168"/>
+            <a:off x="256032" y="3922776"/>
+            <a:ext cx="4114800" cy="758952"/>
           </a:xfrm>
           <a:prstGeom prst="rect">
             <a:avLst/>
@@ -24467,7 +24467,7 @@
               <a:buNone/>
             </a:pPr>
             <a:r>
-              <a:rPr lang="en-US" sz="1200" dirty="0">
+              <a:rPr lang="en-US" sz="1000" dirty="0">
                 <a:solidFill>
                   <a:srgbClr val="8B6A9E"/>
                 </a:solidFill>
@@ -24489,8 +24489,8 @@
         </p:nvSpPr>
         <p:spPr>
           <a:xfrm>
-            <a:off x="4754880" y="4864608"/>
-            <a:ext cx="4133088" cy="201168"/>
+            <a:off x="4754880" y="3922776"/>
+            <a:ext cx="4133088" cy="758952"/>
           </a:xfrm>
           <a:prstGeom prst="rect">
             <a:avLst/>
@@ -24506,7 +24506,7 @@
               <a:buNone/>
             </a:pPr>
             <a:r>
-              <a:rPr lang="en-US" sz="1200" dirty="0">
+              <a:rPr lang="en-US" sz="1000" dirty="0">
                 <a:solidFill>
                   <a:srgbClr val="8B6A9E"/>
                 </a:solidFill>
@@ -24617,7 +24617,7 @@
                 <a:ea typeface="Georgia" pitchFamily="34" charset="-122"/>
                 <a:cs typeface="Georgia" pitchFamily="34" charset="-120"/>
               </a:rPr>
-              <a:t>The ARRIVE Trial — What the Evidence Actually Says</a:t>
+              <a:t>The ARRIVE Trial: What the Evidence Actually Says</a:t>
             </a:r>
             <a:endParaRPr lang="en-US" sz="2400" dirty="0"/>
           </a:p>
@@ -24656,7 +24656,7 @@
                 <a:ea typeface="Georgia" pitchFamily="34" charset="-122"/>
                 <a:cs typeface="Georgia" pitchFamily="34" charset="-120"/>
               </a:rPr>
-              <a:t>Clients will ask you about this. Know it cold — then help them ask their own questions.</a:t>
+              <a:t>Clients will ask you about this. Know it cold. Then help them ask their own questions.</a:t>
             </a:r>
             <a:endParaRPr lang="en-US" sz="1400" dirty="0"/>
           </a:p>
@@ -24787,7 +24787,7 @@
               <a:buNone/>
             </a:pPr>
             <a:r>
-              <a:rPr lang="en-US" sz="1400" dirty="0">
+              <a:rPr lang="en-US" sz="1300" dirty="0">
                 <a:solidFill>
                   <a:srgbClr val="2D2D2D"/>
                 </a:solidFill>
@@ -24795,9 +24795,27 @@
                 <a:ea typeface="Arial" pitchFamily="34" charset="-122"/>
                 <a:cs typeface="Arial" pitchFamily="34" charset="-120"/>
               </a:rPr>
-              <a:t>A large randomized controlled trial comparing elective induction at 39 weeks to expectant management in low-risk pregnancies. Key finding: induction at 39 weeks did NOT increase cesarean rates — and was associated with slightly lower rates of some perinatal complications. This directly challenged the long-held belief that induction automatically leads to more cesareans.</a:t>
-            </a:r>
-            <a:endParaRPr lang="en-US" sz="1400" dirty="0"/>
+              <a:t>2018 study: elective induction at 39 weeks vs. waiting.</a:t>
+            </a:r>
+            <a:endParaRPr lang="en-US" sz="1400" dirty="0"/>
+          </a:p>
+          <a:p>
+            <a:r>
+              <a:rPr sz="1300"/>
+              <a:t>Key finding: induction did NOT raise C-section rates.</a:t>
+            </a:r>
+          </a:p>
+          <a:p>
+            <a:r>
+              <a:rPr sz="1300"/>
+              <a:t>Slightly fewer perinatal complications.</a:t>
+            </a:r>
+          </a:p>
+          <a:p>
+            <a:r>
+              <a:rPr sz="1300"/>
+              <a:t>This challenged the old belief that induction = more C-sections.</a:t>
+            </a:r>
           </a:p>
         </p:txBody>
       </p:sp>
@@ -24809,7 +24827,7 @@
         </p:nvSpPr>
         <p:spPr>
           <a:xfrm>
-            <a:off x="292608" y="3529584"/>
+            <a:off x="292608" y="3456432"/>
             <a:ext cx="4224528" cy="1298448"/>
           </a:xfrm>
           <a:prstGeom prst="rect">
@@ -24867,7 +24885,7 @@
         </p:nvSpPr>
         <p:spPr>
           <a:xfrm>
-            <a:off x="475488" y="3639312"/>
+            <a:off x="475488" y="3566160"/>
             <a:ext cx="3840480" cy="256032"/>
           </a:xfrm>
           <a:prstGeom prst="rect">
@@ -24906,7 +24924,7 @@
         </p:nvSpPr>
         <p:spPr>
           <a:xfrm>
-            <a:off x="475488" y="3931920"/>
+            <a:off x="475488" y="3858768"/>
             <a:ext cx="3858768" cy="841248"/>
           </a:xfrm>
           <a:prstGeom prst="rect">
@@ -24929,9 +24947,10 @@
               <a:buSzPts val="1400"/>
               <a:buFont typeface="Arial"/>
               <a:buChar char="•"/>
-            </a:pPr>
-            <a:r>
-              <a:rPr lang="en-US" sz="1400" dirty="0">
+              <a:buSzPts val="1200"/>
+            </a:pPr>
+            <a:r>
+              <a:rPr lang="en-US" sz="1200" dirty="0">
                 <a:solidFill>
                   <a:srgbClr val="2D2D2D"/>
                 </a:solidFill>
@@ -24939,59 +24958,29 @@
                 <a:ea typeface="Arial" pitchFamily="34" charset="-122"/>
                 <a:cs typeface="Arial" pitchFamily="34" charset="-120"/>
               </a:rPr>
-              <a:t>Many providers now offer 39-week elective induction</a:t>
+              <a:t>39-week elective induction is now common</a:t>
             </a:r>
             <a:endParaRPr lang="en-US" sz="1400" dirty="0"/>
           </a:p>
           <a:p>
             <a:pPr marL="285750" indent="-285750">
-              <a:spcAft>
-                <a:spcPts val="500"/>
-              </a:spcAft>
-              <a:buClr>
-                <a:srgbClr val="2D2D2D"/>
-              </a:buClr>
-              <a:buSzPts val="1400"/>
-              <a:buFont typeface="Arial"/>
               <a:buChar char="•"/>
-            </a:pPr>
-            <a:r>
-              <a:rPr lang="en-US" sz="1400" dirty="0">
-                <a:solidFill>
-                  <a:srgbClr val="2D2D2D"/>
-                </a:solidFill>
-                <a:latin typeface="Arial" pitchFamily="34" charset="0"/>
-                <a:ea typeface="Arial" pitchFamily="34" charset="-122"/>
-                <a:cs typeface="Arial" pitchFamily="34" charset="-120"/>
-              </a:rPr>
-              <a:t>Not automatically harmful — evidence doesn't support that</a:t>
-            </a:r>
-            <a:endParaRPr lang="en-US" sz="1400" dirty="0"/>
+              <a:buSzPts val="1200"/>
+            </a:pPr>
+            <a:r>
+              <a:rPr sz="1200"/>
+              <a:t>Not automatically harmful</a:t>
+            </a:r>
           </a:p>
           <a:p>
             <a:pPr marL="285750" indent="-285750">
-              <a:spcAft>
-                <a:spcPts val="500"/>
-              </a:spcAft>
-              <a:buClr>
-                <a:srgbClr val="2D2D2D"/>
-              </a:buClr>
-              <a:buSzPts val="1400"/>
-              <a:buFont typeface="Arial"/>
               <a:buChar char="•"/>
-            </a:pPr>
-            <a:r>
-              <a:rPr lang="en-US" sz="1400" dirty="0">
-                <a:solidFill>
-                  <a:srgbClr val="2D2D2D"/>
-                </a:solidFill>
-                <a:latin typeface="Arial" pitchFamily="34" charset="0"/>
-                <a:ea typeface="Arial" pitchFamily="34" charset="-122"/>
-                <a:cs typeface="Arial" pitchFamily="34" charset="-120"/>
-              </a:rPr>
-              <a:t>Individual risk, preferences, and context still matter</a:t>
-            </a:r>
-            <a:endParaRPr lang="en-US" sz="1400" dirty="0"/>
+              <a:buSzPts val="1200"/>
+            </a:pPr>
+            <a:r>
+              <a:rPr sz="1200"/>
+              <a:t>Individual risk + context still matter</a:t>
+            </a:r>
           </a:p>
         </p:txBody>
       </p:sp>
@@ -25003,8 +24992,8 @@
         </p:nvSpPr>
         <p:spPr>
           <a:xfrm>
-            <a:off x="4663440" y="3529584"/>
-            <a:ext cx="4224528" cy="1298448"/>
+            <a:off x="4663440" y="3621025"/>
+            <a:ext cx="4224528" cy="1133855"/>
           </a:xfrm>
           <a:prstGeom prst="rect">
             <a:avLst/>
@@ -25086,7 +25075,7 @@
                 <a:ea typeface="Arial" pitchFamily="34" charset="-122"/>
                 <a:cs typeface="Arial" pitchFamily="34" charset="-120"/>
               </a:rPr>
-              <a:t>Doula Language — When Asked About ARRIVE</a:t>
+              <a:t>Doula Language: When Asked About ARRIVE</a:t>
             </a:r>
             <a:endParaRPr lang="en-US" sz="1400" dirty="0"/>
           </a:p>
@@ -25100,7 +25089,7 @@
         </p:nvSpPr>
         <p:spPr>
           <a:xfrm>
-            <a:off x="4828032" y="3968496"/>
+            <a:off x="4828032" y="3785617"/>
             <a:ext cx="3877056" cy="804672"/>
           </a:xfrm>
           <a:prstGeom prst="rect">
@@ -25553,7 +25542,7 @@
                 <a:ea typeface="Arial" pitchFamily="34" charset="-122"/>
                 <a:cs typeface="Arial" pitchFamily="34" charset="-120"/>
               </a:rPr>
-              <a:t>In the chat — type your word-for-word response. Then discuss:</a:t>
+              <a:t>In the chat: type your word-for-word response. Then discuss:</a:t>
             </a:r>
             <a:endParaRPr lang="en-US" sz="1400" dirty="0"/>
           </a:p>
@@ -25567,8 +25556,8 @@
         </p:nvSpPr>
         <p:spPr>
           <a:xfrm>
-            <a:off x="457200" y="2651760"/>
-            <a:ext cx="8229600" cy="969264"/>
+            <a:off x="457200" y="2560320"/>
+            <a:ext cx="8229600" cy="1097280"/>
           </a:xfrm>
           <a:prstGeom prst="rect">
             <a:avLst/>
@@ -25590,118 +25579,57 @@
               <a:buSzPts val="1400"/>
               <a:buFont typeface="Arial"/>
               <a:buChar char="•"/>
-            </a:pPr>
-            <a:r>
-              <a:rPr lang="en-US" sz="1400" b="1" dirty="0">
+              <a:buSzPts val="1200"/>
+            </a:pPr>
+            <a:r>
+              <a:rPr lang="en-US" sz="1200" b="1" dirty="0">
                 <a:solidFill>
                   <a:srgbClr val="5E376C"/>
                 </a:solidFill>
               </a:rPr>
-              <a:t>B</a:t>
-            </a:r>
-            <a:r>
-              <a:rPr lang="en-US" sz="1400" dirty="0">
-                <a:solidFill>
-                  <a:srgbClr val="2D2D2D"/>
-                </a:solidFill>
-              </a:rPr>
-              <a:t> — Benefits of induction now?   </a:t>
-            </a:r>
-            <a:r>
-              <a:rPr lang="en-US" sz="1400" b="1" dirty="0">
-                <a:solidFill>
-                  <a:srgbClr val="5E376C"/>
-                </a:solidFill>
-              </a:rPr>
-              <a:t>R</a:t>
-            </a:r>
-            <a:r>
-              <a:rPr lang="en-US" sz="1400" dirty="0">
-                <a:solidFill>
-                  <a:srgbClr val="2D2D2D"/>
-                </a:solidFill>
-              </a:rPr>
-              <a:t> — Risks?
-</a:t>
+              <a:t>B: Benefits of induction now?</a:t>
             </a:r>
             <a:endParaRPr lang="en-US" sz="1400" dirty="0"/>
           </a:p>
           <a:p>
             <a:pPr marL="285750" indent="-285750">
-              <a:lnSpc>
-                <a:spcPct val="150000"/>
-              </a:lnSpc>
-              <a:buClr>
-                <a:srgbClr val="2D2D2D"/>
-              </a:buClr>
-              <a:buSzPts val="1400"/>
-              <a:buFont typeface="Arial"/>
               <a:buChar char="•"/>
-            </a:pPr>
-            <a:r>
-              <a:rPr lang="en-US" sz="1400" b="1" dirty="0">
-                <a:solidFill>
-                  <a:srgbClr val="5E376C"/>
-                </a:solidFill>
-              </a:rPr>
-              <a:t>A</a:t>
-            </a:r>
-            <a:r>
-              <a:rPr lang="en-US" sz="1400" dirty="0">
-                <a:solidFill>
-                  <a:srgbClr val="2D2D2D"/>
-                </a:solidFill>
-              </a:rPr>
-              <a:t> — Alternatives?   </a:t>
-            </a:r>
-            <a:r>
-              <a:rPr lang="en-US" sz="1400" b="1" dirty="0">
-                <a:solidFill>
-                  <a:srgbClr val="5E376C"/>
-                </a:solidFill>
-              </a:rPr>
-              <a:t>I</a:t>
-            </a:r>
-            <a:r>
-              <a:rPr lang="en-US" sz="1400" dirty="0">
-                <a:solidFill>
-                  <a:srgbClr val="2D2D2D"/>
-                </a:solidFill>
-              </a:rPr>
-              <a:t> — What does her intuition say?
-</a:t>
-            </a:r>
-            <a:endParaRPr lang="en-US" sz="1400" dirty="0"/>
+              <a:buSzPts val="1200"/>
+            </a:pPr>
+            <a:r>
+              <a:rPr sz="1200"/>
+              <a:t>R: Risks?</a:t>
+            </a:r>
           </a:p>
           <a:p>
             <a:pPr marL="285750" indent="-285750">
-              <a:lnSpc>
-                <a:spcPct val="150000"/>
-              </a:lnSpc>
-              <a:buClr>
-                <a:srgbClr val="2D2D2D"/>
-              </a:buClr>
-              <a:buSzPts val="1400"/>
-              <a:buFont typeface="Arial"/>
               <a:buChar char="•"/>
-            </a:pPr>
-            <a:r>
-              <a:rPr lang="en-US" sz="1400" b="1" dirty="0">
-                <a:solidFill>
-                  <a:srgbClr val="5E376C"/>
-                </a:solidFill>
-              </a:rPr>
-              <a:t>N</a:t>
-            </a:r>
-            <a:r>
-              <a:rPr lang="en-US" sz="1400" dirty="0">
-                <a:solidFill>
-                  <a:srgbClr val="2D2D2D"/>
-                </a:solidFill>
-              </a:rPr>
-              <a:t> — What if she waits / needs more time?</a:t>
-            </a:r>
-            <a:endParaRPr lang="en-US" sz="1400" dirty="0"/>
+              <a:buSzPts val="1200"/>
+            </a:pPr>
+            <a:r>
+              <a:rPr sz="1200"/>
+              <a:t>A: Alternatives?</a:t>
+            </a:r>
+          </a:p>
+          <a:p>
+            <a:pPr marL="285750" indent="-285750">
+              <a:buChar char="•"/>
+              <a:buSzPts val="1200"/>
+            </a:pPr>
+            <a:r>
+              <a:rPr sz="1200"/>
+              <a:t>I: What does her intuition say?</a:t>
+            </a:r>
+          </a:p>
+          <a:p>
+            <a:pPr marL="285750" indent="-285750">
+              <a:buChar char="•"/>
+              <a:buSzPts val="1200"/>
+            </a:pPr>
+            <a:r>
+              <a:rPr sz="1200"/>
+              <a:t>N: What if we did Nothing? Wait?</a:t>
+            </a:r>
           </a:p>
         </p:txBody>
       </p:sp>
@@ -25799,7 +25727,7 @@
                 <a:ea typeface="Georgia" pitchFamily="34" charset="-122"/>
                 <a:cs typeface="Georgia" pitchFamily="34" charset="-120"/>
               </a:rPr>
-              <a:t>Scope reminder: Help her think through the decision using BRAIN — never steer it. You may not change the intervention, but you can change her experience of making the decision.</a:t>
+              <a:t>Scope reminder: Help her think through the decision using BRAIN: never steer it. You may not change the intervention, but you can change her experience of making the decision.</a:t>
             </a:r>
             <a:endParaRPr lang="en-US" sz="1400" dirty="0"/>
           </a:p>
@@ -25910,7 +25838,7 @@
                 <a:ea typeface="Georgia" pitchFamily="34" charset="-122"/>
                 <a:cs typeface="Georgia" pitchFamily="34" charset="-120"/>
               </a:rPr>
-              <a:t>7:20 PM — 7:30 PM · 10 minutes</a:t>
+              <a:t>7-20 PM: 7-30 PM · 10 minutes</a:t>
             </a:r>
             <a:endParaRPr lang="en-US" sz="1400" dirty="0"/>
           </a:p>
@@ -26001,7 +25929,7 @@
                 <a:ea typeface="Georgia" pitchFamily="34" charset="-122"/>
                 <a:cs typeface="Georgia" pitchFamily="34" charset="-120"/>
               </a:rPr>
-              <a:t>Back at 7:30 PM — When Birth Needs Help.</a:t>
+              <a:t>Back at 7-30 PM: When Birth Needs Help.</a:t>
             </a:r>
             <a:endParaRPr lang="en-US" sz="1400" dirty="0"/>
           </a:p>
@@ -26368,7 +26296,7 @@
                 <a:ea typeface="Georgia" pitchFamily="34" charset="-122"/>
                 <a:cs typeface="Georgia" pitchFamily="34" charset="-120"/>
               </a:rPr>
-              <a:t>Pain relief is not binary. It exists on a spectrum — and your doula role is constant across all of it.</a:t>
+              <a:t>Pain relief is not binary. It exists on a spectrum, and your doula role is constant across all of it.</a:t>
             </a:r>
             <a:endParaRPr lang="en-US" sz="1400" dirty="0"/>
           </a:p>
@@ -26806,7 +26734,7 @@
                 <a:ea typeface="Arial" pitchFamily="34" charset="-122"/>
                 <a:cs typeface="Arial" pitchFamily="34" charset="-120"/>
               </a:rPr>
-              <a:t>Reduces pain perception — doesn't eliminate it</a:t>
+              <a:t>Reduces pain perception: doesn't eliminate it</a:t>
             </a:r>
             <a:endParaRPr lang="en-US" sz="1400" dirty="0"/>
           </a:p>
@@ -27100,7 +27028,7 @@
                 <a:ea typeface="Arial" pitchFamily="34" charset="-122"/>
                 <a:cs typeface="Arial" pitchFamily="34" charset="-120"/>
               </a:rPr>
-              <a:t>Causes drowsiness — allows rest</a:t>
+              <a:t>Causes drowsiness: allows rest</a:t>
             </a:r>
             <a:endParaRPr lang="en-US" sz="1400" dirty="0"/>
           </a:p>
@@ -27125,7 +27053,7 @@
                 <a:ea typeface="Arial" pitchFamily="34" charset="-122"/>
                 <a:cs typeface="Arial" pitchFamily="34" charset="-120"/>
               </a:rPr>
-              <a:t>Wears off in 1–4 hours</a:t>
+              <a:t>Wears off in 1-4 hours</a:t>
             </a:r>
             <a:endParaRPr lang="en-US" sz="1400" dirty="0"/>
           </a:p>
@@ -27444,7 +27372,7 @@
                 <a:ea typeface="Arial" pitchFamily="34" charset="-122"/>
                 <a:cs typeface="Arial" pitchFamily="34" charset="-120"/>
               </a:rPr>
-              <a:t>Doula role SHIFTS — does not stop</a:t>
+              <a:t>Doula role SHIFTS: does not stop</a:t>
             </a:r>
             <a:endParaRPr lang="en-US" sz="1400" dirty="0"/>
           </a:p>
@@ -27617,7 +27545,7 @@
               <a:buNone/>
             </a:pPr>
             <a:r>
-              <a:rPr lang="en-US" sz="2400" b="1" dirty="0">
+              <a:rPr lang="en-US" sz="2800" b="1" dirty="0">
                 <a:solidFill>
                   <a:srgbClr val="5E376C"/>
                 </a:solidFill>
@@ -27625,7 +27553,7 @@
                 <a:ea typeface="Georgia" pitchFamily="34" charset="-122"/>
                 <a:cs typeface="Georgia" pitchFamily="34" charset="-120"/>
               </a:rPr>
-              <a:t>The Epidural — What It Is &amp; How You Show Up</a:t>
+              <a:t>The Epidural: What It Is &amp; How You Show Up</a:t>
             </a:r>
             <a:endParaRPr lang="en-US" sz="2400" dirty="0"/>
           </a:p>
@@ -27678,7 +27606,7 @@
         </p:nvSpPr>
         <p:spPr>
           <a:xfrm>
-            <a:off x="914400" y="1536192"/>
+            <a:off x="914400" y="1444752"/>
             <a:ext cx="7315200" cy="3310128"/>
           </a:xfrm>
           <a:prstGeom prst="rect">
@@ -27736,7 +27664,7 @@
         </p:nvSpPr>
         <p:spPr>
           <a:xfrm>
-            <a:off x="1231075" y="1645920"/>
+            <a:off x="1231075" y="1554480"/>
             <a:ext cx="6650181" cy="256032"/>
           </a:xfrm>
           <a:prstGeom prst="rect">
@@ -27775,7 +27703,7 @@
         </p:nvSpPr>
         <p:spPr>
           <a:xfrm>
-            <a:off x="1231075" y="1956816"/>
+            <a:off x="1231075" y="1865376"/>
             <a:ext cx="6681849" cy="2743200"/>
           </a:xfrm>
           <a:prstGeom prst="rect">
@@ -27858,7 +27786,7 @@
                 <a:ea typeface="Arial" pitchFamily="34" charset="-122"/>
                 <a:cs typeface="Arial" pitchFamily="34" charset="-120"/>
               </a:rPr>
-              <a:t>15–20 min to full effect</a:t>
+              <a:t>15-20 min to full effect</a:t>
             </a:r>
             <a:endParaRPr lang="en-US" sz="1400" dirty="0"/>
           </a:p>
@@ -28060,7 +27988,7 @@
               <a:buNone/>
             </a:pPr>
             <a:r>
-              <a:rPr lang="en-US" sz="2400" b="1" dirty="0">
+              <a:rPr lang="en-US" sz="2800" b="1" dirty="0">
                 <a:solidFill>
                   <a:srgbClr val="5E376C"/>
                 </a:solidFill>
@@ -28068,7 +27996,7 @@
                 <a:ea typeface="Georgia" pitchFamily="34" charset="-122"/>
                 <a:cs typeface="Georgia" pitchFamily="34" charset="-120"/>
               </a:rPr>
-              <a:t>The Epidural — What It Is &amp; How You Show Up</a:t>
+              <a:t>The Epidural: What It Is &amp; How You Show Up</a:t>
             </a:r>
             <a:endParaRPr lang="en-US" sz="2400" dirty="0"/>
           </a:p>
@@ -28276,7 +28204,7 @@
                 <a:ea typeface="Arial" pitchFamily="34" charset="-122"/>
                 <a:cs typeface="Arial" pitchFamily="34" charset="-120"/>
               </a:rPr>
-              <a:t>Peanut ball + position changes every 20–30 min</a:t>
+              <a:t>Peanut ball + position changes every 20-30 min</a:t>
             </a:r>
             <a:endParaRPr lang="en-US" sz="1400" dirty="0"/>
           </a:p>
@@ -28301,7 +28229,7 @@
                 <a:ea typeface="Arial" pitchFamily="34" charset="-122"/>
                 <a:cs typeface="Arial" pitchFamily="34" charset="-120"/>
               </a:rPr>
-              <a:t>Emotional support matters more — not less — with reduced sensation</a:t>
+              <a:t>Emotional support matters more: not less: with reduced sensation</a:t>
             </a:r>
             <a:endParaRPr lang="en-US" sz="1400" dirty="0"/>
           </a:p>
@@ -28340,8 +28268,8 @@
         </p:nvSpPr>
         <p:spPr>
           <a:xfrm>
-            <a:off x="914400" y="3346704"/>
-            <a:ext cx="7315200" cy="1499616"/>
+            <a:off x="914400" y="3419856"/>
+            <a:ext cx="7315200" cy="1335024"/>
           </a:xfrm>
           <a:prstGeom prst="rect">
             <a:avLst/>
@@ -28423,7 +28351,7 @@
                 <a:ea typeface="Arial" pitchFamily="34" charset="-122"/>
                 <a:cs typeface="Arial" pitchFamily="34" charset="-120"/>
               </a:rPr>
-              <a:t>Safety — Moving an Epiduralized Client</a:t>
+              <a:t>Safety: Moving an Epiduralized Client</a:t>
             </a:r>
             <a:endParaRPr lang="en-US" sz="1400" dirty="0"/>
           </a:p>
@@ -28437,7 +28365,7 @@
         </p:nvSpPr>
         <p:spPr>
           <a:xfrm>
-            <a:off x="1199407" y="3767328"/>
+            <a:off x="1199407" y="3584448"/>
             <a:ext cx="6681849" cy="1005840"/>
           </a:xfrm>
           <a:prstGeom prst="rect">
@@ -28470,7 +28398,7 @@
                 <a:ea typeface="Arial" pitchFamily="34" charset="-122"/>
                 <a:cs typeface="Arial" pitchFamily="34" charset="-120"/>
               </a:rPr>
-              <a:t>Always use two people to reposition — legs may be numb</a:t>
+              <a:t>Always use two people to reposition: legs may be numb</a:t>
             </a:r>
             <a:endParaRPr lang="en-US" sz="1400" dirty="0"/>
           </a:p>
@@ -28779,7 +28707,7 @@
         </p:nvSpPr>
         <p:spPr>
           <a:xfrm>
-            <a:off x="914400" y="1536192"/>
+            <a:off x="914400" y="1444752"/>
             <a:ext cx="7315200" cy="3310128"/>
           </a:xfrm>
           <a:prstGeom prst="rect">
@@ -28837,7 +28765,7 @@
         </p:nvSpPr>
         <p:spPr>
           <a:xfrm>
-            <a:off x="1231075" y="1645920"/>
+            <a:off x="1231075" y="1554480"/>
             <a:ext cx="6650181" cy="256032"/>
           </a:xfrm>
           <a:prstGeom prst="rect">
@@ -28876,7 +28804,7 @@
         </p:nvSpPr>
         <p:spPr>
           <a:xfrm>
-            <a:off x="1231075" y="1956816"/>
+            <a:off x="1231075" y="1865376"/>
             <a:ext cx="6681849" cy="2743200"/>
           </a:xfrm>
           <a:prstGeom prst="rect">
@@ -28934,7 +28862,7 @@
                 <a:ea typeface="Arial" pitchFamily="34" charset="-122"/>
                 <a:cs typeface="Arial" pitchFamily="34" charset="-120"/>
               </a:rPr>
-              <a:t>1–5 min onset, complete numbness</a:t>
+              <a:t>1-5 min onset, complete numbness</a:t>
             </a:r>
             <a:endParaRPr lang="en-US" sz="1400" dirty="0"/>
           </a:p>
@@ -28959,7 +28887,7 @@
                 <a:ea typeface="Arial" pitchFamily="34" charset="-122"/>
                 <a:cs typeface="Arial" pitchFamily="34" charset="-120"/>
               </a:rPr>
-              <a:t>Lasts 1.5–3 hours</a:t>
+              <a:t>Lasts 1.5-3 hours</a:t>
             </a:r>
             <a:endParaRPr lang="en-US" sz="1400" dirty="0"/>
           </a:p>
@@ -29427,7 +29355,7 @@
                 <a:ea typeface="Arial" pitchFamily="34" charset="-122"/>
                 <a:cs typeface="Arial" pitchFamily="34" charset="-120"/>
               </a:rPr>
-              <a:t>Sometimes called a 'walking epidural' — mobility varies</a:t>
+              <a:t>Sometimes called a 'walking epidural': mobility varies</a:t>
             </a:r>
             <a:endParaRPr lang="en-US" sz="1400" dirty="0"/>
           </a:p>
@@ -29441,8 +29369,8 @@
         </p:nvSpPr>
         <p:spPr>
           <a:xfrm>
-            <a:off x="914400" y="3602736"/>
-            <a:ext cx="7315200" cy="1243584"/>
+            <a:off x="914400" y="3657601"/>
+            <a:ext cx="7315200" cy="1097279"/>
           </a:xfrm>
           <a:prstGeom prst="rect">
             <a:avLst/>
@@ -29524,7 +29452,7 @@
                 <a:ea typeface="Arial" pitchFamily="34" charset="-122"/>
                 <a:cs typeface="Arial" pitchFamily="34" charset="-120"/>
               </a:rPr>
-              <a:t>Clinical Note — Supporting Placement</a:t>
+              <a:t>Clinical Note: Supporting Placement</a:t>
             </a:r>
             <a:endParaRPr lang="en-US" sz="1400" dirty="0"/>
           </a:p>
@@ -29538,7 +29466,7 @@
         </p:nvSpPr>
         <p:spPr>
           <a:xfrm>
-            <a:off x="1199407" y="4023360"/>
+            <a:off x="1199407" y="3822193"/>
             <a:ext cx="6713516" cy="768096"/>
           </a:xfrm>
           <a:prstGeom prst="rect">
@@ -29786,7 +29714,7 @@
                 <a:ea typeface="Georgia" pitchFamily="34" charset="-122"/>
                 <a:cs typeface="Georgia" pitchFamily="34" charset="-120"/>
               </a:rPr>
-              <a:t>The longest phase — and often the hardest to support because it can last hours or days.</a:t>
+              <a:t>The longest phase, and often the hardest to support because it can last hours or days.</a:t>
             </a:r>
             <a:endParaRPr lang="en-US" sz="1400" dirty="0"/>
           </a:p>
@@ -29800,7 +29728,7 @@
         </p:nvSpPr>
         <p:spPr>
           <a:xfrm>
-            <a:off x="914400" y="1536192"/>
+            <a:off x="914400" y="1389887"/>
             <a:ext cx="7315200" cy="3364992"/>
           </a:xfrm>
           <a:prstGeom prst="rect">
@@ -29858,7 +29786,7 @@
         </p:nvSpPr>
         <p:spPr>
           <a:xfrm>
-            <a:off x="1231075" y="1645920"/>
+            <a:off x="1231075" y="1499616"/>
             <a:ext cx="6650181" cy="256032"/>
           </a:xfrm>
           <a:prstGeom prst="rect">
@@ -29897,7 +29825,7 @@
         </p:nvSpPr>
         <p:spPr>
           <a:xfrm>
-            <a:off x="1231075" y="1956816"/>
+            <a:off x="1231075" y="1810512"/>
             <a:ext cx="6681849" cy="2834640"/>
           </a:xfrm>
           <a:prstGeom prst="rect">
@@ -29955,7 +29883,7 @@
                 <a:ea typeface="Arial" pitchFamily="34" charset="-122"/>
                 <a:cs typeface="Arial" pitchFamily="34" charset="-120"/>
               </a:rPr>
-              <a:t>Dilation: 0–6 cm</a:t>
+              <a:t>Dilation: 0-6 cm</a:t>
             </a:r>
             <a:endParaRPr lang="en-US" sz="1400" dirty="0"/>
           </a:p>
@@ -29980,7 +29908,7 @@
                 <a:ea typeface="Arial" pitchFamily="34" charset="-122"/>
                 <a:cs typeface="Arial" pitchFamily="34" charset="-120"/>
               </a:rPr>
-              <a:t>Contractions: 30–45 sec, 5–20 min apart</a:t>
+              <a:t>Contractions: 30-45 sec, 5-20 min apart</a:t>
             </a:r>
             <a:endParaRPr lang="en-US" sz="1400" dirty="0"/>
           </a:p>
@@ -30055,7 +29983,7 @@
                 <a:ea typeface="Arial" pitchFamily="34" charset="-122"/>
                 <a:cs typeface="Arial" pitchFamily="34" charset="-120"/>
               </a:rPr>
-              <a:t>Duration: 8–24 hrs (first babies)</a:t>
+              <a:t>Duration: 8-24 hrs (first babies)</a:t>
             </a:r>
             <a:endParaRPr lang="en-US" sz="1400" dirty="0"/>
           </a:p>
@@ -30150,7 +30078,7 @@
               <a:buNone/>
             </a:pPr>
             <a:r>
-              <a:rPr lang="en-US" sz="1200" kern="0" spc="150" dirty="0">
+              <a:rPr lang="en-US" sz="1000" kern="0" spc="150" dirty="0">
                 <a:solidFill>
                   <a:srgbClr val="7B4F8C"/>
                 </a:solidFill>
@@ -30228,7 +30156,7 @@
               <a:buNone/>
             </a:pPr>
             <a:r>
-              <a:rPr lang="en-US" sz="1400" i="1" dirty="0">
+              <a:rPr lang="en-US" sz="1000" i="1" dirty="0">
                 <a:solidFill>
                   <a:srgbClr val="845995"/>
                 </a:solidFill>
@@ -30236,7 +30164,7 @@
                 <a:ea typeface="Georgia" pitchFamily="34" charset="-122"/>
                 <a:cs typeface="Georgia" pitchFamily="34" charset="-120"/>
               </a:rPr>
-              <a:t>An epiduralized client needs you just as much. Your role adapts — it doesn't disappear.</a:t>
+              <a:t>An epiduralized client needs you just as much. Your role adapts: it doesn't disappear.</a:t>
             </a:r>
             <a:endParaRPr lang="en-US" sz="1400" dirty="0"/>
           </a:p>
@@ -30296,7 +30224,7 @@
               <a:buNone/>
             </a:pPr>
             <a:r>
-              <a:rPr lang="en-US" sz="1400" b="1" dirty="0">
+              <a:rPr lang="en-US" sz="1200" b="1" dirty="0">
                 <a:solidFill>
                   <a:srgbClr val="FFFFFF"/>
                 </a:solidFill>
@@ -30335,7 +30263,7 @@
               <a:buNone/>
             </a:pPr>
             <a:r>
-              <a:rPr lang="en-US" sz="1400" b="1" dirty="0">
+              <a:rPr lang="en-US" sz="1200" b="1" dirty="0">
                 <a:solidFill>
                   <a:srgbClr val="FFFFFF"/>
                 </a:solidFill>
@@ -30357,8 +30285,8 @@
         </p:nvSpPr>
         <p:spPr>
           <a:xfrm>
-            <a:off x="292608" y="1828800"/>
-            <a:ext cx="4224528" cy="557784"/>
+            <a:off x="292608" y="1865376"/>
+            <a:ext cx="4224528" cy="402336"/>
           </a:xfrm>
           <a:prstGeom prst="rect">
             <a:avLst/>
@@ -30386,8 +30314,8 @@
         </p:nvSpPr>
         <p:spPr>
           <a:xfrm>
-            <a:off x="4517136" y="1828800"/>
-            <a:ext cx="4334256" cy="557784"/>
+            <a:off x="4517136" y="1865376"/>
+            <a:ext cx="4334256" cy="402336"/>
           </a:xfrm>
           <a:prstGeom prst="rect">
             <a:avLst/>
@@ -30415,8 +30343,8 @@
         </p:nvSpPr>
         <p:spPr>
           <a:xfrm>
-            <a:off x="402336" y="1874520"/>
-            <a:ext cx="4005072" cy="466344"/>
+            <a:off x="402336" y="1920240"/>
+            <a:ext cx="4005072" cy="310896"/>
           </a:xfrm>
           <a:prstGeom prst="rect">
             <a:avLst/>
@@ -30435,7 +30363,7 @@
               <a:buNone/>
             </a:pPr>
             <a:r>
-              <a:rPr lang="en-US" sz="1400" dirty="0">
+              <a:rPr lang="en-US" sz="1000" dirty="0" b="0">
                 <a:solidFill>
                   <a:srgbClr val="2D2D2D"/>
                 </a:solidFill>
@@ -30443,7 +30371,7 @@
                 <a:ea typeface="Arial" pitchFamily="34" charset="-122"/>
                 <a:cs typeface="Arial" pitchFamily="34" charset="-120"/>
               </a:rPr>
-              <a:t>Reposition with the nurse every 20–30 min (peanut ball, side-lying, semi-reclined)</a:t>
+              <a:t>Reposition with the nurse every 20-30 min (peanut ball, side-lying, semi-reclined)</a:t>
             </a:r>
             <a:endParaRPr lang="en-US" sz="1400" dirty="0"/>
           </a:p>
@@ -30457,8 +30385,8 @@
         </p:nvSpPr>
         <p:spPr>
           <a:xfrm>
-            <a:off x="4626864" y="1874520"/>
-            <a:ext cx="4114800" cy="466344"/>
+            <a:off x="4626864" y="1920240"/>
+            <a:ext cx="4114800" cy="310896"/>
           </a:xfrm>
           <a:prstGeom prst="rect">
             <a:avLst/>
@@ -30477,7 +30405,7 @@
               <a:buNone/>
             </a:pPr>
             <a:r>
-              <a:rPr lang="en-US" sz="1400" dirty="0">
+              <a:rPr lang="en-US" sz="1000" dirty="0" b="0">
                 <a:solidFill>
                   <a:srgbClr val="8B0000"/>
                 </a:solidFill>
@@ -30499,8 +30427,8 @@
         </p:nvSpPr>
         <p:spPr>
           <a:xfrm>
-            <a:off x="292608" y="2386584"/>
-            <a:ext cx="4224528" cy="557784"/>
+            <a:off x="292608" y="2286000"/>
+            <a:ext cx="4224528" cy="402336"/>
           </a:xfrm>
           <a:prstGeom prst="rect">
             <a:avLst/>
@@ -30528,8 +30456,8 @@
         </p:nvSpPr>
         <p:spPr>
           <a:xfrm>
-            <a:off x="4517136" y="2386584"/>
-            <a:ext cx="4334256" cy="557784"/>
+            <a:off x="4517136" y="2286000"/>
+            <a:ext cx="4334256" cy="402336"/>
           </a:xfrm>
           <a:prstGeom prst="rect">
             <a:avLst/>
@@ -30557,8 +30485,8 @@
         </p:nvSpPr>
         <p:spPr>
           <a:xfrm>
-            <a:off x="402336" y="2432304"/>
-            <a:ext cx="4005072" cy="466344"/>
+            <a:off x="402336" y="2340864"/>
+            <a:ext cx="4005072" cy="310896"/>
           </a:xfrm>
           <a:prstGeom prst="rect">
             <a:avLst/>
@@ -30577,7 +30505,7 @@
               <a:buNone/>
             </a:pPr>
             <a:r>
-              <a:rPr lang="en-US" sz="1400" dirty="0">
+              <a:rPr lang="en-US" sz="1000" dirty="0" b="0">
                 <a:solidFill>
                   <a:srgbClr val="2D2D2D"/>
                 </a:solidFill>
@@ -30599,8 +30527,8 @@
         </p:nvSpPr>
         <p:spPr>
           <a:xfrm>
-            <a:off x="4626864" y="2432304"/>
-            <a:ext cx="4114800" cy="466344"/>
+            <a:off x="4626864" y="2340864"/>
+            <a:ext cx="4114800" cy="310896"/>
           </a:xfrm>
           <a:prstGeom prst="rect">
             <a:avLst/>
@@ -30619,7 +30547,7 @@
               <a:buNone/>
             </a:pPr>
             <a:r>
-              <a:rPr lang="en-US" sz="1400" dirty="0">
+              <a:rPr lang="en-US" sz="1000" dirty="0" b="0">
                 <a:solidFill>
                   <a:srgbClr val="8B0000"/>
                 </a:solidFill>
@@ -30627,7 +30555,7 @@
                 <a:ea typeface="Arial" pitchFamily="34" charset="-122"/>
                 <a:cs typeface="Arial" pitchFamily="34" charset="-120"/>
               </a:rPr>
-              <a:t>Skip positioning because she can't feel it — she still needs it</a:t>
+              <a:t>Skip positioning because she can't feel it: she still needs it</a:t>
             </a:r>
             <a:endParaRPr lang="en-US" sz="1400" dirty="0"/>
           </a:p>
@@ -30641,8 +30569,8 @@
         </p:nvSpPr>
         <p:spPr>
           <a:xfrm>
-            <a:off x="292608" y="2944368"/>
-            <a:ext cx="4224528" cy="557784"/>
+            <a:off x="292608" y="2706624"/>
+            <a:ext cx="4224528" cy="402336"/>
           </a:xfrm>
           <a:prstGeom prst="rect">
             <a:avLst/>
@@ -30670,8 +30598,8 @@
         </p:nvSpPr>
         <p:spPr>
           <a:xfrm>
-            <a:off x="4517136" y="2944368"/>
-            <a:ext cx="4334256" cy="557784"/>
+            <a:off x="4517136" y="2706624"/>
+            <a:ext cx="4334256" cy="402336"/>
           </a:xfrm>
           <a:prstGeom prst="rect">
             <a:avLst/>
@@ -30699,8 +30627,8 @@
         </p:nvSpPr>
         <p:spPr>
           <a:xfrm>
-            <a:off x="402336" y="2990088"/>
-            <a:ext cx="4005072" cy="466344"/>
+            <a:off x="402336" y="2761488"/>
+            <a:ext cx="4005072" cy="310896"/>
           </a:xfrm>
           <a:prstGeom prst="rect">
             <a:avLst/>
@@ -30719,7 +30647,7 @@
               <a:buNone/>
             </a:pPr>
             <a:r>
-              <a:rPr lang="en-US" sz="1400" dirty="0">
+              <a:rPr lang="en-US" sz="1000" dirty="0" b="0">
                 <a:solidFill>
                   <a:srgbClr val="2D2D2D"/>
                 </a:solidFill>
@@ -30741,8 +30669,8 @@
         </p:nvSpPr>
         <p:spPr>
           <a:xfrm>
-            <a:off x="4626864" y="2990088"/>
-            <a:ext cx="4114800" cy="466344"/>
+            <a:off x="4626864" y="2761488"/>
+            <a:ext cx="4114800" cy="310896"/>
           </a:xfrm>
           <a:prstGeom prst="rect">
             <a:avLst/>
@@ -30761,7 +30689,7 @@
               <a:buNone/>
             </a:pPr>
             <a:r>
-              <a:rPr lang="en-US" sz="1400" dirty="0">
+              <a:rPr lang="en-US" sz="1000" dirty="0" b="0">
                 <a:solidFill>
                   <a:srgbClr val="8B0000"/>
                 </a:solidFill>
@@ -30769,7 +30697,7 @@
                 <a:ea typeface="Arial" pitchFamily="34" charset="-122"/>
                 <a:cs typeface="Arial" pitchFamily="34" charset="-120"/>
               </a:rPr>
-              <a:t>Assume pain relief = emotional relief — anxiety often surfaces now</a:t>
+              <a:t>Assume pain relief = emotional relief: anxiety often surfaces now</a:t>
             </a:r>
             <a:endParaRPr lang="en-US" sz="1400" dirty="0"/>
           </a:p>
@@ -30783,8 +30711,8 @@
         </p:nvSpPr>
         <p:spPr>
           <a:xfrm>
-            <a:off x="292608" y="3502152"/>
-            <a:ext cx="4224528" cy="557784"/>
+            <a:off x="292608" y="3127248"/>
+            <a:ext cx="4224528" cy="402336"/>
           </a:xfrm>
           <a:prstGeom prst="rect">
             <a:avLst/>
@@ -30812,8 +30740,8 @@
         </p:nvSpPr>
         <p:spPr>
           <a:xfrm>
-            <a:off x="4517136" y="3502152"/>
-            <a:ext cx="4334256" cy="557784"/>
+            <a:off x="4517136" y="3127248"/>
+            <a:ext cx="4334256" cy="402336"/>
           </a:xfrm>
           <a:prstGeom prst="rect">
             <a:avLst/>
@@ -30841,8 +30769,8 @@
         </p:nvSpPr>
         <p:spPr>
           <a:xfrm>
-            <a:off x="402336" y="3547872"/>
-            <a:ext cx="4005072" cy="466344"/>
+            <a:off x="402336" y="3182112"/>
+            <a:ext cx="4005072" cy="310896"/>
           </a:xfrm>
           <a:prstGeom prst="rect">
             <a:avLst/>
@@ -30861,7 +30789,7 @@
               <a:buNone/>
             </a:pPr>
             <a:r>
-              <a:rPr lang="en-US" sz="1400" dirty="0">
+              <a:rPr lang="en-US" sz="1000" dirty="0" b="0">
                 <a:solidFill>
                   <a:srgbClr val="2D2D2D"/>
                 </a:solidFill>
@@ -30883,8 +30811,8 @@
         </p:nvSpPr>
         <p:spPr>
           <a:xfrm>
-            <a:off x="4626864" y="3547872"/>
-            <a:ext cx="4114800" cy="466344"/>
+            <a:off x="4626864" y="3182112"/>
+            <a:ext cx="4114800" cy="310896"/>
           </a:xfrm>
           <a:prstGeom prst="rect">
             <a:avLst/>
@@ -30903,7 +30831,7 @@
               <a:buNone/>
             </a:pPr>
             <a:r>
-              <a:rPr lang="en-US" sz="1400" dirty="0">
+              <a:rPr lang="en-US" sz="1000" dirty="0" b="0">
                 <a:solidFill>
                   <a:srgbClr val="8B0000"/>
                 </a:solidFill>
@@ -30925,8 +30853,8 @@
         </p:nvSpPr>
         <p:spPr>
           <a:xfrm>
-            <a:off x="292608" y="4059936"/>
-            <a:ext cx="4224528" cy="557784"/>
+            <a:off x="292608" y="3547872"/>
+            <a:ext cx="4224528" cy="402336"/>
           </a:xfrm>
           <a:prstGeom prst="rect">
             <a:avLst/>
@@ -30954,8 +30882,8 @@
         </p:nvSpPr>
         <p:spPr>
           <a:xfrm>
-            <a:off x="4517136" y="4059936"/>
-            <a:ext cx="4334256" cy="557784"/>
+            <a:off x="4517136" y="3547872"/>
+            <a:ext cx="4334256" cy="402336"/>
           </a:xfrm>
           <a:prstGeom prst="rect">
             <a:avLst/>
@@ -30983,8 +30911,8 @@
         </p:nvSpPr>
         <p:spPr>
           <a:xfrm>
-            <a:off x="402336" y="4105656"/>
-            <a:ext cx="4005072" cy="466344"/>
+            <a:off x="402336" y="3602736"/>
+            <a:ext cx="4005072" cy="310896"/>
           </a:xfrm>
           <a:prstGeom prst="rect">
             <a:avLst/>
@@ -31003,7 +30931,7 @@
               <a:buNone/>
             </a:pPr>
             <a:r>
-              <a:rPr lang="en-US" sz="1400" dirty="0">
+              <a:rPr lang="en-US" sz="1000" dirty="0" b="0">
                 <a:solidFill>
                   <a:srgbClr val="2D2D2D"/>
                 </a:solidFill>
@@ -31025,8 +30953,8 @@
         </p:nvSpPr>
         <p:spPr>
           <a:xfrm>
-            <a:off x="4626864" y="4105656"/>
-            <a:ext cx="4114800" cy="466344"/>
+            <a:off x="4626864" y="3602736"/>
+            <a:ext cx="4114800" cy="310896"/>
           </a:xfrm>
           <a:prstGeom prst="rect">
             <a:avLst/>
@@ -31045,7 +30973,7 @@
               <a:buNone/>
             </a:pPr>
             <a:r>
-              <a:rPr lang="en-US" sz="1400" dirty="0">
+              <a:rPr lang="en-US" sz="1000" dirty="0" b="0">
                 <a:solidFill>
                   <a:srgbClr val="8B0000"/>
                 </a:solidFill>
@@ -31067,8 +30995,8 @@
         </p:nvSpPr>
         <p:spPr>
           <a:xfrm>
-            <a:off x="292608" y="4617720"/>
-            <a:ext cx="4224528" cy="557784"/>
+            <a:off x="292608" y="4389120"/>
+            <a:ext cx="4224528" cy="402336"/>
           </a:xfrm>
           <a:prstGeom prst="rect">
             <a:avLst/>
@@ -31096,8 +31024,8 @@
         </p:nvSpPr>
         <p:spPr>
           <a:xfrm>
-            <a:off x="4517136" y="4617720"/>
-            <a:ext cx="4334256" cy="557784"/>
+            <a:off x="4517136" y="3968496"/>
+            <a:ext cx="4334256" cy="402336"/>
           </a:xfrm>
           <a:prstGeom prst="rect">
             <a:avLst/>
@@ -31125,8 +31053,8 @@
         </p:nvSpPr>
         <p:spPr>
           <a:xfrm>
-            <a:off x="402336" y="4663440"/>
-            <a:ext cx="4005072" cy="466344"/>
+            <a:off x="402336" y="4443984"/>
+            <a:ext cx="4005072" cy="310896"/>
           </a:xfrm>
           <a:prstGeom prst="rect">
             <a:avLst/>
@@ -31145,7 +31073,7 @@
               <a:buNone/>
             </a:pPr>
             <a:r>
-              <a:rPr lang="en-US" sz="1400" dirty="0">
+              <a:rPr lang="en-US" sz="1000" dirty="0" b="0">
                 <a:solidFill>
                   <a:srgbClr val="2D2D2D"/>
                 </a:solidFill>
@@ -31167,8 +31095,8 @@
         </p:nvSpPr>
         <p:spPr>
           <a:xfrm>
-            <a:off x="4626864" y="4663440"/>
-            <a:ext cx="4114800" cy="466344"/>
+            <a:off x="4626864" y="4023359"/>
+            <a:ext cx="4114800" cy="310896"/>
           </a:xfrm>
           <a:prstGeom prst="rect">
             <a:avLst/>
@@ -31187,7 +31115,7 @@
               <a:buNone/>
             </a:pPr>
             <a:r>
-              <a:rPr lang="en-US" sz="1400" dirty="0">
+              <a:rPr lang="en-US" sz="1000" dirty="0" b="0">
                 <a:solidFill>
                   <a:srgbClr val="8B0000"/>
                 </a:solidFill>
@@ -31209,8 +31137,8 @@
         </p:nvSpPr>
         <p:spPr>
           <a:xfrm>
-            <a:off x="292608" y="5175504"/>
-            <a:ext cx="4224528" cy="557784"/>
+            <a:off x="292608" y="3968496"/>
+            <a:ext cx="4224528" cy="402336"/>
           </a:xfrm>
           <a:prstGeom prst="rect">
             <a:avLst/>
@@ -31238,8 +31166,8 @@
         </p:nvSpPr>
         <p:spPr>
           <a:xfrm>
-            <a:off x="4517136" y="5175504"/>
-            <a:ext cx="4334256" cy="557784"/>
+            <a:off x="4517136" y="4389120"/>
+            <a:ext cx="4334256" cy="402336"/>
           </a:xfrm>
           <a:prstGeom prst="rect">
             <a:avLst/>
@@ -31267,8 +31195,8 @@
         </p:nvSpPr>
         <p:spPr>
           <a:xfrm>
-            <a:off x="402336" y="5221224"/>
-            <a:ext cx="4005072" cy="466344"/>
+            <a:off x="402336" y="4023359"/>
+            <a:ext cx="4005072" cy="310896"/>
           </a:xfrm>
           <a:prstGeom prst="rect">
             <a:avLst/>
@@ -31287,7 +31215,7 @@
               <a:buNone/>
             </a:pPr>
             <a:r>
-              <a:rPr lang="en-US" sz="1200" dirty="0">
+              <a:rPr lang="en-US" sz="1000" dirty="0" b="0">
                 <a:solidFill>
                   <a:srgbClr val="2D2D2D"/>
                 </a:solidFill>
@@ -31295,7 +31223,7 @@
                 <a:ea typeface="Arial" pitchFamily="34" charset="-122"/>
                 <a:cs typeface="Arial" pitchFamily="34" charset="-120"/>
               </a:rPr>
-              <a:t>Always use two people to reposition — never drag across the sheets</a:t>
+              <a:t>Always use two people to reposition: never drag across the sheets</a:t>
             </a:r>
             <a:endParaRPr lang="en-US" sz="1200" dirty="0"/>
           </a:p>
@@ -31309,8 +31237,8 @@
         </p:nvSpPr>
         <p:spPr>
           <a:xfrm>
-            <a:off x="4626864" y="5221224"/>
-            <a:ext cx="4114800" cy="466344"/>
+            <a:off x="4626864" y="4443984"/>
+            <a:ext cx="4114800" cy="310896"/>
           </a:xfrm>
           <a:prstGeom prst="rect">
             <a:avLst/>
@@ -31329,7 +31257,7 @@
               <a:buNone/>
             </a:pPr>
             <a:r>
-              <a:rPr lang="en-US" sz="1200" dirty="0">
+              <a:rPr lang="en-US" sz="1000" dirty="0" b="0">
                 <a:solidFill>
                   <a:srgbClr val="8B0000"/>
                 </a:solidFill>
@@ -31337,7 +31265,7 @@
                 <a:ea typeface="Arial" pitchFamily="34" charset="-122"/>
                 <a:cs typeface="Arial" pitchFamily="34" charset="-120"/>
               </a:rPr>
-              <a:t>Move her alone or drag — this can dislodge the epidural catheter</a:t>
+              <a:t>Move her alone or drag: this can dislodge the epidural catheter</a:t>
             </a:r>
             <a:endParaRPr lang="en-US" sz="1200" dirty="0"/>
           </a:p>
@@ -31390,7 +31318,7 @@
         </p:nvSpPr>
         <p:spPr>
           <a:xfrm>
-            <a:off x="4754880" y="4864608"/>
+            <a:off x="4754880" y="4901184"/>
             <a:ext cx="4133088" cy="201168"/>
           </a:xfrm>
           <a:prstGeom prst="rect">
@@ -31407,7 +31335,7 @@
               <a:buNone/>
             </a:pPr>
             <a:r>
-              <a:rPr lang="en-US" sz="1200" dirty="0">
+              <a:rPr lang="en-US" sz="1000" dirty="0">
                 <a:solidFill>
                   <a:srgbClr val="8B6A9E"/>
                 </a:solidFill>
@@ -31518,7 +31446,7 @@
                 <a:ea typeface="Georgia" pitchFamily="34" charset="-122"/>
                 <a:cs typeface="Georgia" pitchFamily="34" charset="-120"/>
               </a:rPr>
-              <a:t>The Peanut Ball — Use It Every Time</a:t>
+              <a:t>The Peanut Ball: Use It Every Time</a:t>
             </a:r>
             <a:endParaRPr lang="en-US" sz="2800" dirty="0"/>
           </a:p>
@@ -31571,7 +31499,7 @@
         </p:nvSpPr>
         <p:spPr>
           <a:xfrm>
-            <a:off x="914400" y="1536192"/>
+            <a:off x="914400" y="1444752"/>
             <a:ext cx="7315200" cy="3310128"/>
           </a:xfrm>
           <a:prstGeom prst="rect">
@@ -31629,7 +31557,7 @@
         </p:nvSpPr>
         <p:spPr>
           <a:xfrm>
-            <a:off x="1231075" y="1645920"/>
+            <a:off x="1231075" y="1554480"/>
             <a:ext cx="6650181" cy="256032"/>
           </a:xfrm>
           <a:prstGeom prst="rect">
@@ -31668,7 +31596,7 @@
         </p:nvSpPr>
         <p:spPr>
           <a:xfrm>
-            <a:off x="1231075" y="1956816"/>
+            <a:off x="1231075" y="1865376"/>
             <a:ext cx="6681849" cy="2743200"/>
           </a:xfrm>
           <a:prstGeom prst="rect">
@@ -31801,7 +31729,7 @@
                 <a:ea typeface="Arial" pitchFamily="34" charset="-122"/>
                 <a:cs typeface="Arial" pitchFamily="34" charset="-120"/>
               </a:rPr>
-              <a:t>Rotate sides every 20–30 min</a:t>
+              <a:t>Rotate sides every 20-30 min</a:t>
             </a:r>
             <a:endParaRPr lang="en-US" sz="1400" dirty="0"/>
           </a:p>
@@ -31936,7 +31864,7 @@
                 <a:ea typeface="Georgia" pitchFamily="34" charset="-122"/>
                 <a:cs typeface="Georgia" pitchFamily="34" charset="-120"/>
               </a:rPr>
-              <a:t>The Peanut Ball — Use It Every Time</a:t>
+              <a:t>The Peanut Ball: Use It Every Time</a:t>
             </a:r>
             <a:endParaRPr lang="en-US" sz="2800" dirty="0"/>
           </a:p>
@@ -32169,7 +32097,7 @@
                 <a:ea typeface="Arial" pitchFamily="34" charset="-122"/>
                 <a:cs typeface="Arial" pitchFamily="34" charset="-120"/>
               </a:rPr>
-              <a:t>Switch sides every 20–30 minutes with nurse assistance</a:t>
+              <a:t>Switch sides every 20-30 minutes with nurse assistance</a:t>
             </a:r>
             <a:endParaRPr lang="en-US" sz="1400" dirty="0"/>
           </a:p>
@@ -32194,7 +32122,7 @@
                 <a:ea typeface="Arial" pitchFamily="34" charset="-122"/>
                 <a:cs typeface="Arial" pitchFamily="34" charset="-120"/>
               </a:rPr>
-              <a:t>Reposition the whole body — don't just flip the ball</a:t>
+              <a:t>Reposition the whole body: don't just flip the ball</a:t>
             </a:r>
             <a:endParaRPr lang="en-US" sz="1400" dirty="0"/>
           </a:p>
@@ -32208,8 +32136,8 @@
         </p:nvSpPr>
         <p:spPr>
           <a:xfrm>
-            <a:off x="914400" y="3383280"/>
-            <a:ext cx="7315200" cy="1426464"/>
+            <a:off x="914400" y="3474720"/>
+            <a:ext cx="7315200" cy="1280160"/>
           </a:xfrm>
           <a:prstGeom prst="rect">
             <a:avLst/>
@@ -32291,7 +32219,7 @@
                 <a:ea typeface="Arial" pitchFamily="34" charset="-122"/>
                 <a:cs typeface="Arial" pitchFamily="34" charset="-120"/>
               </a:rPr>
-              <a:t>Clinical Note — Peanut Ball &amp; Outcomes</a:t>
+              <a:t>Clinical Note: Peanut Ball &amp; Outcomes</a:t>
             </a:r>
             <a:endParaRPr lang="en-US" sz="1400" dirty="0"/>
           </a:p>
@@ -32305,7 +32233,7 @@
         </p:nvSpPr>
         <p:spPr>
           <a:xfrm>
-            <a:off x="1199407" y="3803904"/>
+            <a:off x="1199407" y="3639312"/>
             <a:ext cx="6713516" cy="950976"/>
           </a:xfrm>
           <a:prstGeom prst="rect">
@@ -32333,7 +32261,7 @@
                 <a:ea typeface="Arial" pitchFamily="34" charset="-122"/>
                 <a:cs typeface="Arial" pitchFamily="34" charset="-120"/>
               </a:rPr>
-              <a:t>A 2020 systematic review found peanut ball use reduced Stage 1 labor by 90 minutes on average and lowered cesarean rates in epiduralized clients. One of the most impactful tools in your kit — and it costs nothing.</a:t>
+              <a:t>A 2020 systematic review found peanut ball use reduced Stage 1 labor by 90 minutes on average and lowered cesarean rates in epiduralized clients. One of the most impactful tools in your kit, and it costs nothing.</a:t>
             </a:r>
             <a:endParaRPr lang="en-US" sz="1400" dirty="0"/>
           </a:p>
@@ -32792,7 +32720,7 @@
         </p:nvSpPr>
         <p:spPr>
           <a:xfrm>
-            <a:off x="292608" y="1536192"/>
+            <a:off x="292608" y="1444752"/>
             <a:ext cx="4224528" cy="3310128"/>
           </a:xfrm>
           <a:prstGeom prst="rect">
@@ -32850,7 +32778,7 @@
         </p:nvSpPr>
         <p:spPr>
           <a:xfrm>
-            <a:off x="475488" y="1645920"/>
+            <a:off x="475488" y="1554480"/>
             <a:ext cx="3840480" cy="256032"/>
           </a:xfrm>
           <a:prstGeom prst="rect">
@@ -32889,7 +32817,7 @@
         </p:nvSpPr>
         <p:spPr>
           <a:xfrm>
-            <a:off x="475488" y="1938528"/>
+            <a:off x="475488" y="1847088"/>
             <a:ext cx="3840480" cy="274320"/>
           </a:xfrm>
           <a:prstGeom prst="rect">
@@ -32914,7 +32842,7 @@
                 <a:ea typeface="Arial" pitchFamily="34" charset="-122"/>
                 <a:cs typeface="Arial" pitchFamily="34" charset="-120"/>
               </a:rPr>
-              <a:t>Common — often resolve with position changes, patience, and support:</a:t>
+              <a:t>Common: often resolve with position changes, patience, and support:</a:t>
             </a:r>
             <a:endParaRPr lang="en-US" sz="1400" dirty="0"/>
           </a:p>
@@ -32928,7 +32856,7 @@
         </p:nvSpPr>
         <p:spPr>
           <a:xfrm>
-            <a:off x="475488" y="2249424"/>
+            <a:off x="475488" y="2157984"/>
             <a:ext cx="3858768" cy="2523744"/>
           </a:xfrm>
           <a:prstGeom prst="rect">
@@ -33075,7 +33003,7 @@
         </p:nvSpPr>
         <p:spPr>
           <a:xfrm>
-            <a:off x="4663440" y="1536192"/>
+            <a:off x="4663440" y="1444752"/>
             <a:ext cx="4224528" cy="3310128"/>
           </a:xfrm>
           <a:prstGeom prst="rect">
@@ -33133,7 +33061,7 @@
         </p:nvSpPr>
         <p:spPr>
           <a:xfrm>
-            <a:off x="4846320" y="1645920"/>
+            <a:off x="4846320" y="1554480"/>
             <a:ext cx="3840480" cy="256032"/>
           </a:xfrm>
           <a:prstGeom prst="rect">
@@ -33172,7 +33100,7 @@
         </p:nvSpPr>
         <p:spPr>
           <a:xfrm>
-            <a:off x="4846320" y="1938528"/>
+            <a:off x="4846320" y="1847088"/>
             <a:ext cx="3840480" cy="274320"/>
           </a:xfrm>
           <a:prstGeom prst="rect">
@@ -33197,7 +33125,7 @@
                 <a:ea typeface="Arial" pitchFamily="34" charset="-122"/>
                 <a:cs typeface="Arial" pitchFamily="34" charset="-120"/>
               </a:rPr>
-              <a:t>Require provider involvement — sometimes urgently:</a:t>
+              <a:t>Require provider involvement: sometimes urgently:</a:t>
             </a:r>
             <a:endParaRPr lang="en-US" sz="1400" dirty="0"/>
           </a:p>
@@ -33211,7 +33139,7 @@
         </p:nvSpPr>
         <p:spPr>
           <a:xfrm>
-            <a:off x="4846320" y="2249424"/>
+            <a:off x="4846320" y="2157984"/>
             <a:ext cx="3858768" cy="2523744"/>
           </a:xfrm>
           <a:prstGeom prst="rect">
@@ -33244,7 +33172,7 @@
                 <a:ea typeface="Arial" pitchFamily="34" charset="-122"/>
                 <a:cs typeface="Arial" pitchFamily="34" charset="-120"/>
               </a:rPr>
-              <a:t>Fetal distress — persistent concerning heart rate patterns</a:t>
+              <a:t>Fetal distress: persistent concerning heart rate patterns</a:t>
             </a:r>
             <a:endParaRPr lang="en-US" sz="1400" dirty="0"/>
           </a:p>
@@ -33269,7 +33197,7 @@
                 <a:ea typeface="Arial" pitchFamily="34" charset="-122"/>
                 <a:cs typeface="Arial" pitchFamily="34" charset="-120"/>
               </a:rPr>
-              <a:t>Maternal hemorrhage — excessive bleeding</a:t>
+              <a:t>Maternal hemorrhage: excessive bleeding</a:t>
             </a:r>
             <a:endParaRPr lang="en-US" sz="1400" dirty="0"/>
           </a:p>
@@ -33294,7 +33222,7 @@
                 <a:ea typeface="Arial" pitchFamily="34" charset="-122"/>
                 <a:cs typeface="Arial" pitchFamily="34" charset="-120"/>
               </a:rPr>
-              <a:t>Prolapsed cord — cord slips through cervix before baby</a:t>
+              <a:t>Prolapsed cord: cord slips through cervix before baby</a:t>
             </a:r>
             <a:endParaRPr lang="en-US" sz="1400" dirty="0"/>
           </a:p>
@@ -33319,7 +33247,7 @@
                 <a:ea typeface="Arial" pitchFamily="34" charset="-122"/>
                 <a:cs typeface="Arial" pitchFamily="34" charset="-120"/>
               </a:rPr>
-              <a:t>Placental abruption — placenta separates prematurely</a:t>
+              <a:t>Placental abruption: placenta separates prematurely</a:t>
             </a:r>
             <a:endParaRPr lang="en-US" sz="1400" dirty="0"/>
           </a:p>
@@ -33344,7 +33272,7 @@
                 <a:ea typeface="Arial" pitchFamily="34" charset="-122"/>
                 <a:cs typeface="Arial" pitchFamily="34" charset="-120"/>
               </a:rPr>
-              <a:t>Shoulder dystocia — shoulders stuck after head delivers</a:t>
+              <a:t>Shoulder dystocia: shoulders stuck after head delivers</a:t>
             </a:r>
             <a:endParaRPr lang="en-US" sz="1400" dirty="0"/>
           </a:p>
@@ -33369,7 +33297,7 @@
                 <a:ea typeface="Arial" pitchFamily="34" charset="-122"/>
                 <a:cs typeface="Arial" pitchFamily="34" charset="-120"/>
               </a:rPr>
-              <a:t>Uterine rupture — rare but catastrophic</a:t>
+              <a:t>Uterine rupture: rare but catastrophic</a:t>
             </a:r>
             <a:endParaRPr lang="en-US" sz="1400" dirty="0"/>
           </a:p>
@@ -33550,7 +33478,7 @@
                 <a:ea typeface="Georgia" pitchFamily="34" charset="-122"/>
                 <a:cs typeface="Georgia" pitchFamily="34" charset="-120"/>
               </a:rPr>
-              <a:t>OP Position — Back Labor</a:t>
+              <a:t>OP Position: Back Labor</a:t>
             </a:r>
             <a:endParaRPr lang="en-US" sz="3200" dirty="0"/>
           </a:p>
@@ -33589,7 +33517,7 @@
                 <a:ea typeface="Georgia" pitchFamily="34" charset="-122"/>
                 <a:cs typeface="Georgia" pitchFamily="34" charset="-120"/>
               </a:rPr>
-              <a:t>15–30% of babies start labor posterior. Most rotate. Your positioning work matters.</a:t>
+              <a:t>15-30% of babies start labor posterior. Most rotate. Your positioning work matters.</a:t>
             </a:r>
             <a:endParaRPr lang="en-US" sz="1400" dirty="0"/>
           </a:p>
@@ -33603,7 +33531,7 @@
         </p:nvSpPr>
         <p:spPr>
           <a:xfrm>
-            <a:off x="914400" y="1536192"/>
+            <a:off x="914400" y="1444752"/>
             <a:ext cx="7315200" cy="3310128"/>
           </a:xfrm>
           <a:prstGeom prst="rect">
@@ -33661,7 +33589,7 @@
         </p:nvSpPr>
         <p:spPr>
           <a:xfrm>
-            <a:off x="1231075" y="1645920"/>
+            <a:off x="1231075" y="1554480"/>
             <a:ext cx="6650181" cy="256032"/>
           </a:xfrm>
           <a:prstGeom prst="rect">
@@ -33700,7 +33628,7 @@
         </p:nvSpPr>
         <p:spPr>
           <a:xfrm>
-            <a:off x="1231075" y="1956816"/>
+            <a:off x="1231075" y="1865376"/>
             <a:ext cx="6681849" cy="2743200"/>
           </a:xfrm>
           <a:prstGeom prst="rect">
@@ -33733,7 +33661,7 @@
                 <a:ea typeface="Arial" pitchFamily="34" charset="-122"/>
                 <a:cs typeface="Arial" pitchFamily="34" charset="-120"/>
               </a:rPr>
-              <a:t>OP — baby faces front</a:t>
+              <a:t>OP: baby faces front</a:t>
             </a:r>
             <a:endParaRPr lang="en-US" sz="1400" dirty="0"/>
           </a:p>
@@ -33833,7 +33761,7 @@
                 <a:ea typeface="Arial" pitchFamily="34" charset="-122"/>
                 <a:cs typeface="Arial" pitchFamily="34" charset="-120"/>
               </a:rPr>
-              <a:t>Only 5–8% remain OP at delivery</a:t>
+              <a:t>Only 5-8% remain OP at delivery</a:t>
             </a:r>
             <a:endParaRPr lang="en-US" sz="1400" dirty="0"/>
           </a:p>
@@ -33968,7 +33896,7 @@
                 <a:ea typeface="Georgia" pitchFamily="34" charset="-122"/>
                 <a:cs typeface="Georgia" pitchFamily="34" charset="-120"/>
               </a:rPr>
-              <a:t>OP Position — Back Labor</a:t>
+              <a:t>OP Position: Back Labor</a:t>
             </a:r>
             <a:endParaRPr lang="en-US" sz="3200" dirty="0"/>
           </a:p>
@@ -34007,7 +33935,7 @@
                 <a:ea typeface="Georgia" pitchFamily="34" charset="-122"/>
                 <a:cs typeface="Georgia" pitchFamily="34" charset="-120"/>
               </a:rPr>
-              <a:t>15–30% of babies start labor posterior. Most rotate. Your positioning work matters.</a:t>
+              <a:t>15-30% of babies start labor posterior. Most rotate. Your positioning work matters.</a:t>
             </a:r>
             <a:endParaRPr lang="en-US" sz="1400" dirty="0"/>
           </a:p>
@@ -34151,7 +34079,7 @@
                 <a:ea typeface="Arial" pitchFamily="34" charset="-122"/>
                 <a:cs typeface="Arial" pitchFamily="34" charset="-120"/>
               </a:rPr>
-              <a:t>Hands-and-knees — opens back of pelvis, best for 30+ min</a:t>
+              <a:t>Hands-and-knees: opens back of pelvis, best for 30+ min</a:t>
             </a:r>
             <a:endParaRPr lang="en-US" sz="1400" dirty="0"/>
           </a:p>
@@ -34251,7 +34179,7 @@
                 <a:ea typeface="Arial" pitchFamily="34" charset="-122"/>
                 <a:cs typeface="Arial" pitchFamily="34" charset="-120"/>
               </a:rPr>
-              <a:t>Avoid reclining — gravity works against rotation</a:t>
+              <a:t>Avoid reclining: gravity works against rotation</a:t>
             </a:r>
             <a:endParaRPr lang="en-US" sz="1400" dirty="0"/>
           </a:p>
@@ -34265,8 +34193,8 @@
         </p:nvSpPr>
         <p:spPr>
           <a:xfrm>
-            <a:off x="914400" y="3602736"/>
-            <a:ext cx="7315200" cy="1243584"/>
+            <a:off x="914400" y="3657601"/>
+            <a:ext cx="7315200" cy="1097279"/>
           </a:xfrm>
           <a:prstGeom prst="rect">
             <a:avLst/>
@@ -34348,7 +34276,7 @@
                 <a:ea typeface="Arial" pitchFamily="34" charset="-122"/>
                 <a:cs typeface="Arial" pitchFamily="34" charset="-120"/>
               </a:rPr>
-              <a:t>Doula Script — Back Labor</a:t>
+              <a:t>Doula Script: Back Labor</a:t>
             </a:r>
             <a:endParaRPr lang="en-US" sz="1400" dirty="0"/>
           </a:p>
@@ -34362,7 +34290,7 @@
         </p:nvSpPr>
         <p:spPr>
           <a:xfrm>
-            <a:off x="1199407" y="4023360"/>
+            <a:off x="1199407" y="3822193"/>
             <a:ext cx="6713516" cy="768096"/>
           </a:xfrm>
           <a:prstGeom prst="rect">
@@ -34571,7 +34499,7 @@
                 <a:ea typeface="Georgia" pitchFamily="34" charset="-122"/>
                 <a:cs typeface="Georgia" pitchFamily="34" charset="-120"/>
               </a:rPr>
-              <a:t>Prolonged Labor — When Exhaustion Becomes the Risk</a:t>
+              <a:t>Prolonged Labor: When Exhaustion Becomes the Risk</a:t>
             </a:r>
             <a:endParaRPr lang="en-US" sz="2400" dirty="0"/>
           </a:p>
@@ -34624,7 +34552,7 @@
         </p:nvSpPr>
         <p:spPr>
           <a:xfrm>
-            <a:off x="914400" y="1536192"/>
+            <a:off x="914400" y="1444752"/>
             <a:ext cx="7315200" cy="3310128"/>
           </a:xfrm>
           <a:prstGeom prst="rect">
@@ -34682,7 +34610,7 @@
         </p:nvSpPr>
         <p:spPr>
           <a:xfrm>
-            <a:off x="1231075" y="1645920"/>
+            <a:off x="1231075" y="1554480"/>
             <a:ext cx="6650181" cy="256032"/>
           </a:xfrm>
           <a:prstGeom prst="rect">
@@ -34721,7 +34649,7 @@
         </p:nvSpPr>
         <p:spPr>
           <a:xfrm>
-            <a:off x="1231075" y="1956816"/>
+            <a:off x="1231075" y="1865376"/>
             <a:ext cx="6681849" cy="2743200"/>
           </a:xfrm>
           <a:prstGeom prst="rect">
@@ -34989,7 +34917,7 @@
                 <a:ea typeface="Georgia" pitchFamily="34" charset="-122"/>
                 <a:cs typeface="Georgia" pitchFamily="34" charset="-120"/>
               </a:rPr>
-              <a:t>Prolonged Labor — When Exhaustion Becomes the Risk</a:t>
+              <a:t>Prolonged Labor: When Exhaustion Becomes the Risk</a:t>
             </a:r>
             <a:endParaRPr lang="en-US" sz="2400" dirty="0"/>
           </a:p>
@@ -35042,8 +34970,8 @@
         </p:nvSpPr>
         <p:spPr>
           <a:xfrm>
-            <a:off x="914400" y="1536192"/>
-            <a:ext cx="7315200" cy="1883664"/>
+            <a:off x="914400" y="1792224"/>
+            <a:ext cx="7315200" cy="1719072"/>
           </a:xfrm>
           <a:prstGeom prst="rect">
             <a:avLst/>
@@ -35125,7 +35053,7 @@
                 <a:ea typeface="Arial" pitchFamily="34" charset="-122"/>
                 <a:cs typeface="Arial" pitchFamily="34" charset="-120"/>
               </a:rPr>
-              <a:t>Clinical Note — When Intervention Becomes Necessary</a:t>
+              <a:t>Clinical Note: When Intervention Becomes Necessary</a:t>
             </a:r>
             <a:endParaRPr lang="en-US" sz="1400" dirty="0"/>
           </a:p>
@@ -35181,8 +35109,8 @@
         </p:nvSpPr>
         <p:spPr>
           <a:xfrm>
-            <a:off x="914400" y="3529584"/>
-            <a:ext cx="7315200" cy="1316736"/>
+            <a:off x="914400" y="3602737"/>
+            <a:ext cx="7315200" cy="1152143"/>
           </a:xfrm>
           <a:prstGeom prst="rect">
             <a:avLst/>
@@ -35264,7 +35192,7 @@
                 <a:ea typeface="Arial" pitchFamily="34" charset="-122"/>
                 <a:cs typeface="Arial" pitchFamily="34" charset="-120"/>
               </a:rPr>
-              <a:t>Doula Script — When Intervention Is Recommended</a:t>
+              <a:t>Doula Script: When Intervention Is Recommended</a:t>
             </a:r>
             <a:endParaRPr lang="en-US" sz="1400" dirty="0"/>
           </a:p>
@@ -35278,7 +35206,7 @@
         </p:nvSpPr>
         <p:spPr>
           <a:xfrm>
-            <a:off x="1199407" y="3968496"/>
+            <a:off x="1199407" y="3767328"/>
             <a:ext cx="6713516" cy="822960"/>
           </a:xfrm>
           <a:prstGeom prst="rect">
@@ -35487,7 +35415,7 @@
                 <a:ea typeface="Georgia" pitchFamily="34" charset="-122"/>
                 <a:cs typeface="Georgia" pitchFamily="34" charset="-120"/>
               </a:rPr>
-              <a:t>Shoulder Dystocia — Get Out of the Way</a:t>
+              <a:t>Shoulder Dystocia: Get Out of the Way</a:t>
             </a:r>
             <a:endParaRPr lang="en-US" sz="2800" dirty="0"/>
           </a:p>
@@ -35526,7 +35454,7 @@
                 <a:ea typeface="Georgia" pitchFamily="34" charset="-122"/>
                 <a:cs typeface="Georgia" pitchFamily="34" charset="-120"/>
               </a:rPr>
-              <a:t>0.5–1.5% of vaginal births. Rare, but not so rare that you won’t encounter it.</a:t>
+              <a:t>0.5-1.5% of vaginal births. Rare, but not so rare that you won’t encounter it.</a:t>
             </a:r>
             <a:endParaRPr lang="en-US" sz="1400" dirty="0"/>
           </a:p>
@@ -35540,7 +35468,7 @@
         </p:nvSpPr>
         <p:spPr>
           <a:xfrm>
-            <a:off x="914400" y="1536192"/>
+            <a:off x="914400" y="1444752"/>
             <a:ext cx="7315200" cy="3310128"/>
           </a:xfrm>
           <a:prstGeom prst="rect">
@@ -35598,7 +35526,7 @@
         </p:nvSpPr>
         <p:spPr>
           <a:xfrm>
-            <a:off x="1231075" y="1645920"/>
+            <a:off x="1231075" y="1554480"/>
             <a:ext cx="6650181" cy="256032"/>
           </a:xfrm>
           <a:prstGeom prst="rect">
@@ -35637,7 +35565,7 @@
         </p:nvSpPr>
         <p:spPr>
           <a:xfrm>
-            <a:off x="1231075" y="1956816"/>
+            <a:off x="1231075" y="1865376"/>
             <a:ext cx="6681849" cy="2743200"/>
           </a:xfrm>
           <a:prstGeom prst="rect">
@@ -35695,7 +35623,7 @@
                 <a:ea typeface="Arial" pitchFamily="34" charset="-122"/>
                 <a:cs typeface="Arial" pitchFamily="34" charset="-120"/>
               </a:rPr>
-              <a:t>Cord compressed — baby cannot breathe</a:t>
+              <a:t>Cord compressed: baby cannot breathe</a:t>
             </a:r>
             <a:endParaRPr lang="en-US" sz="1400" dirty="0"/>
           </a:p>
@@ -35720,7 +35648,7 @@
                 <a:ea typeface="Arial" pitchFamily="34" charset="-122"/>
                 <a:cs typeface="Arial" pitchFamily="34" charset="-120"/>
               </a:rPr>
-              <a:t>Must be delivered within 4–5 min</a:t>
+              <a:t>Must be delivered within 4-5 min</a:t>
             </a:r>
             <a:endParaRPr lang="en-US" sz="1400" dirty="0"/>
           </a:p>
@@ -35745,7 +35673,7 @@
                 <a:ea typeface="Arial" pitchFamily="34" charset="-122"/>
                 <a:cs typeface="Arial" pitchFamily="34" charset="-120"/>
               </a:rPr>
-              <a:t>"Turtle sign" — head retracts</a:t>
+              <a:t>"Turtle sign": head retracts</a:t>
             </a:r>
             <a:endParaRPr lang="en-US" sz="1400" dirty="0"/>
           </a:p>
@@ -35944,7 +35872,7 @@
                 <a:ea typeface="Georgia" pitchFamily="34" charset="-122"/>
                 <a:cs typeface="Georgia" pitchFamily="34" charset="-120"/>
               </a:rPr>
-              <a:t>The longest phase — and often the hardest to support because it can last hours or days.</a:t>
+              <a:t>The longest phase, and often the hardest to support because it can last hours or days.</a:t>
             </a:r>
             <a:endParaRPr lang="en-US" sz="1400" dirty="0"/>
           </a:p>
@@ -35958,8 +35886,8 @@
         </p:nvSpPr>
         <p:spPr>
           <a:xfrm>
-            <a:off x="914400" y="1536192"/>
-            <a:ext cx="7315200" cy="3364992"/>
+            <a:off x="914400" y="1600200"/>
+            <a:ext cx="7315200" cy="3154679"/>
           </a:xfrm>
           <a:prstGeom prst="rect">
             <a:avLst/>
@@ -36055,7 +35983,7 @@
         </p:nvSpPr>
         <p:spPr>
           <a:xfrm>
-            <a:off x="1199407" y="1975104"/>
+            <a:off x="1199407" y="1764793"/>
             <a:ext cx="6713516" cy="2011680"/>
           </a:xfrm>
           <a:prstGeom prst="rect">
@@ -36083,7 +36011,7 @@
                 <a:ea typeface="Georgia" pitchFamily="34" charset="-122"/>
                 <a:cs typeface="Georgia" pitchFamily="34" charset="-120"/>
               </a:rPr>
-              <a:t>You're in early labor — this is the real deal. Best thing now: rest, eat something light, let your body work. Don't time every contraction yet. Sleep if you can. Call me when they're regular and you have to focus through them.</a:t>
+              <a:t>You're in early labor: this is the real deal. Best thing now: rest, eat something light, let your body work. Don't time every contraction yet. Sleep if you can. Call me when they're regular and you have to focus through them.</a:t>
             </a:r>
             <a:endParaRPr lang="en-US" sz="1400" dirty="0"/>
           </a:p>
@@ -36097,7 +36025,7 @@
         </p:nvSpPr>
         <p:spPr>
           <a:xfrm>
-            <a:off x="1199407" y="4251960"/>
+            <a:off x="1199407" y="4041649"/>
             <a:ext cx="6713516" cy="548640"/>
           </a:xfrm>
           <a:prstGeom prst="rect">
@@ -36299,7 +36227,7 @@
                 <a:ea typeface="Georgia" pitchFamily="34" charset="-122"/>
                 <a:cs typeface="Georgia" pitchFamily="34" charset="-120"/>
               </a:rPr>
-              <a:t>Shoulder Dystocia — Get Out of the Way</a:t>
+              <a:t>Shoulder Dystocia: Get Out of the Way</a:t>
             </a:r>
             <a:endParaRPr lang="en-US" sz="2800" dirty="0"/>
           </a:p>
@@ -36338,7 +36266,7 @@
                 <a:ea typeface="Georgia" pitchFamily="34" charset="-122"/>
                 <a:cs typeface="Georgia" pitchFamily="34" charset="-120"/>
               </a:rPr>
-              <a:t>0.5–1.5% of vaginal births. Rare, but not so rare that you won’t encounter it.</a:t>
+              <a:t>0.5-1.5% of vaginal births. Rare, but not so rare that you won’t encounter it.</a:t>
             </a:r>
             <a:endParaRPr lang="en-US" sz="1400" dirty="0"/>
           </a:p>
@@ -36435,7 +36363,7 @@
                 <a:ea typeface="Arial" pitchFamily="34" charset="-122"/>
                 <a:cs typeface="Arial" pitchFamily="34" charset="-120"/>
               </a:rPr>
-              <a:t>Your role — Four things only</a:t>
+              <a:t>Your role: Four things only</a:t>
             </a:r>
             <a:endParaRPr lang="en-US" sz="1400" dirty="0"/>
           </a:p>
@@ -36482,7 +36410,7 @@
                 <a:ea typeface="Arial" pitchFamily="34" charset="-122"/>
                 <a:cs typeface="Arial" pitchFamily="34" charset="-120"/>
               </a:rPr>
-              <a:t>Move out of the way — providers need space immediately</a:t>
+              <a:t>Move out of the way: providers need space immediately</a:t>
             </a:r>
             <a:endParaRPr lang="en-US" sz="1400" dirty="0"/>
           </a:p>
@@ -36507,7 +36435,7 @@
                 <a:ea typeface="Arial" pitchFamily="34" charset="-122"/>
                 <a:cs typeface="Arial" pitchFamily="34" charset="-120"/>
               </a:rPr>
-              <a:t>Stay calm — your client feels your energy</a:t>
+              <a:t>Stay calm: your client feels your energy</a:t>
             </a:r>
             <a:endParaRPr lang="en-US" sz="1400" dirty="0"/>
           </a:p>
@@ -36571,8 +36499,8 @@
         </p:nvSpPr>
         <p:spPr>
           <a:xfrm>
-            <a:off x="914400" y="3474720"/>
-            <a:ext cx="7315200" cy="1371600"/>
+            <a:off x="914400" y="3529584"/>
+            <a:ext cx="7315200" cy="1225295"/>
           </a:xfrm>
           <a:prstGeom prst="rect">
             <a:avLst/>
@@ -36654,7 +36582,7 @@
                 <a:ea typeface="Arial" pitchFamily="34" charset="-122"/>
                 <a:cs typeface="Arial" pitchFamily="34" charset="-120"/>
               </a:rPr>
-              <a:t>After Birth — What Families Need</a:t>
+              <a:t>After Birth: What Families Need</a:t>
             </a:r>
             <a:endParaRPr lang="en-US" sz="1400" dirty="0"/>
           </a:p>
@@ -36668,7 +36596,7 @@
         </p:nvSpPr>
         <p:spPr>
           <a:xfrm>
-            <a:off x="1199407" y="3895344"/>
+            <a:off x="1199407" y="3694176"/>
             <a:ext cx="6713516" cy="896112"/>
           </a:xfrm>
           <a:prstGeom prst="rect">
@@ -36906,7 +36834,7 @@
                 <a:ea typeface="Georgia" pitchFamily="34" charset="-122"/>
                 <a:cs typeface="Georgia" pitchFamily="34" charset="-120"/>
               </a:rPr>
-              <a:t>Cesarean Birth — Planned vs. Emergent</a:t>
+              <a:t>Cesarean Birth: Planned vs. Emergent</a:t>
             </a:r>
             <a:endParaRPr lang="en-US" sz="2800" dirty="0"/>
           </a:p>
@@ -36959,7 +36887,7 @@
         </p:nvSpPr>
         <p:spPr>
           <a:xfrm>
-            <a:off x="914400" y="1536192"/>
+            <a:off x="914400" y="1444752"/>
             <a:ext cx="7315200" cy="3310128"/>
           </a:xfrm>
           <a:prstGeom prst="rect">
@@ -37017,7 +36945,7 @@
         </p:nvSpPr>
         <p:spPr>
           <a:xfrm>
-            <a:off x="1231075" y="1645920"/>
+            <a:off x="1231075" y="1554480"/>
             <a:ext cx="6650181" cy="256032"/>
           </a:xfrm>
           <a:prstGeom prst="rect">
@@ -37056,7 +36984,7 @@
         </p:nvSpPr>
         <p:spPr>
           <a:xfrm>
-            <a:off x="1231075" y="1956816"/>
+            <a:off x="1231075" y="1865376"/>
             <a:ext cx="6681849" cy="2743200"/>
           </a:xfrm>
           <a:prstGeom prst="rect">
@@ -37349,7 +37277,7 @@
                 <a:ea typeface="Georgia" pitchFamily="34" charset="-122"/>
                 <a:cs typeface="Georgia" pitchFamily="34" charset="-120"/>
               </a:rPr>
-              <a:t>Cesarean Birth — Planned vs. Emergent</a:t>
+              <a:t>Cesarean Birth: Planned vs. Emergent</a:t>
             </a:r>
             <a:endParaRPr lang="en-US" sz="2800" dirty="0"/>
           </a:p>
@@ -37402,7 +37330,7 @@
         </p:nvSpPr>
         <p:spPr>
           <a:xfrm>
-            <a:off x="914400" y="1536192"/>
+            <a:off x="914400" y="1444752"/>
             <a:ext cx="7315200" cy="3310128"/>
           </a:xfrm>
           <a:prstGeom prst="rect">
@@ -37460,7 +37388,7 @@
         </p:nvSpPr>
         <p:spPr>
           <a:xfrm>
-            <a:off x="1231075" y="1645920"/>
+            <a:off x="1231075" y="1554480"/>
             <a:ext cx="6650181" cy="256032"/>
           </a:xfrm>
           <a:prstGeom prst="rect">
@@ -37499,7 +37427,7 @@
         </p:nvSpPr>
         <p:spPr>
           <a:xfrm>
-            <a:off x="1231075" y="1956816"/>
+            <a:off x="1231075" y="1865376"/>
             <a:ext cx="6681849" cy="2743200"/>
           </a:xfrm>
           <a:prstGeom prst="rect">
@@ -37532,7 +37460,7 @@
                 <a:ea typeface="Arial" pitchFamily="34" charset="-122"/>
                 <a:cs typeface="Arial" pitchFamily="34" charset="-120"/>
               </a:rPr>
-              <a:t>Happens fast — client may not have time to process</a:t>
+              <a:t>Happens fast: client may not have time to process</a:t>
             </a:r>
             <a:endParaRPr lang="en-US" sz="1400" dirty="0"/>
           </a:p>
@@ -37657,7 +37585,7 @@
                 <a:ea typeface="Arial" pitchFamily="34" charset="-122"/>
                 <a:cs typeface="Arial" pitchFamily="34" charset="-120"/>
               </a:rPr>
-              <a:t>Your presence in recovery is critical — don’t leave early</a:t>
+              <a:t>Your presence in recovery is critical: don’t leave early</a:t>
             </a:r>
             <a:endParaRPr lang="en-US" sz="1400" dirty="0"/>
           </a:p>
@@ -37838,7 +37766,7 @@
                 <a:ea typeface="Georgia" pitchFamily="34" charset="-122"/>
                 <a:cs typeface="Georgia" pitchFamily="34" charset="-120"/>
               </a:rPr>
-              <a:t>VBAC — Vaginal Birth After Cesarean</a:t>
+              <a:t>VBAC: Vaginal Birth After Cesarean</a:t>
             </a:r>
             <a:endParaRPr lang="en-US" sz="2800" dirty="0"/>
           </a:p>
@@ -37877,7 +37805,7 @@
                 <a:ea typeface="Georgia" pitchFamily="34" charset="-122"/>
                 <a:cs typeface="Georgia" pitchFamily="34" charset="-120"/>
               </a:rPr>
-              <a:t>72–75% success rate. Your role is informed support — not steering the decision.</a:t>
+              <a:t>72-75% success rate. Your role is informed support: not steering the decision.</a:t>
             </a:r>
             <a:endParaRPr lang="en-US" sz="1400" dirty="0"/>
           </a:p>
@@ -38021,7 +37949,7 @@
                 <a:ea typeface="Arial" pitchFamily="34" charset="-122"/>
                 <a:cs typeface="Arial" pitchFamily="34" charset="-120"/>
               </a:rPr>
-              <a:t>72–75% of VBAC attempts result in vaginal birth  ·  0.5–1% risk of uterine rupture (rare but serious)</a:t>
+              <a:t>72-75% of VBAC attempts result in vaginal birth  ·  0.5-1% risk of uterine rupture (rare but serious)</a:t>
             </a:r>
             <a:endParaRPr lang="en-US" sz="1400" dirty="0"/>
           </a:p>
@@ -38068,7 +37996,7 @@
                 <a:ea typeface="Arial" pitchFamily="34" charset="-122"/>
                 <a:cs typeface="Arial" pitchFamily="34" charset="-120"/>
               </a:rPr>
-              <a:t>Laboring naturally is preferred — Pitocin slightly increases uterine rupture risk</a:t>
+              <a:t>Laboring naturally is preferred: Pitocin slightly increases uterine rupture risk</a:t>
             </a:r>
             <a:endParaRPr lang="en-US" sz="1400" dirty="0"/>
           </a:p>
@@ -38204,7 +38132,7 @@
                 <a:ea typeface="Arial" pitchFamily="34" charset="-122"/>
                 <a:cs typeface="Arial" pitchFamily="34" charset="-120"/>
               </a:rPr>
-              <a:t>72–75% success rate</a:t>
+              <a:t>72-75% success rate</a:t>
             </a:r>
             <a:endParaRPr lang="en-US" sz="1400" dirty="0"/>
           </a:p>
@@ -39220,7 +39148,7 @@
                 <a:ea typeface="Arial" pitchFamily="34" charset="-122"/>
                 <a:cs typeface="Arial" pitchFamily="34" charset="-120"/>
               </a:rPr>
-              <a:t>What do you say to her in this moment — word for word?</a:t>
+              <a:t>What do you say to her in this moment: word for word?</a:t>
             </a:r>
             <a:endParaRPr lang="en-US" sz="1400" dirty="0"/>
           </a:p>
@@ -39270,7 +39198,7 @@
                 <a:ea typeface="Arial" pitchFamily="34" charset="-122"/>
                 <a:cs typeface="Arial" pitchFamily="34" charset="-120"/>
               </a:rPr>
-              <a:t>If she asks “Should I do it?” — how do you respond without answering the medical question?</a:t>
+              <a:t>If she asks “Should I do it?”: how do you respond without answering the medical question?</a:t>
             </a:r>
             <a:endParaRPr lang="en-US" sz="1400" dirty="0"/>
           </a:p>
@@ -39409,7 +39337,7 @@
                 <a:ea typeface="Georgia" pitchFamily="34" charset="-122"/>
                 <a:cs typeface="Georgia" pitchFamily="34" charset="-120"/>
               </a:rPr>
-              <a:t>Perinatal Loss—</a:t>
+              <a:t>Perinatal Loss:</a:t>
             </a:r>
             <a:endParaRPr lang="en-US" sz="4000" dirty="0"/>
           </a:p>
@@ -39623,7 +39551,7 @@
                 <a:ea typeface="Georgia" pitchFamily="34" charset="-122"/>
                 <a:cs typeface="Georgia" pitchFamily="34" charset="-120"/>
               </a:rPr>
-              <a:t>Why We Cover This — and What It Includes</a:t>
+              <a:t>Why We Cover This, and What It Includes</a:t>
             </a:r>
             <a:endParaRPr lang="en-US" sz="2800" dirty="0"/>
           </a:p>
@@ -39676,7 +39604,7 @@
         </p:nvSpPr>
         <p:spPr>
           <a:xfrm>
-            <a:off x="914400" y="1536192"/>
+            <a:off x="914400" y="1444752"/>
             <a:ext cx="7315200" cy="3310128"/>
           </a:xfrm>
           <a:prstGeom prst="rect">
@@ -39734,7 +39662,7 @@
         </p:nvSpPr>
         <p:spPr>
           <a:xfrm>
-            <a:off x="1231075" y="1645920"/>
+            <a:off x="1231075" y="1554480"/>
             <a:ext cx="6650181" cy="256032"/>
           </a:xfrm>
           <a:prstGeom prst="rect">
@@ -39773,7 +39701,7 @@
         </p:nvSpPr>
         <p:spPr>
           <a:xfrm>
-            <a:off x="1231075" y="1956816"/>
+            <a:off x="1231075" y="1865376"/>
             <a:ext cx="6681849" cy="2743200"/>
           </a:xfrm>
           <a:prstGeom prst="rect">
@@ -39806,7 +39734,7 @@
                 <a:ea typeface="Arial" pitchFamily="34" charset="-122"/>
                 <a:cs typeface="Arial" pitchFamily="34" charset="-120"/>
               </a:rPr>
-              <a:t>Miscarriage — before 20 weeks</a:t>
+              <a:t>Miscarriage: before 20 weeks</a:t>
             </a:r>
             <a:endParaRPr lang="en-US" sz="1400" dirty="0"/>
           </a:p>
@@ -39831,7 +39759,7 @@
                 <a:ea typeface="Arial" pitchFamily="34" charset="-122"/>
                 <a:cs typeface="Arial" pitchFamily="34" charset="-120"/>
               </a:rPr>
-              <a:t>Stillbirth — 20+ weeks</a:t>
+              <a:t>Stillbirth: 20+ weeks</a:t>
             </a:r>
             <a:endParaRPr lang="en-US" sz="1400" dirty="0"/>
           </a:p>
@@ -39856,7 +39784,7 @@
                 <a:ea typeface="Arial" pitchFamily="34" charset="-122"/>
                 <a:cs typeface="Arial" pitchFamily="34" charset="-120"/>
               </a:rPr>
-              <a:t>Neonatal death — within 28 days</a:t>
+              <a:t>Neonatal death: within 28 days</a:t>
             </a:r>
             <a:endParaRPr lang="en-US" sz="1400" dirty="0"/>
           </a:p>
@@ -39906,7 +39834,7 @@
                 <a:ea typeface="Arial" pitchFamily="34" charset="-122"/>
                 <a:cs typeface="Arial" pitchFamily="34" charset="-120"/>
               </a:rPr>
-              <a:t>TFMR — medical termination</a:t>
+              <a:t>TFMR: medical termination</a:t>
             </a:r>
             <a:endParaRPr lang="en-US" sz="1400" dirty="0"/>
           </a:p>
@@ -40066,7 +39994,7 @@
                 <a:ea typeface="Georgia" pitchFamily="34" charset="-122"/>
                 <a:cs typeface="Georgia" pitchFamily="34" charset="-120"/>
               </a:rPr>
-              <a:t>Why We Cover This — and What It Includes</a:t>
+              <a:t>Why We Cover This, and What It Includes</a:t>
             </a:r>
             <a:endParaRPr lang="en-US" sz="2800" dirty="0"/>
           </a:p>
@@ -40119,8 +40047,8 @@
         </p:nvSpPr>
         <p:spPr>
           <a:xfrm>
-            <a:off x="914400" y="1536192"/>
-            <a:ext cx="7315200" cy="3310128"/>
+            <a:off x="914400" y="1682495"/>
+            <a:ext cx="7315200" cy="3072384"/>
           </a:xfrm>
           <a:prstGeom prst="rect">
             <a:avLst/>
@@ -40216,7 +40144,7 @@
         </p:nvSpPr>
         <p:spPr>
           <a:xfrm>
-            <a:off x="1199407" y="1956816"/>
+            <a:off x="1199407" y="1847088"/>
             <a:ext cx="6681849" cy="2743200"/>
           </a:xfrm>
           <a:prstGeom prst="rect">
@@ -40249,7 +40177,7 @@
                 <a:ea typeface="Arial" pitchFamily="34" charset="-122"/>
                 <a:cs typeface="Arial" pitchFamily="34" charset="-120"/>
               </a:rPr>
-              <a:t>You WILL encounter loss during your career — it is not rare</a:t>
+              <a:t>You WILL encounter loss during your career: it is not rare</a:t>
             </a:r>
             <a:endParaRPr lang="en-US" sz="1400" dirty="0"/>
           </a:p>
@@ -40324,7 +40252,7 @@
                 <a:ea typeface="Arial" pitchFamily="34" charset="-122"/>
                 <a:cs typeface="Arial" pitchFamily="34" charset="-120"/>
               </a:rPr>
-              <a:t>You do not need to fix grief — you need to witness it</a:t>
+              <a:t>You do not need to fix grief: you need to witness it</a:t>
             </a:r>
             <a:endParaRPr lang="en-US" sz="1400" dirty="0"/>
           </a:p>
@@ -40555,7 +40483,7 @@
                 <a:ea typeface="Georgia" pitchFamily="34" charset="-122"/>
                 <a:cs typeface="Georgia" pitchFamily="34" charset="-120"/>
               </a:rPr>
-              <a:t>Language — What Helps vs. What Harms</a:t>
+              <a:t>Language: What Helps vs. What Harms</a:t>
             </a:r>
             <a:endParaRPr lang="en-US" sz="2800" dirty="0"/>
           </a:p>
@@ -40586,7 +40514,7 @@
               <a:buNone/>
             </a:pPr>
             <a:r>
-              <a:rPr lang="en-US" sz="1400" i="1" dirty="0">
+              <a:rPr lang="en-US" sz="1100" i="1" dirty="0">
                 <a:solidFill>
                   <a:srgbClr val="845995"/>
                 </a:solidFill>
@@ -40654,7 +40582,7 @@
               <a:buNone/>
             </a:pPr>
             <a:r>
-              <a:rPr lang="en-US" sz="1400" b="1" dirty="0">
+              <a:rPr lang="en-US" sz="1200" b="1" dirty="0">
                 <a:solidFill>
                   <a:srgbClr val="FFFFFF"/>
                 </a:solidFill>
@@ -40693,7 +40621,7 @@
               <a:buNone/>
             </a:pPr>
             <a:r>
-              <a:rPr lang="en-US" sz="1400" b="1" dirty="0">
+              <a:rPr lang="en-US" sz="1200" b="1" dirty="0">
                 <a:solidFill>
                   <a:srgbClr val="FFFFFF"/>
                 </a:solidFill>
@@ -40715,8 +40643,8 @@
         </p:nvSpPr>
         <p:spPr>
           <a:xfrm>
-            <a:off x="292608" y="1828800"/>
-            <a:ext cx="4224528" cy="530352"/>
+            <a:off x="292608" y="1865376"/>
+            <a:ext cx="4224528" cy="402336"/>
           </a:xfrm>
           <a:prstGeom prst="rect">
             <a:avLst/>
@@ -40744,8 +40672,8 @@
         </p:nvSpPr>
         <p:spPr>
           <a:xfrm>
-            <a:off x="4517136" y="1828800"/>
-            <a:ext cx="4334256" cy="530352"/>
+            <a:off x="4517136" y="1865376"/>
+            <a:ext cx="4334256" cy="402336"/>
           </a:xfrm>
           <a:prstGeom prst="rect">
             <a:avLst/>
@@ -40773,8 +40701,8 @@
         </p:nvSpPr>
         <p:spPr>
           <a:xfrm>
-            <a:off x="402336" y="1920240"/>
-            <a:ext cx="4005072" cy="402336"/>
+            <a:off x="402336" y="1938528"/>
+            <a:ext cx="4005072" cy="274320"/>
           </a:xfrm>
           <a:prstGeom prst="rect">
             <a:avLst/>
@@ -40790,7 +40718,7 @@
               <a:buNone/>
             </a:pPr>
             <a:r>
-              <a:rPr lang="en-US" sz="1400" i="1" dirty="0">
+              <a:rPr lang="en-US" sz="1100" i="1" dirty="0" b="0">
                 <a:solidFill>
                   <a:srgbClr val="2D2D2D"/>
                 </a:solidFill>
@@ -40812,8 +40740,8 @@
         </p:nvSpPr>
         <p:spPr>
           <a:xfrm>
-            <a:off x="4626864" y="1920240"/>
-            <a:ext cx="4114800" cy="402336"/>
+            <a:off x="4626864" y="1938528"/>
+            <a:ext cx="4114800" cy="274320"/>
           </a:xfrm>
           <a:prstGeom prst="rect">
             <a:avLst/>
@@ -40829,7 +40757,7 @@
               <a:buNone/>
             </a:pPr>
             <a:r>
-              <a:rPr lang="en-US" sz="1400" dirty="0">
+              <a:rPr lang="en-US" sz="1100" dirty="0" b="0">
                 <a:solidFill>
                   <a:srgbClr val="8B0000"/>
                 </a:solidFill>
@@ -40851,8 +40779,8 @@
         </p:nvSpPr>
         <p:spPr>
           <a:xfrm>
-            <a:off x="292608" y="2359152"/>
-            <a:ext cx="4224528" cy="530352"/>
+            <a:off x="292608" y="2286000"/>
+            <a:ext cx="4224528" cy="402336"/>
           </a:xfrm>
           <a:prstGeom prst="rect">
             <a:avLst/>
@@ -40880,8 +40808,8 @@
         </p:nvSpPr>
         <p:spPr>
           <a:xfrm>
-            <a:off x="4517136" y="2359152"/>
-            <a:ext cx="4334256" cy="530352"/>
+            <a:off x="4517136" y="2286000"/>
+            <a:ext cx="4334256" cy="402336"/>
           </a:xfrm>
           <a:prstGeom prst="rect">
             <a:avLst/>
@@ -40909,8 +40837,8 @@
         </p:nvSpPr>
         <p:spPr>
           <a:xfrm>
-            <a:off x="402336" y="2450592"/>
-            <a:ext cx="4005072" cy="402336"/>
+            <a:off x="402336" y="2359152"/>
+            <a:ext cx="4005072" cy="274320"/>
           </a:xfrm>
           <a:prstGeom prst="rect">
             <a:avLst/>
@@ -40926,7 +40854,7 @@
               <a:buNone/>
             </a:pPr>
             <a:r>
-              <a:rPr lang="en-US" sz="1400" i="1" dirty="0">
+              <a:rPr lang="en-US" sz="1100" i="1" dirty="0" b="0">
                 <a:solidFill>
                   <a:srgbClr val="2D2D2D"/>
                 </a:solidFill>
@@ -40948,8 +40876,8 @@
         </p:nvSpPr>
         <p:spPr>
           <a:xfrm>
-            <a:off x="4626864" y="2450592"/>
-            <a:ext cx="4114800" cy="402336"/>
+            <a:off x="4626864" y="2359152"/>
+            <a:ext cx="4114800" cy="274320"/>
           </a:xfrm>
           <a:prstGeom prst="rect">
             <a:avLst/>
@@ -40965,7 +40893,7 @@
               <a:buNone/>
             </a:pPr>
             <a:r>
-              <a:rPr lang="en-US" sz="1400" dirty="0">
+              <a:rPr lang="en-US" sz="1100" dirty="0" b="0">
                 <a:solidFill>
                   <a:srgbClr val="8B0000"/>
                 </a:solidFill>
@@ -40987,8 +40915,8 @@
         </p:nvSpPr>
         <p:spPr>
           <a:xfrm>
-            <a:off x="292608" y="2889504"/>
-            <a:ext cx="4224528" cy="530352"/>
+            <a:off x="292608" y="2706624"/>
+            <a:ext cx="4224528" cy="402336"/>
           </a:xfrm>
           <a:prstGeom prst="rect">
             <a:avLst/>
@@ -41016,8 +40944,8 @@
         </p:nvSpPr>
         <p:spPr>
           <a:xfrm>
-            <a:off x="4517136" y="2889504"/>
-            <a:ext cx="4334256" cy="530352"/>
+            <a:off x="4517136" y="2706624"/>
+            <a:ext cx="4334256" cy="402336"/>
           </a:xfrm>
           <a:prstGeom prst="rect">
             <a:avLst/>
@@ -41045,8 +40973,8 @@
         </p:nvSpPr>
         <p:spPr>
           <a:xfrm>
-            <a:off x="402336" y="2980944"/>
-            <a:ext cx="4005072" cy="402336"/>
+            <a:off x="402336" y="2779776"/>
+            <a:ext cx="4005072" cy="274320"/>
           </a:xfrm>
           <a:prstGeom prst="rect">
             <a:avLst/>
@@ -41062,7 +40990,7 @@
               <a:buNone/>
             </a:pPr>
             <a:r>
-              <a:rPr lang="en-US" sz="1400" i="1" dirty="0">
+              <a:rPr lang="en-US" sz="1100" i="1" dirty="0" b="0">
                 <a:solidFill>
                   <a:srgbClr val="2D2D2D"/>
                 </a:solidFill>
@@ -41084,8 +41012,8 @@
         </p:nvSpPr>
         <p:spPr>
           <a:xfrm>
-            <a:off x="4626864" y="2980944"/>
-            <a:ext cx="4114800" cy="402336"/>
+            <a:off x="4626864" y="2779776"/>
+            <a:ext cx="4114800" cy="274320"/>
           </a:xfrm>
           <a:prstGeom prst="rect">
             <a:avLst/>
@@ -41101,7 +41029,7 @@
               <a:buNone/>
             </a:pPr>
             <a:r>
-              <a:rPr lang="en-US" sz="1400" dirty="0">
+              <a:rPr lang="en-US" sz="1100" dirty="0" b="0">
                 <a:solidFill>
                   <a:srgbClr val="8B0000"/>
                 </a:solidFill>
@@ -41123,8 +41051,8 @@
         </p:nvSpPr>
         <p:spPr>
           <a:xfrm>
-            <a:off x="292608" y="3419856"/>
-            <a:ext cx="4224528" cy="530352"/>
+            <a:off x="292608" y="3127248"/>
+            <a:ext cx="4224528" cy="402336"/>
           </a:xfrm>
           <a:prstGeom prst="rect">
             <a:avLst/>
@@ -41152,8 +41080,8 @@
         </p:nvSpPr>
         <p:spPr>
           <a:xfrm>
-            <a:off x="4517136" y="3419856"/>
-            <a:ext cx="4334256" cy="530352"/>
+            <a:off x="4517136" y="3127248"/>
+            <a:ext cx="4334256" cy="402336"/>
           </a:xfrm>
           <a:prstGeom prst="rect">
             <a:avLst/>
@@ -41181,8 +41109,8 @@
         </p:nvSpPr>
         <p:spPr>
           <a:xfrm>
-            <a:off x="402336" y="3511296"/>
-            <a:ext cx="4005072" cy="402336"/>
+            <a:off x="402336" y="3200400"/>
+            <a:ext cx="4005072" cy="274320"/>
           </a:xfrm>
           <a:prstGeom prst="rect">
             <a:avLst/>
@@ -41198,7 +41126,7 @@
               <a:buNone/>
             </a:pPr>
             <a:r>
-              <a:rPr lang="en-US" sz="1400" i="1" dirty="0">
+              <a:rPr lang="en-US" sz="1100" i="1" dirty="0" b="0">
                 <a:solidFill>
                   <a:srgbClr val="2D2D2D"/>
                 </a:solidFill>
@@ -41220,8 +41148,8 @@
         </p:nvSpPr>
         <p:spPr>
           <a:xfrm>
-            <a:off x="4626864" y="3511296"/>
-            <a:ext cx="4114800" cy="402336"/>
+            <a:off x="4626864" y="3200400"/>
+            <a:ext cx="4114800" cy="274320"/>
           </a:xfrm>
           <a:prstGeom prst="rect">
             <a:avLst/>
@@ -41237,7 +41165,7 @@
               <a:buNone/>
             </a:pPr>
             <a:r>
-              <a:rPr lang="en-US" sz="1400" dirty="0">
+              <a:rPr lang="en-US" sz="1100" dirty="0" b="0">
                 <a:solidFill>
                   <a:srgbClr val="8B0000"/>
                 </a:solidFill>
@@ -41259,8 +41187,8 @@
         </p:nvSpPr>
         <p:spPr>
           <a:xfrm>
-            <a:off x="292608" y="3950208"/>
-            <a:ext cx="4224528" cy="530352"/>
+            <a:off x="292608" y="3547872"/>
+            <a:ext cx="4224528" cy="402336"/>
           </a:xfrm>
           <a:prstGeom prst="rect">
             <a:avLst/>
@@ -41288,8 +41216,8 @@
         </p:nvSpPr>
         <p:spPr>
           <a:xfrm>
-            <a:off x="4517136" y="3950208"/>
-            <a:ext cx="4334256" cy="530352"/>
+            <a:off x="4517136" y="3547872"/>
+            <a:ext cx="4334256" cy="402336"/>
           </a:xfrm>
           <a:prstGeom prst="rect">
             <a:avLst/>
@@ -41317,8 +41245,8 @@
         </p:nvSpPr>
         <p:spPr>
           <a:xfrm>
-            <a:off x="402336" y="4041648"/>
-            <a:ext cx="4005072" cy="402336"/>
+            <a:off x="402336" y="3621024"/>
+            <a:ext cx="4005072" cy="274320"/>
           </a:xfrm>
           <a:prstGeom prst="rect">
             <a:avLst/>
@@ -41334,7 +41262,7 @@
               <a:buNone/>
             </a:pPr>
             <a:r>
-              <a:rPr lang="en-US" sz="1400" i="1" dirty="0">
+              <a:rPr lang="en-US" sz="1100" i="1" dirty="0" b="0">
                 <a:solidFill>
                   <a:srgbClr val="2D2D2D"/>
                 </a:solidFill>
@@ -41356,8 +41284,8 @@
         </p:nvSpPr>
         <p:spPr>
           <a:xfrm>
-            <a:off x="4626864" y="4041648"/>
-            <a:ext cx="4114800" cy="402336"/>
+            <a:off x="4626864" y="3621024"/>
+            <a:ext cx="4114800" cy="274320"/>
           </a:xfrm>
           <a:prstGeom prst="rect">
             <a:avLst/>
@@ -41373,7 +41301,7 @@
               <a:buNone/>
             </a:pPr>
             <a:r>
-              <a:rPr lang="en-US" sz="1400" dirty="0">
+              <a:rPr lang="en-US" sz="1100" dirty="0" b="0">
                 <a:solidFill>
                   <a:srgbClr val="8B0000"/>
                 </a:solidFill>
@@ -41395,8 +41323,8 @@
         </p:nvSpPr>
         <p:spPr>
           <a:xfrm>
-            <a:off x="292608" y="4480560"/>
-            <a:ext cx="4224528" cy="530352"/>
+            <a:off x="292608" y="4389120"/>
+            <a:ext cx="4224528" cy="402336"/>
           </a:xfrm>
           <a:prstGeom prst="rect">
             <a:avLst/>
@@ -41424,8 +41352,8 @@
         </p:nvSpPr>
         <p:spPr>
           <a:xfrm>
-            <a:off x="4517136" y="4480560"/>
-            <a:ext cx="4334256" cy="530352"/>
+            <a:off x="4517136" y="3968496"/>
+            <a:ext cx="4334256" cy="402336"/>
           </a:xfrm>
           <a:prstGeom prst="rect">
             <a:avLst/>
@@ -41453,8 +41381,8 @@
         </p:nvSpPr>
         <p:spPr>
           <a:xfrm>
-            <a:off x="402336" y="4572000"/>
-            <a:ext cx="4005072" cy="402336"/>
+            <a:off x="402336" y="4462272"/>
+            <a:ext cx="4005072" cy="274320"/>
           </a:xfrm>
           <a:prstGeom prst="rect">
             <a:avLst/>
@@ -41470,7 +41398,7 @@
               <a:buNone/>
             </a:pPr>
             <a:r>
-              <a:rPr lang="en-US" sz="1200" i="1" dirty="0">
+              <a:rPr lang="en-US" sz="1100" i="1" dirty="0" b="0">
                 <a:solidFill>
                   <a:srgbClr val="2D2D2D"/>
                 </a:solidFill>
@@ -41492,8 +41420,8 @@
         </p:nvSpPr>
         <p:spPr>
           <a:xfrm>
-            <a:off x="4626864" y="4572000"/>
-            <a:ext cx="4114800" cy="402336"/>
+            <a:off x="4626864" y="4041648"/>
+            <a:ext cx="4114800" cy="274320"/>
           </a:xfrm>
           <a:prstGeom prst="rect">
             <a:avLst/>
@@ -41509,7 +41437,7 @@
               <a:buNone/>
             </a:pPr>
             <a:r>
-              <a:rPr lang="en-US" sz="1400" dirty="0">
+              <a:rPr lang="en-US" sz="1100" dirty="0" b="0">
                 <a:solidFill>
                   <a:srgbClr val="8B0000"/>
                 </a:solidFill>
@@ -41531,8 +41459,8 @@
         </p:nvSpPr>
         <p:spPr>
           <a:xfrm>
-            <a:off x="292608" y="5010912"/>
-            <a:ext cx="4224528" cy="530352"/>
+            <a:off x="292608" y="3968496"/>
+            <a:ext cx="4224528" cy="402336"/>
           </a:xfrm>
           <a:prstGeom prst="rect">
             <a:avLst/>
@@ -41560,8 +41488,8 @@
         </p:nvSpPr>
         <p:spPr>
           <a:xfrm>
-            <a:off x="4517136" y="5010912"/>
-            <a:ext cx="4334256" cy="530352"/>
+            <a:off x="4517136" y="4389120"/>
+            <a:ext cx="4334256" cy="402336"/>
           </a:xfrm>
           <a:prstGeom prst="rect">
             <a:avLst/>
@@ -41589,8 +41517,8 @@
         </p:nvSpPr>
         <p:spPr>
           <a:xfrm>
-            <a:off x="402336" y="5102352"/>
-            <a:ext cx="4005072" cy="402336"/>
+            <a:off x="402336" y="4041648"/>
+            <a:ext cx="4005072" cy="274320"/>
           </a:xfrm>
           <a:prstGeom prst="rect">
             <a:avLst/>
@@ -41606,7 +41534,7 @@
               <a:buNone/>
             </a:pPr>
             <a:r>
-              <a:rPr lang="en-US" sz="1200" i="1" dirty="0">
+              <a:rPr lang="en-US" sz="1100" i="1" dirty="0" b="0">
                 <a:solidFill>
                   <a:srgbClr val="2D2D2D"/>
                 </a:solidFill>
@@ -41628,8 +41556,8 @@
         </p:nvSpPr>
         <p:spPr>
           <a:xfrm>
-            <a:off x="4626864" y="5102352"/>
-            <a:ext cx="4114800" cy="402336"/>
+            <a:off x="4626864" y="4462272"/>
+            <a:ext cx="4114800" cy="274320"/>
           </a:xfrm>
           <a:prstGeom prst="rect">
             <a:avLst/>
@@ -41645,7 +41573,7 @@
               <a:buNone/>
             </a:pPr>
             <a:r>
-              <a:rPr lang="en-US" sz="1200" dirty="0">
+              <a:rPr lang="en-US" sz="1100" dirty="0" b="0">
                 <a:solidFill>
                   <a:srgbClr val="8B0000"/>
                 </a:solidFill>
@@ -41706,7 +41634,7 @@
         </p:nvSpPr>
         <p:spPr>
           <a:xfrm>
-            <a:off x="4754880" y="4864608"/>
+            <a:off x="4754880" y="4901184"/>
             <a:ext cx="4133088" cy="201168"/>
           </a:xfrm>
           <a:prstGeom prst="rect">
@@ -41723,7 +41651,7 @@
               <a:buNone/>
             </a:pPr>
             <a:r>
-              <a:rPr lang="en-US" sz="1200" dirty="0">
+              <a:rPr lang="en-US" sz="1100" dirty="0">
                 <a:solidFill>
                   <a:srgbClr val="8B6A9E"/>
                 </a:solidFill>
@@ -41834,7 +41762,7 @@
                 <a:ea typeface="Georgia" pitchFamily="34" charset="-122"/>
                 <a:cs typeface="Georgia" pitchFamily="34" charset="-120"/>
               </a:rPr>
-              <a:t>Your Role — Bear Witness. Use the Name. Stay.</a:t>
+              <a:t>Your Role: Bear Witness. Use the Name. Stay.</a:t>
             </a:r>
             <a:endParaRPr lang="en-US" sz="2400" dirty="0"/>
           </a:p>
@@ -41887,7 +41815,7 @@
         </p:nvSpPr>
         <p:spPr>
           <a:xfrm>
-            <a:off x="914400" y="1536192"/>
+            <a:off x="914400" y="1444752"/>
             <a:ext cx="7315200" cy="3310128"/>
           </a:xfrm>
           <a:prstGeom prst="rect">
@@ -41945,7 +41873,7 @@
         </p:nvSpPr>
         <p:spPr>
           <a:xfrm>
-            <a:off x="1231075" y="1645920"/>
+            <a:off x="1231075" y="1554480"/>
             <a:ext cx="6650181" cy="256032"/>
           </a:xfrm>
           <a:prstGeom prst="rect">
@@ -41984,7 +41912,7 @@
         </p:nvSpPr>
         <p:spPr>
           <a:xfrm>
-            <a:off x="1231075" y="1956816"/>
+            <a:off x="1231075" y="1865376"/>
             <a:ext cx="6681849" cy="2743200"/>
           </a:xfrm>
           <a:prstGeom prst="rect">
@@ -42017,7 +41945,7 @@
                 <a:ea typeface="Arial" pitchFamily="34" charset="-122"/>
                 <a:cs typeface="Arial" pitchFamily="34" charset="-120"/>
               </a:rPr>
-              <a:t>Use the baby's name — every time</a:t>
+              <a:t>Use the baby's name: every time</a:t>
             </a:r>
             <a:endParaRPr lang="en-US" sz="1400" dirty="0"/>
           </a:p>
@@ -42042,7 +41970,7 @@
                 <a:ea typeface="Arial" pitchFamily="34" charset="-122"/>
                 <a:cs typeface="Arial" pitchFamily="34" charset="-120"/>
               </a:rPr>
-              <a:t>Sit quietly — be okay with silence</a:t>
+              <a:t>Sit quietly: be okay with silence</a:t>
             </a:r>
             <a:endParaRPr lang="en-US" sz="1400" dirty="0"/>
           </a:p>
@@ -42323,7 +42251,7 @@
                 <a:ea typeface="Georgia" pitchFamily="34" charset="-122"/>
                 <a:cs typeface="Georgia" pitchFamily="34" charset="-120"/>
               </a:rPr>
-              <a:t>Real contractions. Real pain. No measurable cervical progress — yet. One of the hardest things to support.</a:t>
+              <a:t>Real contractions. Real pain. No measurable cervical progress: yet. One of the hardest things to support.</a:t>
             </a:r>
             <a:endParaRPr lang="en-US" sz="1400" dirty="0"/>
           </a:p>
@@ -42467,7 +42395,7 @@
                 <a:ea typeface="Arial" pitchFamily="34" charset="-122"/>
                 <a:cs typeface="Arial" pitchFamily="34" charset="-120"/>
               </a:rPr>
-              <a:t>Real painful contractions — but the cervix isn't changing</a:t>
+              <a:t>Real painful contractions, but the cervix isn't changing</a:t>
             </a:r>
             <a:endParaRPr lang="en-US" sz="1400" dirty="0"/>
           </a:p>
@@ -42492,7 +42420,7 @@
                 <a:ea typeface="Arial" pitchFamily="34" charset="-122"/>
                 <a:cs typeface="Arial" pitchFamily="34" charset="-120"/>
               </a:rPr>
-              <a:t>Hospital may send her home — that's hard</a:t>
+              <a:t>Hospital may send her home: that's hard</a:t>
             </a:r>
             <a:endParaRPr lang="en-US" sz="1400" dirty="0"/>
           </a:p>
@@ -42556,7 +42484,7 @@
         </p:nvSpPr>
         <p:spPr>
           <a:xfrm>
-            <a:off x="292608" y="3200400"/>
+            <a:off x="292608" y="3182112"/>
             <a:ext cx="8558784" cy="1572768"/>
           </a:xfrm>
           <a:prstGeom prst="rect">
@@ -42614,7 +42542,7 @@
         </p:nvSpPr>
         <p:spPr>
           <a:xfrm>
-            <a:off x="457200" y="3310128"/>
+            <a:off x="457200" y="3291840"/>
             <a:ext cx="8229600" cy="256032"/>
           </a:xfrm>
           <a:prstGeom prst="rect">
@@ -42653,7 +42581,7 @@
         </p:nvSpPr>
         <p:spPr>
           <a:xfrm>
-            <a:off x="475488" y="3621024"/>
+            <a:off x="475488" y="3602736"/>
             <a:ext cx="8229600" cy="1078992"/>
           </a:xfrm>
           <a:prstGeom prst="rect">
@@ -42681,7 +42609,7 @@
                 <a:ea typeface="Georgia" pitchFamily="34" charset="-122"/>
                 <a:cs typeface="Georgia" pitchFamily="34" charset="-120"/>
               </a:rPr>
-              <a:t>I know this is so frustrating. These contractions are real. They hurt. You've been at this for hours. But your body IS doing the work — softening your cervix, helping baby move. Every contraction matters. Let's focus on rest.</a:t>
+              <a:t>I know this is so frustrating. These contractions are real. They hurt. You've been at this for hours. But your body IS doing the work: softening your cervix, helping baby move. Every contraction matters. Let's focus on rest.</a:t>
             </a:r>
             <a:endParaRPr lang="en-US" sz="1400" dirty="0"/>
           </a:p>
@@ -42855,7 +42783,7 @@
                 <a:ea typeface="Georgia" pitchFamily="34" charset="-122"/>
                 <a:cs typeface="Georgia" pitchFamily="34" charset="-120"/>
               </a:rPr>
-              <a:t>Your Role — Bear Witness. Use the Name. Stay.</a:t>
+              <a:t>Your Role: Bear Witness. Use the Name. Stay.</a:t>
             </a:r>
             <a:endParaRPr lang="en-US" sz="2400" dirty="0"/>
           </a:p>
@@ -42908,7 +42836,7 @@
         </p:nvSpPr>
         <p:spPr>
           <a:xfrm>
-            <a:off x="914400" y="1536192"/>
+            <a:off x="914400" y="1444752"/>
             <a:ext cx="7315200" cy="3310128"/>
           </a:xfrm>
           <a:prstGeom prst="rect">
@@ -42966,7 +42894,7 @@
         </p:nvSpPr>
         <p:spPr>
           <a:xfrm>
-            <a:off x="1231075" y="1645920"/>
+            <a:off x="1231075" y="1554480"/>
             <a:ext cx="6650181" cy="256032"/>
           </a:xfrm>
           <a:prstGeom prst="rect">
@@ -42991,7 +42919,7 @@
                 <a:ea typeface="Arial" pitchFamily="34" charset="-122"/>
                 <a:cs typeface="Arial" pitchFamily="34" charset="-120"/>
               </a:rPr>
-              <a:t>Memory-making — offer, don’t push</a:t>
+              <a:t>Memory-making: offer, don’t push</a:t>
             </a:r>
             <a:endParaRPr lang="en-US" sz="1400" dirty="0"/>
           </a:p>
@@ -43005,7 +42933,7 @@
         </p:nvSpPr>
         <p:spPr>
           <a:xfrm>
-            <a:off x="1231075" y="1956816"/>
+            <a:off x="1231075" y="1865376"/>
             <a:ext cx="6681849" cy="2743200"/>
           </a:xfrm>
           <a:prstGeom prst="rect">
@@ -43038,7 +42966,7 @@
                 <a:ea typeface="Arial" pitchFamily="34" charset="-122"/>
                 <a:cs typeface="Arial" pitchFamily="34" charset="-120"/>
               </a:rPr>
-              <a:t>Photos — Now I Lay Me Down to Sleep (free professional photographers)</a:t>
+              <a:t>Photos: Now I Lay Me Down to Sleep (free professional photographers)</a:t>
             </a:r>
             <a:endParaRPr lang="en-US" sz="1400" dirty="0"/>
           </a:p>
@@ -43063,7 +42991,7 @@
                 <a:ea typeface="Arial" pitchFamily="34" charset="-122"/>
                 <a:cs typeface="Arial" pitchFamily="34" charset="-120"/>
               </a:rPr>
-              <a:t>Hand and footprints — ink impressions or clay castings</a:t>
+              <a:t>Hand and footprints: ink impressions or clay castings</a:t>
             </a:r>
             <a:endParaRPr lang="en-US" sz="1400" dirty="0"/>
           </a:p>
@@ -43113,7 +43041,7 @@
                 <a:ea typeface="Arial" pitchFamily="34" charset="-122"/>
                 <a:cs typeface="Arial" pitchFamily="34" charset="-120"/>
               </a:rPr>
-              <a:t>Time — uninterrupted time alone with their baby</a:t>
+              <a:t>Time: uninterrupted time alone with their baby</a:t>
             </a:r>
             <a:endParaRPr lang="en-US" sz="1400" dirty="0"/>
           </a:p>
@@ -43163,7 +43091,7 @@
                 <a:ea typeface="Arial" pitchFamily="34" charset="-122"/>
                 <a:cs typeface="Arial" pitchFamily="34" charset="-120"/>
               </a:rPr>
-              <a:t>Memory box — many hospitals provide these</a:t>
+              <a:t>Memory box: many hospitals provide these</a:t>
             </a:r>
             <a:endParaRPr lang="en-US" sz="1400" dirty="0"/>
           </a:p>
@@ -43397,7 +43325,7 @@
         </p:nvSpPr>
         <p:spPr>
           <a:xfrm>
-            <a:off x="914400" y="1536192"/>
+            <a:off x="914400" y="1444752"/>
             <a:ext cx="7315200" cy="3310128"/>
           </a:xfrm>
           <a:prstGeom prst="rect">
@@ -43455,7 +43383,7 @@
         </p:nvSpPr>
         <p:spPr>
           <a:xfrm>
-            <a:off x="1231075" y="1645920"/>
+            <a:off x="1231075" y="1554480"/>
             <a:ext cx="6650181" cy="256032"/>
           </a:xfrm>
           <a:prstGeom prst="rect">
@@ -43494,7 +43422,7 @@
         </p:nvSpPr>
         <p:spPr>
           <a:xfrm>
-            <a:off x="1231075" y="1956816"/>
+            <a:off x="1231075" y="1865376"/>
             <a:ext cx="6681849" cy="2743200"/>
           </a:xfrm>
           <a:prstGeom prst="rect">
@@ -43577,7 +43505,7 @@
                 <a:ea typeface="Arial" pitchFamily="34" charset="-122"/>
                 <a:cs typeface="Arial" pitchFamily="34" charset="-120"/>
               </a:rPr>
-              <a:t>Journal privately — not social media</a:t>
+              <a:t>Journal privately: not social media</a:t>
             </a:r>
             <a:endParaRPr lang="en-US" sz="1400" dirty="0"/>
           </a:p>
@@ -43815,8 +43743,8 @@
         </p:nvSpPr>
         <p:spPr>
           <a:xfrm>
-            <a:off x="914400" y="1536192"/>
-            <a:ext cx="7315200" cy="1664208"/>
+            <a:off x="914400" y="1792224"/>
+            <a:ext cx="7315200" cy="1499616"/>
           </a:xfrm>
           <a:prstGeom prst="rect">
             <a:avLst/>
@@ -44034,8 +43962,8 @@
         </p:nvSpPr>
         <p:spPr>
           <a:xfrm>
-            <a:off x="914400" y="3310128"/>
-            <a:ext cx="7315200" cy="1389888"/>
+            <a:off x="914400" y="3493008"/>
+            <a:ext cx="7315200" cy="1261872"/>
           </a:xfrm>
           <a:prstGeom prst="rect">
             <a:avLst/>
@@ -44131,7 +44059,7 @@
         </p:nvSpPr>
         <p:spPr>
           <a:xfrm>
-            <a:off x="1199407" y="3712464"/>
+            <a:off x="1199407" y="3657600"/>
             <a:ext cx="6713516" cy="932688"/>
           </a:xfrm>
           <a:prstGeom prst="rect">
@@ -44647,8 +44575,8 @@
         </p:nvSpPr>
         <p:spPr>
           <a:xfrm>
-            <a:off x="292608" y="1005840"/>
-            <a:ext cx="4114800" cy="1097280"/>
+            <a:off x="292608" y="859536"/>
+            <a:ext cx="4114800" cy="786383"/>
           </a:xfrm>
           <a:prstGeom prst="rect">
             <a:avLst/>
@@ -44676,8 +44604,8 @@
         </p:nvSpPr>
         <p:spPr>
           <a:xfrm>
-            <a:off x="292608" y="1005840"/>
-            <a:ext cx="64008" cy="1097280"/>
+            <a:off x="292608" y="859536"/>
+            <a:ext cx="64008" cy="786383"/>
           </a:xfrm>
           <a:prstGeom prst="rect">
             <a:avLst/>
@@ -44772,7 +44700,7 @@
                 <a:ea typeface="Arial" pitchFamily="34" charset="-122"/>
                 <a:cs typeface="Arial" pitchFamily="34" charset="-120"/>
               </a:rPr>
-              <a:t>There are four stages of birth and three phases of Stage 1. Get the language right — it matters in the clinical setting.</a:t>
+              <a:t>There are four stages of birth and three phases of Stage 1. Get the language right: it matters in the clinical setting.</a:t>
             </a:r>
             <a:endParaRPr lang="en-US" sz="1400" dirty="0"/>
           </a:p>
@@ -44786,8 +44714,8 @@
         </p:nvSpPr>
         <p:spPr>
           <a:xfrm>
-            <a:off x="4517136" y="1005840"/>
-            <a:ext cx="4114800" cy="1097280"/>
+            <a:off x="4517136" y="859536"/>
+            <a:ext cx="4114800" cy="786383"/>
           </a:xfrm>
           <a:prstGeom prst="rect">
             <a:avLst/>
@@ -44815,8 +44743,8 @@
         </p:nvSpPr>
         <p:spPr>
           <a:xfrm>
-            <a:off x="4517136" y="1005840"/>
-            <a:ext cx="64008" cy="1097280"/>
+            <a:off x="4517136" y="859536"/>
+            <a:ext cx="64008" cy="786383"/>
           </a:xfrm>
           <a:prstGeom prst="rect">
             <a:avLst/>
@@ -44925,8 +44853,8 @@
         </p:nvSpPr>
         <p:spPr>
           <a:xfrm>
-            <a:off x="292608" y="2194560"/>
-            <a:ext cx="4114800" cy="1097280"/>
+            <a:off x="292608" y="2185415"/>
+            <a:ext cx="4114800" cy="786384"/>
           </a:xfrm>
           <a:prstGeom prst="rect">
             <a:avLst/>
@@ -44954,8 +44882,8 @@
         </p:nvSpPr>
         <p:spPr>
           <a:xfrm>
-            <a:off x="292608" y="2194560"/>
-            <a:ext cx="64008" cy="1097280"/>
+            <a:off x="292608" y="2185415"/>
+            <a:ext cx="64008" cy="786384"/>
           </a:xfrm>
           <a:prstGeom prst="rect">
             <a:avLst/>
@@ -45064,8 +44992,8 @@
         </p:nvSpPr>
         <p:spPr>
           <a:xfrm>
-            <a:off x="4517136" y="2194560"/>
-            <a:ext cx="4114800" cy="1097280"/>
+            <a:off x="4517136" y="2185415"/>
+            <a:ext cx="4114800" cy="786384"/>
           </a:xfrm>
           <a:prstGeom prst="rect">
             <a:avLst/>
@@ -45093,8 +45021,8 @@
         </p:nvSpPr>
         <p:spPr>
           <a:xfrm>
-            <a:off x="4517136" y="2194560"/>
-            <a:ext cx="64008" cy="1097280"/>
+            <a:off x="4517136" y="2185415"/>
+            <a:ext cx="64008" cy="786384"/>
           </a:xfrm>
           <a:prstGeom prst="rect">
             <a:avLst/>
@@ -45189,7 +45117,7 @@
                 <a:ea typeface="Arial" pitchFamily="34" charset="-122"/>
                 <a:cs typeface="Arial" pitchFamily="34" charset="-120"/>
               </a:rPr>
-              <a:t>Induction is common. Your role is to support informed decision-making using BRAIN — never to steer the decision.</a:t>
+              <a:t>Induction is common. Your role is to support informed decision-making using BRAIN: never to steer the decision.</a:t>
             </a:r>
             <a:endParaRPr lang="en-US" sz="1400" dirty="0"/>
           </a:p>
@@ -45203,8 +45131,8 @@
         </p:nvSpPr>
         <p:spPr>
           <a:xfrm>
-            <a:off x="292608" y="3520440"/>
-            <a:ext cx="4114800" cy="1097280"/>
+            <a:off x="292608" y="3511295"/>
+            <a:ext cx="4114800" cy="786383"/>
           </a:xfrm>
           <a:prstGeom prst="rect">
             <a:avLst/>
@@ -45232,8 +45160,8 @@
         </p:nvSpPr>
         <p:spPr>
           <a:xfrm>
-            <a:off x="292608" y="3520440"/>
-            <a:ext cx="64008" cy="1097280"/>
+            <a:off x="292608" y="3511295"/>
+            <a:ext cx="64008" cy="786383"/>
           </a:xfrm>
           <a:prstGeom prst="rect">
             <a:avLst/>
@@ -45301,7 +45229,7 @@
         <p:spPr>
           <a:xfrm>
             <a:off x="457200" y="4059936"/>
-            <a:ext cx="3840480" cy="859536"/>
+            <a:ext cx="3840480" cy="694943"/>
           </a:xfrm>
           <a:prstGeom prst="rect">
             <a:avLst/>
@@ -45342,8 +45270,8 @@
         </p:nvSpPr>
         <p:spPr>
           <a:xfrm>
-            <a:off x="4517136" y="3520440"/>
-            <a:ext cx="4114800" cy="1097280"/>
+            <a:off x="4517136" y="3511295"/>
+            <a:ext cx="4114800" cy="786383"/>
           </a:xfrm>
           <a:prstGeom prst="rect">
             <a:avLst/>
@@ -45371,8 +45299,8 @@
         </p:nvSpPr>
         <p:spPr>
           <a:xfrm>
-            <a:off x="4517136" y="3520440"/>
-            <a:ext cx="64008" cy="1097280"/>
+            <a:off x="4517136" y="3511295"/>
+            <a:ext cx="64008" cy="786383"/>
           </a:xfrm>
           <a:prstGeom prst="rect">
             <a:avLst/>
@@ -45440,7 +45368,7 @@
         <p:spPr>
           <a:xfrm>
             <a:off x="4681728" y="4059936"/>
-            <a:ext cx="3840480" cy="859536"/>
+            <a:ext cx="3840480" cy="694943"/>
           </a:xfrm>
           <a:prstGeom prst="rect">
             <a:avLst/>
@@ -45506,7 +45434,7 @@
                 <a:ea typeface="Arial" pitchFamily="34" charset="-122"/>
                 <a:cs typeface="Arial" pitchFamily="34" charset="-120"/>
               </a:rPr>
-              <a:t>Key Takeaways — Night 2</a:t>
+              <a:t>Key Takeaways: Night 2</a:t>
             </a:r>
             <a:endParaRPr lang="en-US" sz="1200" dirty="0"/>
           </a:p>
@@ -45609,7 +45537,7 @@
               <a:buNone/>
             </a:pPr>
             <a:r>
-              <a:rPr lang="en-US" sz="2200" b="1" dirty="0">
+              <a:rPr lang="en-US" sz="3200" b="1" dirty="0">
                 <a:solidFill>
                   <a:srgbClr val="FFFFFF"/>
                 </a:solidFill>
@@ -45882,7 +45810,7 @@
                 <a:ea typeface="Georgia" pitchFamily="34" charset="-122"/>
                 <a:cs typeface="Georgia" pitchFamily="34" charset="-120"/>
               </a:rPr>
-              <a:t>2. Resource Guide — Keep Adding</a:t>
+              <a:t>2. Resource Guide: Keep Adding</a:t>
             </a:r>
             <a:endParaRPr lang="en-US" sz="1400" dirty="0"/>
           </a:p>
@@ -45938,7 +45866,7 @@
         </p:nvSpPr>
         <p:spPr>
           <a:xfrm>
-            <a:off x="548640" y="3694176"/>
+            <a:off x="548640" y="3602736"/>
             <a:ext cx="8046720" cy="1152144"/>
           </a:xfrm>
           <a:prstGeom prst="rect">
@@ -45996,7 +45924,7 @@
         </p:nvSpPr>
         <p:spPr>
           <a:xfrm>
-            <a:off x="731520" y="3822192"/>
+            <a:off x="731520" y="3730752"/>
             <a:ext cx="7680960" cy="274320"/>
           </a:xfrm>
           <a:prstGeom prst="rect">
@@ -46035,7 +45963,7 @@
         </p:nvSpPr>
         <p:spPr>
           <a:xfrm>
-            <a:off x="731520" y="4151376"/>
+            <a:off x="731520" y="4059936"/>
             <a:ext cx="7680960" cy="621792"/>
           </a:xfrm>
           <a:prstGeom prst="rect">
@@ -46166,7 +46094,7 @@
                 <a:ea typeface="Georgia" pitchFamily="34" charset="-122"/>
                 <a:cs typeface="Georgia" pitchFamily="34" charset="-120"/>
               </a:rPr>
-              <a:t>Active Labor — When Things Get Real</a:t>
+              <a:t>Active Labor: When Things Get Real</a:t>
             </a:r>
             <a:endParaRPr lang="en-US" sz="2800" dirty="0"/>
           </a:p>
@@ -46219,7 +46147,7 @@
         </p:nvSpPr>
         <p:spPr>
           <a:xfrm>
-            <a:off x="914400" y="1536192"/>
+            <a:off x="914400" y="1389887"/>
             <a:ext cx="7315200" cy="3364992"/>
           </a:xfrm>
           <a:prstGeom prst="rect">
@@ -46277,7 +46205,7 @@
         </p:nvSpPr>
         <p:spPr>
           <a:xfrm>
-            <a:off x="1231075" y="1645920"/>
+            <a:off x="1231075" y="1499616"/>
             <a:ext cx="6650181" cy="256032"/>
           </a:xfrm>
           <a:prstGeom prst="rect">
@@ -46316,7 +46244,7 @@
         </p:nvSpPr>
         <p:spPr>
           <a:xfrm>
-            <a:off x="1231075" y="1956816"/>
+            <a:off x="1231075" y="1810512"/>
             <a:ext cx="6681849" cy="2834640"/>
           </a:xfrm>
           <a:prstGeom prst="rect">
@@ -46349,7 +46277,7 @@
                 <a:ea typeface="Arial" pitchFamily="34" charset="-122"/>
                 <a:cs typeface="Arial" pitchFamily="34" charset="-120"/>
               </a:rPr>
-              <a:t>Dilation: 6–8 cm</a:t>
+              <a:t>Dilation: 6-8 cm</a:t>
             </a:r>
             <a:endParaRPr lang="en-US" sz="1400" dirty="0"/>
           </a:p>
@@ -46374,7 +46302,7 @@
                 <a:ea typeface="Arial" pitchFamily="34" charset="-122"/>
                 <a:cs typeface="Arial" pitchFamily="34" charset="-120"/>
               </a:rPr>
-              <a:t>Contractions every 3–5 min</a:t>
+              <a:t>Contractions every 3-5 min</a:t>
             </a:r>
             <a:endParaRPr lang="en-US" sz="1400" dirty="0"/>
           </a:p>
@@ -46449,7 +46377,7 @@
                 <a:ea typeface="Arial" pitchFamily="34" charset="-122"/>
                 <a:cs typeface="Arial" pitchFamily="34" charset="-120"/>
               </a:rPr>
-              <a:t>Average 1–2 cm/hour</a:t>
+              <a:t>Average 1-2 cm/hour</a:t>
             </a:r>
             <a:endParaRPr lang="en-US" sz="1400" dirty="0"/>
           </a:p>
@@ -46609,7 +46537,7 @@
                 <a:ea typeface="Georgia" pitchFamily="34" charset="-122"/>
                 <a:cs typeface="Georgia" pitchFamily="34" charset="-120"/>
               </a:rPr>
-              <a:t>Active Labor — When Things Get Real</a:t>
+              <a:t>Active Labor: When Things Get Real</a:t>
             </a:r>
             <a:endParaRPr lang="en-US" sz="2800" dirty="0"/>
           </a:p>
@@ -46662,8 +46590,8 @@
         </p:nvSpPr>
         <p:spPr>
           <a:xfrm>
-            <a:off x="914400" y="1536192"/>
-            <a:ext cx="7315200" cy="1737360"/>
+            <a:off x="914400" y="1792224"/>
+            <a:ext cx="7315200" cy="1572768"/>
           </a:xfrm>
           <a:prstGeom prst="rect">
             <a:avLst/>
@@ -46745,7 +46673,7 @@
                 <a:ea typeface="Arial" pitchFamily="34" charset="-122"/>
                 <a:cs typeface="Arial" pitchFamily="34" charset="-120"/>
               </a:rPr>
-              <a:t>Clinical Note — The ACOG 2014 Update</a:t>
+              <a:t>Clinical Note: The ACOG 2014 Update</a:t>
             </a:r>
             <a:endParaRPr lang="en-US" sz="1400" dirty="0"/>
           </a:p>
@@ -46787,7 +46715,7 @@
                 <a:ea typeface="Arial" pitchFamily="34" charset="-122"/>
                 <a:cs typeface="Arial" pitchFamily="34" charset="-120"/>
               </a:rPr>
-              <a:t>Active labor starts at 6 cm — not 4 cm like the old rule. ACOG changed this in 2014 to cut down on unneeded C-sections. If a doctor says she's 'not in active labor,' ask: is the cervix changing at all?</a:t>
+              <a:t>Active labor starts at 6 cm: not 4 cm like the old rule. ACOG changed this in 2014 to cut down on unneeded C-sections. If a doctor says she's 'not in active labor,' ask: is the cervix changing at all?</a:t>
             </a:r>
             <a:endParaRPr lang="en-US" sz="1400" dirty="0"/>
           </a:p>
@@ -46801,7 +46729,7 @@
         </p:nvSpPr>
         <p:spPr>
           <a:xfrm>
-            <a:off x="914400" y="3383280"/>
+            <a:off x="914400" y="3236976"/>
             <a:ext cx="7315200" cy="1517904"/>
           </a:xfrm>
           <a:prstGeom prst="rect">
@@ -46859,7 +46787,7 @@
         </p:nvSpPr>
         <p:spPr>
           <a:xfrm>
-            <a:off x="1231075" y="3493008"/>
+            <a:off x="1231075" y="3346703"/>
             <a:ext cx="6650181" cy="256032"/>
           </a:xfrm>
           <a:prstGeom prst="rect">
@@ -46898,7 +46826,7 @@
         </p:nvSpPr>
         <p:spPr>
           <a:xfrm>
-            <a:off x="1231075" y="3785616"/>
+            <a:off x="1231075" y="3639311"/>
             <a:ext cx="6650181" cy="1078992"/>
           </a:xfrm>
           <a:prstGeom prst="rect">
@@ -46931,7 +46859,7 @@
                 <a:ea typeface="Arial" pitchFamily="34" charset="-122"/>
                 <a:cs typeface="Arial" pitchFamily="34" charset="-120"/>
               </a:rPr>
-              <a:t>Continuous presence — don’t leave the room</a:t>
+              <a:t>Continuous presence: don’t leave the room</a:t>
             </a:r>
             <a:endParaRPr lang="en-US" sz="1400" dirty="0"/>
           </a:p>
@@ -46981,7 +46909,7 @@
                 <a:ea typeface="Arial" pitchFamily="34" charset="-122"/>
                 <a:cs typeface="Arial" pitchFamily="34" charset="-120"/>
               </a:rPr>
-              <a:t>Counter-pressure. Change positions every 20–30 min.</a:t>
+              <a:t>Counter-pressure. Change positions every 20-30 min.</a:t>
             </a:r>
             <a:endParaRPr lang="en-US" sz="1400" dirty="0"/>
           </a:p>
